--- a/BibPräsi.pptx
+++ b/BibPräsi.pptx
@@ -6,6 +6,12 @@
   </p:sldMasterIdLst>
   <p:sldIdLst>
     <p:sldId id="256" r:id="rId2"/>
+    <p:sldId id="257" r:id="rId3"/>
+    <p:sldId id="258" r:id="rId4"/>
+    <p:sldId id="259" r:id="rId5"/>
+    <p:sldId id="260" r:id="rId6"/>
+    <p:sldId id="261" r:id="rId7"/>
+    <p:sldId id="262" r:id="rId8"/>
   </p:sldIdLst>
   <p:sldSz cx="12192000" cy="6858000"/>
   <p:notesSz cx="6858000" cy="9144000"/>
@@ -104,6 +110,11 @@
       </a:defRPr>
     </a:lvl9pPr>
   </p:defaultTextStyle>
+  <p:extLst>
+    <p:ext uri="{EFAFB233-063F-42B5-8137-9DF3F51BA10A}">
+      <p15:sldGuideLst xmlns:p15="http://schemas.microsoft.com/office/powerpoint/2012/main"/>
+    </p:ext>
+  </p:extLst>
 </p:presentation>
 </file>
 
@@ -254,7 +265,7 @@
           <a:p>
             <a:fld id="{47687675-1CDB-48C0-9C87-57F4E3A33078}" type="datetimeFigureOut">
               <a:rPr lang="de-DE" smtClean="0"/>
-              <a:t>10.06.2026</a:t>
+              <a:t>12.06.2026</a:t>
             </a:fld>
             <a:endParaRPr lang="de-DE"/>
           </a:p>
@@ -452,7 +463,7 @@
           <a:p>
             <a:fld id="{47687675-1CDB-48C0-9C87-57F4E3A33078}" type="datetimeFigureOut">
               <a:rPr lang="de-DE" smtClean="0"/>
-              <a:t>10.06.2026</a:t>
+              <a:t>12.06.2026</a:t>
             </a:fld>
             <a:endParaRPr lang="de-DE"/>
           </a:p>
@@ -660,7 +671,7 @@
           <a:p>
             <a:fld id="{47687675-1CDB-48C0-9C87-57F4E3A33078}" type="datetimeFigureOut">
               <a:rPr lang="de-DE" smtClean="0"/>
-              <a:t>10.06.2026</a:t>
+              <a:t>12.06.2026</a:t>
             </a:fld>
             <a:endParaRPr lang="de-DE"/>
           </a:p>
@@ -858,7 +869,7 @@
           <a:p>
             <a:fld id="{47687675-1CDB-48C0-9C87-57F4E3A33078}" type="datetimeFigureOut">
               <a:rPr lang="de-DE" smtClean="0"/>
-              <a:t>10.06.2026</a:t>
+              <a:t>12.06.2026</a:t>
             </a:fld>
             <a:endParaRPr lang="de-DE"/>
           </a:p>
@@ -1133,7 +1144,7 @@
           <a:p>
             <a:fld id="{47687675-1CDB-48C0-9C87-57F4E3A33078}" type="datetimeFigureOut">
               <a:rPr lang="de-DE" smtClean="0"/>
-              <a:t>10.06.2026</a:t>
+              <a:t>12.06.2026</a:t>
             </a:fld>
             <a:endParaRPr lang="de-DE"/>
           </a:p>
@@ -1398,7 +1409,7 @@
           <a:p>
             <a:fld id="{47687675-1CDB-48C0-9C87-57F4E3A33078}" type="datetimeFigureOut">
               <a:rPr lang="de-DE" smtClean="0"/>
-              <a:t>10.06.2026</a:t>
+              <a:t>12.06.2026</a:t>
             </a:fld>
             <a:endParaRPr lang="de-DE"/>
           </a:p>
@@ -1810,7 +1821,7 @@
           <a:p>
             <a:fld id="{47687675-1CDB-48C0-9C87-57F4E3A33078}" type="datetimeFigureOut">
               <a:rPr lang="de-DE" smtClean="0"/>
-              <a:t>10.06.2026</a:t>
+              <a:t>12.06.2026</a:t>
             </a:fld>
             <a:endParaRPr lang="de-DE"/>
           </a:p>
@@ -1951,7 +1962,7 @@
           <a:p>
             <a:fld id="{47687675-1CDB-48C0-9C87-57F4E3A33078}" type="datetimeFigureOut">
               <a:rPr lang="de-DE" smtClean="0"/>
-              <a:t>10.06.2026</a:t>
+              <a:t>12.06.2026</a:t>
             </a:fld>
             <a:endParaRPr lang="de-DE"/>
           </a:p>
@@ -2064,7 +2075,7 @@
           <a:p>
             <a:fld id="{47687675-1CDB-48C0-9C87-57F4E3A33078}" type="datetimeFigureOut">
               <a:rPr lang="de-DE" smtClean="0"/>
-              <a:t>10.06.2026</a:t>
+              <a:t>12.06.2026</a:t>
             </a:fld>
             <a:endParaRPr lang="de-DE"/>
           </a:p>
@@ -2375,7 +2386,7 @@
           <a:p>
             <a:fld id="{47687675-1CDB-48C0-9C87-57F4E3A33078}" type="datetimeFigureOut">
               <a:rPr lang="de-DE" smtClean="0"/>
-              <a:t>10.06.2026</a:t>
+              <a:t>12.06.2026</a:t>
             </a:fld>
             <a:endParaRPr lang="de-DE"/>
           </a:p>
@@ -2663,7 +2674,7 @@
           <a:p>
             <a:fld id="{47687675-1CDB-48C0-9C87-57F4E3A33078}" type="datetimeFigureOut">
               <a:rPr lang="de-DE" smtClean="0"/>
-              <a:t>10.06.2026</a:t>
+              <a:t>12.06.2026</a:t>
             </a:fld>
             <a:endParaRPr lang="de-DE"/>
           </a:p>
@@ -2904,7 +2915,7 @@
           <a:p>
             <a:fld id="{47687675-1CDB-48C0-9C87-57F4E3A33078}" type="datetimeFigureOut">
               <a:rPr lang="de-DE" smtClean="0"/>
-              <a:t>10.06.2026</a:t>
+              <a:t>12.06.2026</a:t>
             </a:fld>
             <a:endParaRPr lang="de-DE"/>
           </a:p>
@@ -3307,6 +3318,14 @@
 <file path=ppt/slides/slide1.xml><?xml version="1.0" encoding="utf-8"?>
 <p:sld xmlns:a="http://schemas.openxmlformats.org/drawingml/2006/main" xmlns:r="http://schemas.openxmlformats.org/officeDocument/2006/relationships" xmlns:p="http://schemas.openxmlformats.org/presentationml/2006/main">
   <p:cSld>
+    <p:bg>
+      <p:bgPr>
+        <a:solidFill>
+          <a:srgbClr val="000000"/>
+        </a:solidFill>
+        <a:effectLst/>
+      </p:bgPr>
+    </p:bg>
     <p:spTree>
       <p:nvGrpSpPr>
         <p:cNvPr id="1" name=""/>
@@ -3323,6 +3342,107 @@
       </p:grpSpPr>
       <p:sp>
         <p:nvSpPr>
+          <p:cNvPr id="10" name="Rectangle 9">
+            <a:extLst>
+              <a:ext uri="{FF2B5EF4-FFF2-40B4-BE49-F238E27FC236}">
+                <a16:creationId xmlns:a16="http://schemas.microsoft.com/office/drawing/2014/main" id="{71B2258F-86CA-4D4D-8270-BC05FCDEBFB3}"/>
+              </a:ext>
+              <a:ext uri="{C183D7F6-B498-43B3-948B-1728B52AA6E4}">
+                <adec:decorative xmlns:adec="http://schemas.microsoft.com/office/drawing/2017/decorative" val="1"/>
+              </a:ext>
+            </a:extLst>
+          </p:cNvPr>
+          <p:cNvSpPr>
+            <a:spLocks noGrp="1" noRot="1" noChangeAspect="1" noMove="1" noResize="1" noEditPoints="1" noAdjustHandles="1" noChangeArrowheads="1" noChangeShapeType="1" noTextEdit="1"/>
+          </p:cNvSpPr>
+          <p:nvPr>
+            <p:extLst>
+              <p:ext uri="{386F3935-93C4-4BCD-93E2-E3B085C9AB24}">
+                <p16:designElem xmlns:p16="http://schemas.microsoft.com/office/powerpoint/2015/main" val="1"/>
+              </p:ext>
+            </p:extLst>
+          </p:nvPr>
+        </p:nvSpPr>
+        <p:spPr>
+          <a:xfrm>
+            <a:off x="0" y="0"/>
+            <a:ext cx="12192000" cy="6857999"/>
+          </a:xfrm>
+          <a:prstGeom prst="rect">
+            <a:avLst/>
+          </a:prstGeom>
+          <a:solidFill>
+            <a:srgbClr val="000000"/>
+          </a:solidFill>
+          <a:ln>
+            <a:noFill/>
+          </a:ln>
+        </p:spPr>
+        <p:style>
+          <a:lnRef idx="2">
+            <a:schemeClr val="accent1">
+              <a:shade val="50000"/>
+            </a:schemeClr>
+          </a:lnRef>
+          <a:fillRef idx="1">
+            <a:schemeClr val="accent1"/>
+          </a:fillRef>
+          <a:effectRef idx="0">
+            <a:schemeClr val="accent1"/>
+          </a:effectRef>
+          <a:fontRef idx="minor">
+            <a:schemeClr val="lt1"/>
+          </a:fontRef>
+        </p:style>
+        <p:txBody>
+          <a:bodyPr rtlCol="0" anchor="ctr"/>
+          <a:lstStyle/>
+          <a:p>
+            <a:pPr algn="ctr"/>
+            <a:endParaRPr lang="en-US"/>
+          </a:p>
+        </p:txBody>
+      </p:sp>
+      <p:pic>
+        <p:nvPicPr>
+          <p:cNvPr id="5" name="Grafik 4" descr="The image depicts a modern, well-lit, multi-level library with a clear layout, featuring an open staircase, contemporary furniture, and a focus on accessibility and organization.">
+            <a:extLst>
+              <a:ext uri="{FF2B5EF4-FFF2-40B4-BE49-F238E27FC236}">
+                <a16:creationId xmlns:a16="http://schemas.microsoft.com/office/drawing/2014/main" id="{2AEDEBAD-6F16-A068-4105-0F834CD99621}"/>
+              </a:ext>
+            </a:extLst>
+          </p:cNvPr>
+          <p:cNvPicPr>
+            <a:picLocks noChangeAspect="1"/>
+          </p:cNvPicPr>
+          <p:nvPr/>
+        </p:nvPicPr>
+        <p:blipFill>
+          <a:blip r:embed="rId2">
+            <a:alphaModFix amt="50000"/>
+            <a:extLst>
+              <a:ext uri="{28A0092B-C50C-407E-A947-70E740481C1C}">
+                <a14:useLocalDpi xmlns:a14="http://schemas.microsoft.com/office/drawing/2010/main" val="0"/>
+              </a:ext>
+            </a:extLst>
+          </a:blip>
+          <a:srcRect l="22222" r="1" b="1"/>
+          <a:stretch>
+            <a:fillRect/>
+          </a:stretch>
+        </p:blipFill>
+        <p:spPr>
+          <a:xfrm>
+            <a:off x="20" y="1"/>
+            <a:ext cx="12191980" cy="6857999"/>
+          </a:xfrm>
+          <a:prstGeom prst="rect">
+            <a:avLst/>
+          </a:prstGeom>
+        </p:spPr>
+      </p:pic>
+      <p:sp>
+        <p:nvSpPr>
           <p:cNvPr id="2" name="Titel 1">
             <a:extLst>
               <a:ext uri="{FF2B5EF4-FFF2-40B4-BE49-F238E27FC236}">
@@ -3337,12 +3457,26 @@
             <p:ph type="ctrTitle"/>
           </p:nvPr>
         </p:nvSpPr>
-        <p:spPr/>
-        <p:txBody>
-          <a:bodyPr/>
-          <a:lstStyle/>
-          <a:p>
-            <a:endParaRPr lang="de-DE"/>
+        <p:spPr>
+          <a:xfrm>
+            <a:off x="1524000" y="1122362"/>
+            <a:ext cx="9144000" cy="2900518"/>
+          </a:xfrm>
+        </p:spPr>
+        <p:txBody>
+          <a:bodyPr>
+            <a:normAutofit/>
+          </a:bodyPr>
+          <a:lstStyle/>
+          <a:p>
+            <a:r>
+              <a:rPr lang="de-DE">
+                <a:solidFill>
+                  <a:srgbClr val="FFFFFF"/>
+                </a:solidFill>
+              </a:rPr>
+              <a:t>Hochschulbibliothek</a:t>
+            </a:r>
           </a:p>
         </p:txBody>
       </p:sp>
@@ -3362,12 +3496,26 @@
             <p:ph type="subTitle" idx="1"/>
           </p:nvPr>
         </p:nvSpPr>
-        <p:spPr/>
-        <p:txBody>
-          <a:bodyPr/>
-          <a:lstStyle/>
-          <a:p>
-            <a:endParaRPr lang="de-DE"/>
+        <p:spPr>
+          <a:xfrm>
+            <a:off x="1524000" y="4159404"/>
+            <a:ext cx="9144000" cy="1098395"/>
+          </a:xfrm>
+        </p:spPr>
+        <p:txBody>
+          <a:bodyPr>
+            <a:normAutofit/>
+          </a:bodyPr>
+          <a:lstStyle/>
+          <a:p>
+            <a:r>
+              <a:rPr lang="de-DE">
+                <a:solidFill>
+                  <a:srgbClr val="FFFFFF"/>
+                </a:solidFill>
+              </a:rPr>
+              <a:t>Von: Mia, Mouna und Finja </a:t>
+            </a:r>
           </a:p>
         </p:txBody>
       </p:sp>
@@ -3375,6 +3523,854 @@
     <p:extLst>
       <p:ext uri="{BB962C8B-B14F-4D97-AF65-F5344CB8AC3E}">
         <p14:creationId xmlns:p14="http://schemas.microsoft.com/office/powerpoint/2010/main" val="4138183689"/>
+      </p:ext>
+    </p:extLst>
+  </p:cSld>
+  <p:clrMapOvr>
+    <a:overrideClrMapping bg1="dk1" tx1="lt1" bg2="dk2" tx2="lt2" accent1="accent1" accent2="accent2" accent3="accent3" accent4="accent4" accent5="accent5" accent6="accent6" hlink="hlink" folHlink="folHlink"/>
+  </p:clrMapOvr>
+  <p:timing>
+    <p:tnLst>
+      <p:par>
+        <p:cTn id="1" dur="indefinite" restart="never" nodeType="tmRoot">
+          <p:childTnLst>
+            <p:seq concurrent="1" nextAc="seek">
+              <p:cTn id="2" dur="indefinite" nodeType="mainSeq">
+                <p:childTnLst>
+                  <p:par>
+                    <p:cTn id="3" fill="hold">
+                      <p:stCondLst>
+                        <p:cond delay="indefinite"/>
+                        <p:cond evt="onBegin" delay="0">
+                          <p:tn val="2"/>
+                        </p:cond>
+                      </p:stCondLst>
+                      <p:childTnLst>
+                        <p:par>
+                          <p:cTn id="4" fill="hold">
+                            <p:stCondLst>
+                              <p:cond delay="0"/>
+                            </p:stCondLst>
+                            <p:childTnLst>
+                              <p:par>
+                                <p:cTn id="5" presetID="10" presetClass="entr" presetSubtype="0" fill="hold" grpId="0" nodeType="withEffect">
+                                  <p:stCondLst>
+                                    <p:cond delay="1000"/>
+                                  </p:stCondLst>
+                                  <p:iterate>
+                                    <p:tmPct val="10000"/>
+                                  </p:iterate>
+                                  <p:childTnLst>
+                                    <p:set>
+                                      <p:cBhvr>
+                                        <p:cTn id="6" dur="1" fill="hold">
+                                          <p:stCondLst>
+                                            <p:cond delay="0"/>
+                                          </p:stCondLst>
+                                        </p:cTn>
+                                        <p:tgtEl>
+                                          <p:spTgt spid="2"/>
+                                        </p:tgtEl>
+                                        <p:attrNameLst>
+                                          <p:attrName>style.visibility</p:attrName>
+                                        </p:attrNameLst>
+                                      </p:cBhvr>
+                                      <p:to>
+                                        <p:strVal val="visible"/>
+                                      </p:to>
+                                    </p:set>
+                                    <p:animEffect transition="in" filter="fade">
+                                      <p:cBhvr>
+                                        <p:cTn id="7" dur="700"/>
+                                        <p:tgtEl>
+                                          <p:spTgt spid="2"/>
+                                        </p:tgtEl>
+                                      </p:cBhvr>
+                                    </p:animEffect>
+                                  </p:childTnLst>
+                                </p:cTn>
+                              </p:par>
+                              <p:par>
+                                <p:cTn id="8" presetID="10" presetClass="entr" presetSubtype="0" fill="hold" grpId="0" nodeType="withEffect">
+                                  <p:stCondLst>
+                                    <p:cond delay="1500"/>
+                                  </p:stCondLst>
+                                  <p:iterate>
+                                    <p:tmPct val="10000"/>
+                                  </p:iterate>
+                                  <p:childTnLst>
+                                    <p:set>
+                                      <p:cBhvr>
+                                        <p:cTn id="9" dur="1" fill="hold">
+                                          <p:stCondLst>
+                                            <p:cond delay="0"/>
+                                          </p:stCondLst>
+                                        </p:cTn>
+                                        <p:tgtEl>
+                                          <p:spTgt spid="3">
+                                            <p:txEl>
+                                              <p:pRg st="0" end="0"/>
+                                            </p:txEl>
+                                          </p:spTgt>
+                                        </p:tgtEl>
+                                        <p:attrNameLst>
+                                          <p:attrName>style.visibility</p:attrName>
+                                        </p:attrNameLst>
+                                      </p:cBhvr>
+                                      <p:to>
+                                        <p:strVal val="visible"/>
+                                      </p:to>
+                                    </p:set>
+                                    <p:animEffect transition="in" filter="fade">
+                                      <p:cBhvr>
+                                        <p:cTn id="10" dur="700"/>
+                                        <p:tgtEl>
+                                          <p:spTgt spid="3">
+                                            <p:txEl>
+                                              <p:pRg st="0" end="0"/>
+                                            </p:txEl>
+                                          </p:spTgt>
+                                        </p:tgtEl>
+                                      </p:cBhvr>
+                                    </p:animEffect>
+                                  </p:childTnLst>
+                                </p:cTn>
+                              </p:par>
+                            </p:childTnLst>
+                          </p:cTn>
+                        </p:par>
+                      </p:childTnLst>
+                    </p:cTn>
+                  </p:par>
+                </p:childTnLst>
+              </p:cTn>
+              <p:prevCondLst>
+                <p:cond evt="onPrev" delay="0">
+                  <p:tgtEl>
+                    <p:sldTgt/>
+                  </p:tgtEl>
+                </p:cond>
+              </p:prevCondLst>
+              <p:nextCondLst>
+                <p:cond evt="onNext" delay="0">
+                  <p:tgtEl>
+                    <p:sldTgt/>
+                  </p:tgtEl>
+                </p:cond>
+              </p:nextCondLst>
+            </p:seq>
+          </p:childTnLst>
+        </p:cTn>
+      </p:par>
+    </p:tnLst>
+    <p:bldLst>
+      <p:bldP spid="2" grpId="0"/>
+      <p:bldP spid="3" grpId="0" build="p"/>
+    </p:bldLst>
+  </p:timing>
+</p:sld>
+</file>
+
+<file path=ppt/slides/slide2.xml><?xml version="1.0" encoding="utf-8"?>
+<p:sld xmlns:a="http://schemas.openxmlformats.org/drawingml/2006/main" xmlns:r="http://schemas.openxmlformats.org/officeDocument/2006/relationships" xmlns:p="http://schemas.openxmlformats.org/presentationml/2006/main">
+  <p:cSld>
+    <p:spTree>
+      <p:nvGrpSpPr>
+        <p:cNvPr id="1" name=""/>
+        <p:cNvGrpSpPr/>
+        <p:nvPr/>
+      </p:nvGrpSpPr>
+      <p:grpSpPr>
+        <a:xfrm>
+          <a:off x="0" y="0"/>
+          <a:ext cx="0" cy="0"/>
+          <a:chOff x="0" y="0"/>
+          <a:chExt cx="0" cy="0"/>
+        </a:xfrm>
+      </p:grpSpPr>
+      <p:sp>
+        <p:nvSpPr>
+          <p:cNvPr id="2" name="Titel 1">
+            <a:extLst>
+              <a:ext uri="{FF2B5EF4-FFF2-40B4-BE49-F238E27FC236}">
+                <a16:creationId xmlns:a16="http://schemas.microsoft.com/office/drawing/2014/main" id="{7ECEF4DB-DC5F-8A54-3DBF-65A73911929D}"/>
+              </a:ext>
+            </a:extLst>
+          </p:cNvPr>
+          <p:cNvSpPr>
+            <a:spLocks noGrp="1"/>
+          </p:cNvSpPr>
+          <p:nvPr>
+            <p:ph type="title"/>
+          </p:nvPr>
+        </p:nvSpPr>
+        <p:spPr/>
+        <p:txBody>
+          <a:bodyPr/>
+          <a:lstStyle/>
+          <a:p>
+            <a:r>
+              <a:rPr lang="de-DE" dirty="0"/>
+              <a:t>Übersicht</a:t>
+            </a:r>
+          </a:p>
+        </p:txBody>
+      </p:sp>
+      <p:sp>
+        <p:nvSpPr>
+          <p:cNvPr id="3" name="Inhaltsplatzhalter 2">
+            <a:extLst>
+              <a:ext uri="{FF2B5EF4-FFF2-40B4-BE49-F238E27FC236}">
+                <a16:creationId xmlns:a16="http://schemas.microsoft.com/office/drawing/2014/main" id="{9FD3BC8C-3FE9-65CE-7296-6B09E4524A10}"/>
+              </a:ext>
+            </a:extLst>
+          </p:cNvPr>
+          <p:cNvSpPr>
+            <a:spLocks noGrp="1"/>
+          </p:cNvSpPr>
+          <p:nvPr>
+            <p:ph idx="1"/>
+          </p:nvPr>
+        </p:nvSpPr>
+        <p:spPr/>
+        <p:txBody>
+          <a:bodyPr/>
+          <a:lstStyle/>
+          <a:p>
+            <a:r>
+              <a:rPr lang="de-DE" dirty="0"/>
+              <a:t>Problemstellung</a:t>
+            </a:r>
+          </a:p>
+          <a:p>
+            <a:r>
+              <a:rPr lang="de-DE" dirty="0"/>
+              <a:t>Use-Case Diagramm</a:t>
+            </a:r>
+          </a:p>
+          <a:p>
+            <a:r>
+              <a:rPr lang="de-DE" dirty="0"/>
+              <a:t>ER-Modell</a:t>
+            </a:r>
+          </a:p>
+          <a:p>
+            <a:r>
+              <a:rPr lang="de-DE" dirty="0"/>
+              <a:t>Logischer Datenbankenentwurf</a:t>
+            </a:r>
+          </a:p>
+          <a:p>
+            <a:r>
+              <a:rPr lang="de-DE" dirty="0"/>
+              <a:t>SQL-Datenbank</a:t>
+            </a:r>
+          </a:p>
+          <a:p>
+            <a:endParaRPr lang="de-DE" dirty="0"/>
+          </a:p>
+        </p:txBody>
+      </p:sp>
+    </p:spTree>
+    <p:extLst>
+      <p:ext uri="{BB962C8B-B14F-4D97-AF65-F5344CB8AC3E}">
+        <p14:creationId xmlns:p14="http://schemas.microsoft.com/office/powerpoint/2010/main" val="120302969"/>
+      </p:ext>
+    </p:extLst>
+  </p:cSld>
+  <p:clrMapOvr>
+    <a:masterClrMapping/>
+  </p:clrMapOvr>
+</p:sld>
+</file>
+
+<file path=ppt/slides/slide3.xml><?xml version="1.0" encoding="utf-8"?>
+<p:sld xmlns:a="http://schemas.openxmlformats.org/drawingml/2006/main" xmlns:r="http://schemas.openxmlformats.org/officeDocument/2006/relationships" xmlns:p="http://schemas.openxmlformats.org/presentationml/2006/main">
+  <p:cSld>
+    <p:spTree>
+      <p:nvGrpSpPr>
+        <p:cNvPr id="1" name=""/>
+        <p:cNvGrpSpPr/>
+        <p:nvPr/>
+      </p:nvGrpSpPr>
+      <p:grpSpPr>
+        <a:xfrm>
+          <a:off x="0" y="0"/>
+          <a:ext cx="0" cy="0"/>
+          <a:chOff x="0" y="0"/>
+          <a:chExt cx="0" cy="0"/>
+        </a:xfrm>
+      </p:grpSpPr>
+      <p:sp>
+        <p:nvSpPr>
+          <p:cNvPr id="2" name="Titel 1">
+            <a:extLst>
+              <a:ext uri="{FF2B5EF4-FFF2-40B4-BE49-F238E27FC236}">
+                <a16:creationId xmlns:a16="http://schemas.microsoft.com/office/drawing/2014/main" id="{FEEF95E8-8BDA-528E-3BFF-F946C98C23DB}"/>
+              </a:ext>
+            </a:extLst>
+          </p:cNvPr>
+          <p:cNvSpPr>
+            <a:spLocks noGrp="1"/>
+          </p:cNvSpPr>
+          <p:nvPr>
+            <p:ph type="title"/>
+          </p:nvPr>
+        </p:nvSpPr>
+        <p:spPr/>
+        <p:txBody>
+          <a:bodyPr/>
+          <a:lstStyle/>
+          <a:p>
+            <a:r>
+              <a:rPr lang="de-DE" dirty="0"/>
+              <a:t>Problemstellung</a:t>
+            </a:r>
+          </a:p>
+        </p:txBody>
+      </p:sp>
+      <p:sp>
+        <p:nvSpPr>
+          <p:cNvPr id="3" name="Inhaltsplatzhalter 2">
+            <a:extLst>
+              <a:ext uri="{FF2B5EF4-FFF2-40B4-BE49-F238E27FC236}">
+                <a16:creationId xmlns:a16="http://schemas.microsoft.com/office/drawing/2014/main" id="{D5A9DB0B-F0F5-6AFD-87FC-5941932C85EC}"/>
+              </a:ext>
+            </a:extLst>
+          </p:cNvPr>
+          <p:cNvSpPr>
+            <a:spLocks noGrp="1"/>
+          </p:cNvSpPr>
+          <p:nvPr>
+            <p:ph idx="1"/>
+          </p:nvPr>
+        </p:nvSpPr>
+        <p:spPr>
+          <a:xfrm>
+            <a:off x="780690" y="1690688"/>
+            <a:ext cx="10515600" cy="4351338"/>
+          </a:xfrm>
+        </p:spPr>
+        <p:txBody>
+          <a:bodyPr>
+            <a:normAutofit fontScale="92500" lnSpcReduction="10000"/>
+          </a:bodyPr>
+          <a:lstStyle/>
+          <a:p>
+            <a:pPr marL="0" indent="0">
+              <a:buNone/>
+            </a:pPr>
+            <a:r>
+              <a:rPr lang="de-DE" dirty="0"/>
+              <a:t>Die Fachhochschulbibliothek plant ein Online-Portal, über das Nutzer sich </a:t>
+            </a:r>
+            <a:r>
+              <a:rPr lang="de-DE" dirty="0">
+                <a:solidFill>
+                  <a:srgbClr val="FF0000"/>
+                </a:solidFill>
+              </a:rPr>
+              <a:t>registrieren</a:t>
+            </a:r>
+            <a:r>
+              <a:rPr lang="de-DE" dirty="0"/>
+              <a:t> und ein persönliches Profil anlegen können. Über dieses Portal können </a:t>
+            </a:r>
+            <a:r>
+              <a:rPr lang="de-DE" dirty="0">
+                <a:solidFill>
+                  <a:srgbClr val="FF0000"/>
+                </a:solidFill>
+              </a:rPr>
+              <a:t>Bücher und Zeitschriften ausgeliehen </a:t>
+            </a:r>
+            <a:r>
+              <a:rPr lang="de-DE" dirty="0"/>
+              <a:t>sowie deren aktuelle </a:t>
+            </a:r>
+            <a:r>
+              <a:rPr lang="de-DE" dirty="0">
+                <a:solidFill>
+                  <a:srgbClr val="FF0000"/>
+                </a:solidFill>
+              </a:rPr>
+              <a:t>Verfügbarkeit eingesehen </a:t>
+            </a:r>
+            <a:r>
+              <a:rPr lang="de-DE" dirty="0"/>
+              <a:t>werden. Außerdem besteht die Möglichkeit, </a:t>
+            </a:r>
+            <a:r>
+              <a:rPr lang="de-DE" dirty="0">
+                <a:solidFill>
+                  <a:srgbClr val="FF0000"/>
+                </a:solidFill>
+              </a:rPr>
+              <a:t>Reservierungen</a:t>
+            </a:r>
+            <a:r>
+              <a:rPr lang="de-DE" dirty="0"/>
+              <a:t> für nicht verfügbare Artikel vorzunehmen. </a:t>
+            </a:r>
+            <a:r>
+              <a:rPr lang="de-DE" dirty="0">
+                <a:solidFill>
+                  <a:srgbClr val="FF0000"/>
+                </a:solidFill>
+              </a:rPr>
+              <a:t>Digitale Medien </a:t>
+            </a:r>
+            <a:r>
+              <a:rPr lang="de-DE" dirty="0"/>
+              <a:t>können direkt über die Plattform </a:t>
+            </a:r>
+            <a:r>
+              <a:rPr lang="de-DE" dirty="0">
+                <a:solidFill>
+                  <a:srgbClr val="FF0000"/>
+                </a:solidFill>
+              </a:rPr>
+              <a:t>heruntergeladen</a:t>
+            </a:r>
+            <a:r>
+              <a:rPr lang="de-DE" dirty="0"/>
+              <a:t> werden.</a:t>
+            </a:r>
+          </a:p>
+          <a:p>
+            <a:pPr marL="0" indent="0">
+              <a:buNone/>
+            </a:pPr>
+            <a:r>
+              <a:rPr lang="de-DE" dirty="0"/>
+              <a:t>Darüber hinaus soll eine </a:t>
+            </a:r>
+            <a:r>
+              <a:rPr lang="de-DE" dirty="0">
+                <a:solidFill>
+                  <a:srgbClr val="FF0000"/>
+                </a:solidFill>
+              </a:rPr>
+              <a:t>Heimlieferung</a:t>
+            </a:r>
+            <a:r>
+              <a:rPr lang="de-DE" dirty="0"/>
+              <a:t> angeboten werden. Bei persönlicher Abholung wird der genaue </a:t>
+            </a:r>
+            <a:r>
+              <a:rPr lang="de-DE" dirty="0">
+                <a:solidFill>
+                  <a:srgbClr val="FF0000"/>
+                </a:solidFill>
+              </a:rPr>
+              <a:t>Regalstandort</a:t>
+            </a:r>
+            <a:r>
+              <a:rPr lang="de-DE" dirty="0"/>
+              <a:t> des Artikels angezeigt. Das Portal übernimmt außerdem die Verwaltung von </a:t>
+            </a:r>
+            <a:r>
+              <a:rPr lang="de-DE" dirty="0">
+                <a:solidFill>
+                  <a:srgbClr val="FF0000"/>
+                </a:solidFill>
+              </a:rPr>
+              <a:t>Leihdauer</a:t>
+            </a:r>
+            <a:r>
+              <a:rPr lang="de-DE" dirty="0"/>
+              <a:t> und </a:t>
+            </a:r>
+            <a:r>
+              <a:rPr lang="de-DE" dirty="0">
+                <a:solidFill>
+                  <a:srgbClr val="FF0000"/>
+                </a:solidFill>
+              </a:rPr>
+              <a:t>Mahnungsgebühren</a:t>
+            </a:r>
+            <a:r>
+              <a:rPr lang="de-DE" dirty="0"/>
+              <a:t>. </a:t>
+            </a:r>
+            <a:r>
+              <a:rPr lang="de-DE" dirty="0">
+                <a:solidFill>
+                  <a:srgbClr val="FF0000"/>
+                </a:solidFill>
+              </a:rPr>
+              <a:t>Bestellung</a:t>
+            </a:r>
+            <a:r>
+              <a:rPr lang="de-DE" dirty="0"/>
+              <a:t>, </a:t>
+            </a:r>
+            <a:r>
+              <a:rPr lang="de-DE" dirty="0">
+                <a:solidFill>
+                  <a:srgbClr val="FF0000"/>
+                </a:solidFill>
+              </a:rPr>
+              <a:t>Sendungsverfolgung</a:t>
+            </a:r>
+            <a:r>
+              <a:rPr lang="de-DE" dirty="0"/>
+              <a:t> und </a:t>
+            </a:r>
+            <a:r>
+              <a:rPr lang="de-DE" dirty="0">
+                <a:solidFill>
+                  <a:srgbClr val="FF0000"/>
+                </a:solidFill>
+              </a:rPr>
+              <a:t>Rechnungsstellung</a:t>
+            </a:r>
+            <a:r>
+              <a:rPr lang="de-DE" dirty="0"/>
+              <a:t> werden ebenfalls angeboten. </a:t>
+            </a:r>
+          </a:p>
+          <a:p>
+            <a:endParaRPr lang="de-DE" dirty="0"/>
+          </a:p>
+        </p:txBody>
+      </p:sp>
+    </p:spTree>
+    <p:extLst>
+      <p:ext uri="{BB962C8B-B14F-4D97-AF65-F5344CB8AC3E}">
+        <p14:creationId xmlns:p14="http://schemas.microsoft.com/office/powerpoint/2010/main" val="2748148794"/>
+      </p:ext>
+    </p:extLst>
+  </p:cSld>
+  <p:clrMapOvr>
+    <a:masterClrMapping/>
+  </p:clrMapOvr>
+</p:sld>
+</file>
+
+<file path=ppt/slides/slide4.xml><?xml version="1.0" encoding="utf-8"?>
+<p:sld xmlns:a="http://schemas.openxmlformats.org/drawingml/2006/main" xmlns:r="http://schemas.openxmlformats.org/officeDocument/2006/relationships" xmlns:p="http://schemas.openxmlformats.org/presentationml/2006/main">
+  <p:cSld>
+    <p:spTree>
+      <p:nvGrpSpPr>
+        <p:cNvPr id="1" name=""/>
+        <p:cNvGrpSpPr/>
+        <p:nvPr/>
+      </p:nvGrpSpPr>
+      <p:grpSpPr>
+        <a:xfrm>
+          <a:off x="0" y="0"/>
+          <a:ext cx="0" cy="0"/>
+          <a:chOff x="0" y="0"/>
+          <a:chExt cx="0" cy="0"/>
+        </a:xfrm>
+      </p:grpSpPr>
+      <p:sp>
+        <p:nvSpPr>
+          <p:cNvPr id="2" name="Titel 1">
+            <a:extLst>
+              <a:ext uri="{FF2B5EF4-FFF2-40B4-BE49-F238E27FC236}">
+                <a16:creationId xmlns:a16="http://schemas.microsoft.com/office/drawing/2014/main" id="{8B977070-4EB5-9C1E-392B-A253DF45AA22}"/>
+              </a:ext>
+            </a:extLst>
+          </p:cNvPr>
+          <p:cNvSpPr>
+            <a:spLocks noGrp="1"/>
+          </p:cNvSpPr>
+          <p:nvPr>
+            <p:ph type="title"/>
+          </p:nvPr>
+        </p:nvSpPr>
+        <p:spPr/>
+        <p:txBody>
+          <a:bodyPr/>
+          <a:lstStyle/>
+          <a:p>
+            <a:r>
+              <a:rPr lang="de-DE" dirty="0"/>
+              <a:t>Use-Case Diagramm</a:t>
+            </a:r>
+          </a:p>
+        </p:txBody>
+      </p:sp>
+      <p:sp>
+        <p:nvSpPr>
+          <p:cNvPr id="3" name="Inhaltsplatzhalter 2">
+            <a:extLst>
+              <a:ext uri="{FF2B5EF4-FFF2-40B4-BE49-F238E27FC236}">
+                <a16:creationId xmlns:a16="http://schemas.microsoft.com/office/drawing/2014/main" id="{229671DC-CA7B-9D88-FB5D-E4BF1DCF4616}"/>
+              </a:ext>
+            </a:extLst>
+          </p:cNvPr>
+          <p:cNvSpPr>
+            <a:spLocks noGrp="1"/>
+          </p:cNvSpPr>
+          <p:nvPr>
+            <p:ph idx="1"/>
+          </p:nvPr>
+        </p:nvSpPr>
+        <p:spPr/>
+        <p:txBody>
+          <a:bodyPr/>
+          <a:lstStyle/>
+          <a:p>
+            <a:endParaRPr lang="de-DE"/>
+          </a:p>
+        </p:txBody>
+      </p:sp>
+    </p:spTree>
+    <p:extLst>
+      <p:ext uri="{BB962C8B-B14F-4D97-AF65-F5344CB8AC3E}">
+        <p14:creationId xmlns:p14="http://schemas.microsoft.com/office/powerpoint/2010/main" val="383670552"/>
+      </p:ext>
+    </p:extLst>
+  </p:cSld>
+  <p:clrMapOvr>
+    <a:masterClrMapping/>
+  </p:clrMapOvr>
+</p:sld>
+</file>
+
+<file path=ppt/slides/slide5.xml><?xml version="1.0" encoding="utf-8"?>
+<p:sld xmlns:a="http://schemas.openxmlformats.org/drawingml/2006/main" xmlns:r="http://schemas.openxmlformats.org/officeDocument/2006/relationships" xmlns:p="http://schemas.openxmlformats.org/presentationml/2006/main">
+  <p:cSld>
+    <p:spTree>
+      <p:nvGrpSpPr>
+        <p:cNvPr id="1" name=""/>
+        <p:cNvGrpSpPr/>
+        <p:nvPr/>
+      </p:nvGrpSpPr>
+      <p:grpSpPr>
+        <a:xfrm>
+          <a:off x="0" y="0"/>
+          <a:ext cx="0" cy="0"/>
+          <a:chOff x="0" y="0"/>
+          <a:chExt cx="0" cy="0"/>
+        </a:xfrm>
+      </p:grpSpPr>
+      <p:sp>
+        <p:nvSpPr>
+          <p:cNvPr id="2" name="Titel 1">
+            <a:extLst>
+              <a:ext uri="{FF2B5EF4-FFF2-40B4-BE49-F238E27FC236}">
+                <a16:creationId xmlns:a16="http://schemas.microsoft.com/office/drawing/2014/main" id="{5BBB6FAE-8EFD-732A-B884-CC2BFCE3D1D4}"/>
+              </a:ext>
+            </a:extLst>
+          </p:cNvPr>
+          <p:cNvSpPr>
+            <a:spLocks noGrp="1"/>
+          </p:cNvSpPr>
+          <p:nvPr>
+            <p:ph type="title"/>
+          </p:nvPr>
+        </p:nvSpPr>
+        <p:spPr/>
+        <p:txBody>
+          <a:bodyPr/>
+          <a:lstStyle/>
+          <a:p>
+            <a:r>
+              <a:rPr lang="de-DE" dirty="0"/>
+              <a:t>ER-Modell</a:t>
+            </a:r>
+          </a:p>
+        </p:txBody>
+      </p:sp>
+      <p:sp>
+        <p:nvSpPr>
+          <p:cNvPr id="3" name="Inhaltsplatzhalter 2">
+            <a:extLst>
+              <a:ext uri="{FF2B5EF4-FFF2-40B4-BE49-F238E27FC236}">
+                <a16:creationId xmlns:a16="http://schemas.microsoft.com/office/drawing/2014/main" id="{EB2D0694-4539-1D95-55C2-9B4E2E19A3DD}"/>
+              </a:ext>
+            </a:extLst>
+          </p:cNvPr>
+          <p:cNvSpPr>
+            <a:spLocks noGrp="1"/>
+          </p:cNvSpPr>
+          <p:nvPr>
+            <p:ph idx="1"/>
+          </p:nvPr>
+        </p:nvSpPr>
+        <p:spPr/>
+        <p:txBody>
+          <a:bodyPr/>
+          <a:lstStyle/>
+          <a:p>
+            <a:endParaRPr lang="de-DE"/>
+          </a:p>
+        </p:txBody>
+      </p:sp>
+    </p:spTree>
+    <p:extLst>
+      <p:ext uri="{BB962C8B-B14F-4D97-AF65-F5344CB8AC3E}">
+        <p14:creationId xmlns:p14="http://schemas.microsoft.com/office/powerpoint/2010/main" val="3200518224"/>
+      </p:ext>
+    </p:extLst>
+  </p:cSld>
+  <p:clrMapOvr>
+    <a:masterClrMapping/>
+  </p:clrMapOvr>
+</p:sld>
+</file>
+
+<file path=ppt/slides/slide6.xml><?xml version="1.0" encoding="utf-8"?>
+<p:sld xmlns:a="http://schemas.openxmlformats.org/drawingml/2006/main" xmlns:r="http://schemas.openxmlformats.org/officeDocument/2006/relationships" xmlns:p="http://schemas.openxmlformats.org/presentationml/2006/main">
+  <p:cSld>
+    <p:spTree>
+      <p:nvGrpSpPr>
+        <p:cNvPr id="1" name=""/>
+        <p:cNvGrpSpPr/>
+        <p:nvPr/>
+      </p:nvGrpSpPr>
+      <p:grpSpPr>
+        <a:xfrm>
+          <a:off x="0" y="0"/>
+          <a:ext cx="0" cy="0"/>
+          <a:chOff x="0" y="0"/>
+          <a:chExt cx="0" cy="0"/>
+        </a:xfrm>
+      </p:grpSpPr>
+      <p:sp>
+        <p:nvSpPr>
+          <p:cNvPr id="2" name="Titel 1">
+            <a:extLst>
+              <a:ext uri="{FF2B5EF4-FFF2-40B4-BE49-F238E27FC236}">
+                <a16:creationId xmlns:a16="http://schemas.microsoft.com/office/drawing/2014/main" id="{AB7F007A-CDD3-0B03-2018-5B50FCE46489}"/>
+              </a:ext>
+            </a:extLst>
+          </p:cNvPr>
+          <p:cNvSpPr>
+            <a:spLocks noGrp="1"/>
+          </p:cNvSpPr>
+          <p:nvPr>
+            <p:ph type="title"/>
+          </p:nvPr>
+        </p:nvSpPr>
+        <p:spPr/>
+        <p:txBody>
+          <a:bodyPr/>
+          <a:lstStyle/>
+          <a:p>
+            <a:r>
+              <a:rPr lang="de-DE" dirty="0"/>
+              <a:t>Logischer Datenbankenentwurf</a:t>
+            </a:r>
+          </a:p>
+        </p:txBody>
+      </p:sp>
+      <p:sp>
+        <p:nvSpPr>
+          <p:cNvPr id="3" name="Inhaltsplatzhalter 2">
+            <a:extLst>
+              <a:ext uri="{FF2B5EF4-FFF2-40B4-BE49-F238E27FC236}">
+                <a16:creationId xmlns:a16="http://schemas.microsoft.com/office/drawing/2014/main" id="{CD85E2FD-6D86-6F17-972C-B3DBA1BBD723}"/>
+              </a:ext>
+            </a:extLst>
+          </p:cNvPr>
+          <p:cNvSpPr>
+            <a:spLocks noGrp="1"/>
+          </p:cNvSpPr>
+          <p:nvPr>
+            <p:ph idx="1"/>
+          </p:nvPr>
+        </p:nvSpPr>
+        <p:spPr/>
+        <p:txBody>
+          <a:bodyPr/>
+          <a:lstStyle/>
+          <a:p>
+            <a:endParaRPr lang="de-DE" dirty="0"/>
+          </a:p>
+        </p:txBody>
+      </p:sp>
+    </p:spTree>
+    <p:extLst>
+      <p:ext uri="{BB962C8B-B14F-4D97-AF65-F5344CB8AC3E}">
+        <p14:creationId xmlns:p14="http://schemas.microsoft.com/office/powerpoint/2010/main" val="1397456177"/>
+      </p:ext>
+    </p:extLst>
+  </p:cSld>
+  <p:clrMapOvr>
+    <a:masterClrMapping/>
+  </p:clrMapOvr>
+</p:sld>
+</file>
+
+<file path=ppt/slides/slide7.xml><?xml version="1.0" encoding="utf-8"?>
+<p:sld xmlns:a="http://schemas.openxmlformats.org/drawingml/2006/main" xmlns:r="http://schemas.openxmlformats.org/officeDocument/2006/relationships" xmlns:p="http://schemas.openxmlformats.org/presentationml/2006/main">
+  <p:cSld>
+    <p:spTree>
+      <p:nvGrpSpPr>
+        <p:cNvPr id="1" name=""/>
+        <p:cNvGrpSpPr/>
+        <p:nvPr/>
+      </p:nvGrpSpPr>
+      <p:grpSpPr>
+        <a:xfrm>
+          <a:off x="0" y="0"/>
+          <a:ext cx="0" cy="0"/>
+          <a:chOff x="0" y="0"/>
+          <a:chExt cx="0" cy="0"/>
+        </a:xfrm>
+      </p:grpSpPr>
+      <p:sp>
+        <p:nvSpPr>
+          <p:cNvPr id="2" name="Titel 1">
+            <a:extLst>
+              <a:ext uri="{FF2B5EF4-FFF2-40B4-BE49-F238E27FC236}">
+                <a16:creationId xmlns:a16="http://schemas.microsoft.com/office/drawing/2014/main" id="{E36216E1-F291-DBE4-2223-D0512FDF505C}"/>
+              </a:ext>
+            </a:extLst>
+          </p:cNvPr>
+          <p:cNvSpPr>
+            <a:spLocks noGrp="1"/>
+          </p:cNvSpPr>
+          <p:nvPr>
+            <p:ph type="title"/>
+          </p:nvPr>
+        </p:nvSpPr>
+        <p:spPr/>
+        <p:txBody>
+          <a:bodyPr/>
+          <a:lstStyle/>
+          <a:p>
+            <a:r>
+              <a:rPr lang="de-DE" dirty="0"/>
+              <a:t>SQL-Datenbank</a:t>
+            </a:r>
+          </a:p>
+        </p:txBody>
+      </p:sp>
+      <p:sp>
+        <p:nvSpPr>
+          <p:cNvPr id="3" name="Inhaltsplatzhalter 2">
+            <a:extLst>
+              <a:ext uri="{FF2B5EF4-FFF2-40B4-BE49-F238E27FC236}">
+                <a16:creationId xmlns:a16="http://schemas.microsoft.com/office/drawing/2014/main" id="{05616802-8963-F5B0-CFC7-5C7E4AD7F7B2}"/>
+              </a:ext>
+            </a:extLst>
+          </p:cNvPr>
+          <p:cNvSpPr>
+            <a:spLocks noGrp="1"/>
+          </p:cNvSpPr>
+          <p:nvPr>
+            <p:ph idx="1"/>
+          </p:nvPr>
+        </p:nvSpPr>
+        <p:spPr/>
+        <p:txBody>
+          <a:bodyPr/>
+          <a:lstStyle/>
+          <a:p>
+            <a:endParaRPr lang="de-DE"/>
+          </a:p>
+        </p:txBody>
+      </p:sp>
+    </p:spTree>
+    <p:extLst>
+      <p:ext uri="{BB962C8B-B14F-4D97-AF65-F5344CB8AC3E}">
+        <p14:creationId xmlns:p14="http://schemas.microsoft.com/office/powerpoint/2010/main" val="1051220518"/>
       </p:ext>
     </p:extLst>
   </p:cSld>

--- a/BibPräsi.pptx
+++ b/BibPräsi.pptx
@@ -4,14 +4,22 @@
   <p:sldMasterIdLst>
     <p:sldMasterId id="2147483648" r:id="rId1"/>
   </p:sldMasterIdLst>
+  <p:notesMasterIdLst>
+    <p:notesMasterId r:id="rId14"/>
+  </p:notesMasterIdLst>
   <p:sldIdLst>
     <p:sldId id="256" r:id="rId2"/>
     <p:sldId id="257" r:id="rId3"/>
     <p:sldId id="258" r:id="rId4"/>
     <p:sldId id="259" r:id="rId5"/>
-    <p:sldId id="260" r:id="rId6"/>
-    <p:sldId id="261" r:id="rId7"/>
-    <p:sldId id="262" r:id="rId8"/>
+    <p:sldId id="263" r:id="rId6"/>
+    <p:sldId id="264" r:id="rId7"/>
+    <p:sldId id="265" r:id="rId8"/>
+    <p:sldId id="266" r:id="rId9"/>
+    <p:sldId id="267" r:id="rId10"/>
+    <p:sldId id="260" r:id="rId11"/>
+    <p:sldId id="261" r:id="rId12"/>
+    <p:sldId id="262" r:id="rId13"/>
   </p:sldIdLst>
   <p:sldSz cx="12192000" cy="6858000"/>
   <p:notesSz cx="6858000" cy="9144000"/>
@@ -116,6 +124,871 @@
     </p:ext>
   </p:extLst>
 </p:presentation>
+</file>
+
+<file path=ppt/notesMasters/notesMaster1.xml><?xml version="1.0" encoding="utf-8"?>
+<p:notesMaster xmlns:a="http://schemas.openxmlformats.org/drawingml/2006/main" xmlns:r="http://schemas.openxmlformats.org/officeDocument/2006/relationships" xmlns:p="http://schemas.openxmlformats.org/presentationml/2006/main">
+  <p:cSld>
+    <p:bg>
+      <p:bgRef idx="1001">
+        <a:schemeClr val="bg1"/>
+      </p:bgRef>
+    </p:bg>
+    <p:spTree>
+      <p:nvGrpSpPr>
+        <p:cNvPr id="1" name=""/>
+        <p:cNvGrpSpPr/>
+        <p:nvPr/>
+      </p:nvGrpSpPr>
+      <p:grpSpPr>
+        <a:xfrm>
+          <a:off x="0" y="0"/>
+          <a:ext cx="0" cy="0"/>
+          <a:chOff x="0" y="0"/>
+          <a:chExt cx="0" cy="0"/>
+        </a:xfrm>
+      </p:grpSpPr>
+      <p:sp>
+        <p:nvSpPr>
+          <p:cNvPr id="2" name="Kopfzeilenplatzhalter 1"/>
+          <p:cNvSpPr>
+            <a:spLocks noGrp="1"/>
+          </p:cNvSpPr>
+          <p:nvPr>
+            <p:ph type="hdr" sz="quarter"/>
+          </p:nvPr>
+        </p:nvSpPr>
+        <p:spPr>
+          <a:xfrm>
+            <a:off x="0" y="0"/>
+            <a:ext cx="2971800" cy="458788"/>
+          </a:xfrm>
+          <a:prstGeom prst="rect">
+            <a:avLst/>
+          </a:prstGeom>
+        </p:spPr>
+        <p:txBody>
+          <a:bodyPr vert="horz" lIns="91440" tIns="45720" rIns="91440" bIns="45720" rtlCol="0"/>
+          <a:lstStyle>
+            <a:lvl1pPr algn="l">
+              <a:defRPr sz="1200"/>
+            </a:lvl1pPr>
+          </a:lstStyle>
+          <a:p>
+            <a:endParaRPr lang="de-DE"/>
+          </a:p>
+        </p:txBody>
+      </p:sp>
+      <p:sp>
+        <p:nvSpPr>
+          <p:cNvPr id="3" name="Datumsplatzhalter 2"/>
+          <p:cNvSpPr>
+            <a:spLocks noGrp="1"/>
+          </p:cNvSpPr>
+          <p:nvPr>
+            <p:ph type="dt" idx="1"/>
+          </p:nvPr>
+        </p:nvSpPr>
+        <p:spPr>
+          <a:xfrm>
+            <a:off x="3884613" y="0"/>
+            <a:ext cx="2971800" cy="458788"/>
+          </a:xfrm>
+          <a:prstGeom prst="rect">
+            <a:avLst/>
+          </a:prstGeom>
+        </p:spPr>
+        <p:txBody>
+          <a:bodyPr vert="horz" lIns="91440" tIns="45720" rIns="91440" bIns="45720" rtlCol="0"/>
+          <a:lstStyle>
+            <a:lvl1pPr algn="r">
+              <a:defRPr sz="1200"/>
+            </a:lvl1pPr>
+          </a:lstStyle>
+          <a:p>
+            <a:fld id="{29AB276D-0B6C-4441-8D54-6BA680AC8953}" type="datetimeFigureOut">
+              <a:rPr lang="de-DE" smtClean="0"/>
+              <a:t>12.06.2026</a:t>
+            </a:fld>
+            <a:endParaRPr lang="de-DE"/>
+          </a:p>
+        </p:txBody>
+      </p:sp>
+      <p:sp>
+        <p:nvSpPr>
+          <p:cNvPr id="4" name="Folienbildplatzhalter 3"/>
+          <p:cNvSpPr>
+            <a:spLocks noGrp="1" noRot="1" noChangeAspect="1"/>
+          </p:cNvSpPr>
+          <p:nvPr>
+            <p:ph type="sldImg" idx="2"/>
+          </p:nvPr>
+        </p:nvSpPr>
+        <p:spPr>
+          <a:xfrm>
+            <a:off x="685800" y="1143000"/>
+            <a:ext cx="5486400" cy="3086100"/>
+          </a:xfrm>
+          <a:prstGeom prst="rect">
+            <a:avLst/>
+          </a:prstGeom>
+          <a:noFill/>
+          <a:ln w="12700">
+            <a:solidFill>
+              <a:prstClr val="black"/>
+            </a:solidFill>
+          </a:ln>
+        </p:spPr>
+        <p:txBody>
+          <a:bodyPr vert="horz" lIns="91440" tIns="45720" rIns="91440" bIns="45720" rtlCol="0" anchor="ctr"/>
+          <a:lstStyle/>
+          <a:p>
+            <a:endParaRPr lang="de-DE"/>
+          </a:p>
+        </p:txBody>
+      </p:sp>
+      <p:sp>
+        <p:nvSpPr>
+          <p:cNvPr id="5" name="Notizenplatzhalter 4"/>
+          <p:cNvSpPr>
+            <a:spLocks noGrp="1"/>
+          </p:cNvSpPr>
+          <p:nvPr>
+            <p:ph type="body" sz="quarter" idx="3"/>
+          </p:nvPr>
+        </p:nvSpPr>
+        <p:spPr>
+          <a:xfrm>
+            <a:off x="685800" y="4400550"/>
+            <a:ext cx="5486400" cy="3600450"/>
+          </a:xfrm>
+          <a:prstGeom prst="rect">
+            <a:avLst/>
+          </a:prstGeom>
+        </p:spPr>
+        <p:txBody>
+          <a:bodyPr vert="horz" lIns="91440" tIns="45720" rIns="91440" bIns="45720" rtlCol="0"/>
+          <a:lstStyle/>
+          <a:p>
+            <a:pPr lvl="0"/>
+            <a:r>
+              <a:rPr lang="de-DE"/>
+              <a:t>Mastertextformat bearbeiten</a:t>
+            </a:r>
+          </a:p>
+          <a:p>
+            <a:pPr lvl="1"/>
+            <a:r>
+              <a:rPr lang="de-DE"/>
+              <a:t>Zweite Ebene</a:t>
+            </a:r>
+          </a:p>
+          <a:p>
+            <a:pPr lvl="2"/>
+            <a:r>
+              <a:rPr lang="de-DE"/>
+              <a:t>Dritte Ebene</a:t>
+            </a:r>
+          </a:p>
+          <a:p>
+            <a:pPr lvl="3"/>
+            <a:r>
+              <a:rPr lang="de-DE"/>
+              <a:t>Vierte Ebene</a:t>
+            </a:r>
+          </a:p>
+          <a:p>
+            <a:pPr lvl="4"/>
+            <a:r>
+              <a:rPr lang="de-DE"/>
+              <a:t>Fünfte Ebene</a:t>
+            </a:r>
+          </a:p>
+        </p:txBody>
+      </p:sp>
+      <p:sp>
+        <p:nvSpPr>
+          <p:cNvPr id="6" name="Fußzeilenplatzhalter 5"/>
+          <p:cNvSpPr>
+            <a:spLocks noGrp="1"/>
+          </p:cNvSpPr>
+          <p:nvPr>
+            <p:ph type="ftr" sz="quarter" idx="4"/>
+          </p:nvPr>
+        </p:nvSpPr>
+        <p:spPr>
+          <a:xfrm>
+            <a:off x="0" y="8685213"/>
+            <a:ext cx="2971800" cy="458787"/>
+          </a:xfrm>
+          <a:prstGeom prst="rect">
+            <a:avLst/>
+          </a:prstGeom>
+        </p:spPr>
+        <p:txBody>
+          <a:bodyPr vert="horz" lIns="91440" tIns="45720" rIns="91440" bIns="45720" rtlCol="0" anchor="b"/>
+          <a:lstStyle>
+            <a:lvl1pPr algn="l">
+              <a:defRPr sz="1200"/>
+            </a:lvl1pPr>
+          </a:lstStyle>
+          <a:p>
+            <a:endParaRPr lang="de-DE"/>
+          </a:p>
+        </p:txBody>
+      </p:sp>
+      <p:sp>
+        <p:nvSpPr>
+          <p:cNvPr id="7" name="Foliennummernplatzhalter 6"/>
+          <p:cNvSpPr>
+            <a:spLocks noGrp="1"/>
+          </p:cNvSpPr>
+          <p:nvPr>
+            <p:ph type="sldNum" sz="quarter" idx="5"/>
+          </p:nvPr>
+        </p:nvSpPr>
+        <p:spPr>
+          <a:xfrm>
+            <a:off x="3884613" y="8685213"/>
+            <a:ext cx="2971800" cy="458787"/>
+          </a:xfrm>
+          <a:prstGeom prst="rect">
+            <a:avLst/>
+          </a:prstGeom>
+        </p:spPr>
+        <p:txBody>
+          <a:bodyPr vert="horz" lIns="91440" tIns="45720" rIns="91440" bIns="45720" rtlCol="0" anchor="b"/>
+          <a:lstStyle>
+            <a:lvl1pPr algn="r">
+              <a:defRPr sz="1200"/>
+            </a:lvl1pPr>
+          </a:lstStyle>
+          <a:p>
+            <a:fld id="{98D8EA45-FC5F-4659-A7BF-F45CEF0BCAC4}" type="slidenum">
+              <a:rPr lang="de-DE" smtClean="0"/>
+              <a:t>‹Nr.›</a:t>
+            </a:fld>
+            <a:endParaRPr lang="de-DE"/>
+          </a:p>
+        </p:txBody>
+      </p:sp>
+    </p:spTree>
+    <p:extLst>
+      <p:ext uri="{BB962C8B-B14F-4D97-AF65-F5344CB8AC3E}">
+        <p14:creationId xmlns:p14="http://schemas.microsoft.com/office/powerpoint/2010/main" val="685075131"/>
+      </p:ext>
+    </p:extLst>
+  </p:cSld>
+  <p:clrMap bg1="lt1" tx1="dk1" bg2="lt2" tx2="dk2" accent1="accent1" accent2="accent2" accent3="accent3" accent4="accent4" accent5="accent5" accent6="accent6" hlink="hlink" folHlink="folHlink"/>
+  <p:notesStyle>
+    <a:lvl1pPr marL="0" algn="l" defTabSz="914400" rtl="0" eaLnBrk="1" latinLnBrk="0" hangingPunct="1">
+      <a:defRPr sz="1200" kern="1200">
+        <a:solidFill>
+          <a:schemeClr val="tx1"/>
+        </a:solidFill>
+        <a:latin typeface="+mn-lt"/>
+        <a:ea typeface="+mn-ea"/>
+        <a:cs typeface="+mn-cs"/>
+      </a:defRPr>
+    </a:lvl1pPr>
+    <a:lvl2pPr marL="457200" algn="l" defTabSz="914400" rtl="0" eaLnBrk="1" latinLnBrk="0" hangingPunct="1">
+      <a:defRPr sz="1200" kern="1200">
+        <a:solidFill>
+          <a:schemeClr val="tx1"/>
+        </a:solidFill>
+        <a:latin typeface="+mn-lt"/>
+        <a:ea typeface="+mn-ea"/>
+        <a:cs typeface="+mn-cs"/>
+      </a:defRPr>
+    </a:lvl2pPr>
+    <a:lvl3pPr marL="914400" algn="l" defTabSz="914400" rtl="0" eaLnBrk="1" latinLnBrk="0" hangingPunct="1">
+      <a:defRPr sz="1200" kern="1200">
+        <a:solidFill>
+          <a:schemeClr val="tx1"/>
+        </a:solidFill>
+        <a:latin typeface="+mn-lt"/>
+        <a:ea typeface="+mn-ea"/>
+        <a:cs typeface="+mn-cs"/>
+      </a:defRPr>
+    </a:lvl3pPr>
+    <a:lvl4pPr marL="1371600" algn="l" defTabSz="914400" rtl="0" eaLnBrk="1" latinLnBrk="0" hangingPunct="1">
+      <a:defRPr sz="1200" kern="1200">
+        <a:solidFill>
+          <a:schemeClr val="tx1"/>
+        </a:solidFill>
+        <a:latin typeface="+mn-lt"/>
+        <a:ea typeface="+mn-ea"/>
+        <a:cs typeface="+mn-cs"/>
+      </a:defRPr>
+    </a:lvl4pPr>
+    <a:lvl5pPr marL="1828800" algn="l" defTabSz="914400" rtl="0" eaLnBrk="1" latinLnBrk="0" hangingPunct="1">
+      <a:defRPr sz="1200" kern="1200">
+        <a:solidFill>
+          <a:schemeClr val="tx1"/>
+        </a:solidFill>
+        <a:latin typeface="+mn-lt"/>
+        <a:ea typeface="+mn-ea"/>
+        <a:cs typeface="+mn-cs"/>
+      </a:defRPr>
+    </a:lvl5pPr>
+    <a:lvl6pPr marL="2286000" algn="l" defTabSz="914400" rtl="0" eaLnBrk="1" latinLnBrk="0" hangingPunct="1">
+      <a:defRPr sz="1200" kern="1200">
+        <a:solidFill>
+          <a:schemeClr val="tx1"/>
+        </a:solidFill>
+        <a:latin typeface="+mn-lt"/>
+        <a:ea typeface="+mn-ea"/>
+        <a:cs typeface="+mn-cs"/>
+      </a:defRPr>
+    </a:lvl6pPr>
+    <a:lvl7pPr marL="2743200" algn="l" defTabSz="914400" rtl="0" eaLnBrk="1" latinLnBrk="0" hangingPunct="1">
+      <a:defRPr sz="1200" kern="1200">
+        <a:solidFill>
+          <a:schemeClr val="tx1"/>
+        </a:solidFill>
+        <a:latin typeface="+mn-lt"/>
+        <a:ea typeface="+mn-ea"/>
+        <a:cs typeface="+mn-cs"/>
+      </a:defRPr>
+    </a:lvl7pPr>
+    <a:lvl8pPr marL="3200400" algn="l" defTabSz="914400" rtl="0" eaLnBrk="1" latinLnBrk="0" hangingPunct="1">
+      <a:defRPr sz="1200" kern="1200">
+        <a:solidFill>
+          <a:schemeClr val="tx1"/>
+        </a:solidFill>
+        <a:latin typeface="+mn-lt"/>
+        <a:ea typeface="+mn-ea"/>
+        <a:cs typeface="+mn-cs"/>
+      </a:defRPr>
+    </a:lvl8pPr>
+    <a:lvl9pPr marL="3657600" algn="l" defTabSz="914400" rtl="0" eaLnBrk="1" latinLnBrk="0" hangingPunct="1">
+      <a:defRPr sz="1200" kern="1200">
+        <a:solidFill>
+          <a:schemeClr val="tx1"/>
+        </a:solidFill>
+        <a:latin typeface="+mn-lt"/>
+        <a:ea typeface="+mn-ea"/>
+        <a:cs typeface="+mn-cs"/>
+      </a:defRPr>
+    </a:lvl9pPr>
+  </p:notesStyle>
+</p:notesMaster>
+</file>
+
+<file path=ppt/notesSlides/notesSlide1.xml><?xml version="1.0" encoding="utf-8"?>
+<p:notes xmlns:a="http://schemas.openxmlformats.org/drawingml/2006/main" xmlns:r="http://schemas.openxmlformats.org/officeDocument/2006/relationships" xmlns:p="http://schemas.openxmlformats.org/presentationml/2006/main">
+  <p:cSld>
+    <p:spTree>
+      <p:nvGrpSpPr>
+        <p:cNvPr id="1" name=""/>
+        <p:cNvGrpSpPr/>
+        <p:nvPr/>
+      </p:nvGrpSpPr>
+      <p:grpSpPr>
+        <a:xfrm>
+          <a:off x="0" y="0"/>
+          <a:ext cx="0" cy="0"/>
+          <a:chOff x="0" y="0"/>
+          <a:chExt cx="0" cy="0"/>
+        </a:xfrm>
+      </p:grpSpPr>
+      <p:sp>
+        <p:nvSpPr>
+          <p:cNvPr id="2" name="Folienbildplatzhalter 1"/>
+          <p:cNvSpPr>
+            <a:spLocks noGrp="1" noRot="1" noChangeAspect="1"/>
+          </p:cNvSpPr>
+          <p:nvPr>
+            <p:ph type="sldImg"/>
+          </p:nvPr>
+        </p:nvSpPr>
+        <p:spPr/>
+      </p:sp>
+      <p:sp>
+        <p:nvSpPr>
+          <p:cNvPr id="3" name="Notizenplatzhalter 2"/>
+          <p:cNvSpPr>
+            <a:spLocks noGrp="1"/>
+          </p:cNvSpPr>
+          <p:nvPr>
+            <p:ph type="body" idx="1"/>
+          </p:nvPr>
+        </p:nvSpPr>
+        <p:spPr/>
+        <p:txBody>
+          <a:bodyPr/>
+          <a:lstStyle/>
+          <a:p>
+            <a:endParaRPr lang="de-DE" dirty="0"/>
+          </a:p>
+        </p:txBody>
+      </p:sp>
+      <p:sp>
+        <p:nvSpPr>
+          <p:cNvPr id="4" name="Foliennummernplatzhalter 3"/>
+          <p:cNvSpPr>
+            <a:spLocks noGrp="1"/>
+          </p:cNvSpPr>
+          <p:nvPr>
+            <p:ph type="sldNum" sz="quarter" idx="5"/>
+          </p:nvPr>
+        </p:nvSpPr>
+        <p:spPr/>
+        <p:txBody>
+          <a:bodyPr/>
+          <a:lstStyle/>
+          <a:p>
+            <a:fld id="{98D8EA45-FC5F-4659-A7BF-F45CEF0BCAC4}" type="slidenum">
+              <a:rPr lang="de-DE" smtClean="0"/>
+              <a:t>5</a:t>
+            </a:fld>
+            <a:endParaRPr lang="de-DE"/>
+          </a:p>
+        </p:txBody>
+      </p:sp>
+    </p:spTree>
+    <p:extLst>
+      <p:ext uri="{BB962C8B-B14F-4D97-AF65-F5344CB8AC3E}">
+        <p14:creationId xmlns:p14="http://schemas.microsoft.com/office/powerpoint/2010/main" val="3463130784"/>
+      </p:ext>
+    </p:extLst>
+  </p:cSld>
+  <p:clrMapOvr>
+    <a:masterClrMapping/>
+  </p:clrMapOvr>
+</p:notes>
+</file>
+
+<file path=ppt/notesSlides/notesSlide2.xml><?xml version="1.0" encoding="utf-8"?>
+<p:notes xmlns:a="http://schemas.openxmlformats.org/drawingml/2006/main" xmlns:r="http://schemas.openxmlformats.org/officeDocument/2006/relationships" xmlns:p="http://schemas.openxmlformats.org/presentationml/2006/main">
+  <p:cSld>
+    <p:spTree>
+      <p:nvGrpSpPr>
+        <p:cNvPr id="1" name="">
+          <a:extLst>
+            <a:ext uri="{FF2B5EF4-FFF2-40B4-BE49-F238E27FC236}">
+              <a16:creationId xmlns:a16="http://schemas.microsoft.com/office/drawing/2014/main" id="{5692B112-C5C2-5578-8F45-B48EA3ED60A0}"/>
+            </a:ext>
+          </a:extLst>
+        </p:cNvPr>
+        <p:cNvGrpSpPr/>
+        <p:nvPr/>
+      </p:nvGrpSpPr>
+      <p:grpSpPr>
+        <a:xfrm>
+          <a:off x="0" y="0"/>
+          <a:ext cx="0" cy="0"/>
+          <a:chOff x="0" y="0"/>
+          <a:chExt cx="0" cy="0"/>
+        </a:xfrm>
+      </p:grpSpPr>
+      <p:sp>
+        <p:nvSpPr>
+          <p:cNvPr id="2" name="Folienbildplatzhalter 1">
+            <a:extLst>
+              <a:ext uri="{FF2B5EF4-FFF2-40B4-BE49-F238E27FC236}">
+                <a16:creationId xmlns:a16="http://schemas.microsoft.com/office/drawing/2014/main" id="{FF3E9DA5-D5EF-5444-5D04-10D131A15217}"/>
+              </a:ext>
+            </a:extLst>
+          </p:cNvPr>
+          <p:cNvSpPr>
+            <a:spLocks noGrp="1" noRot="1" noChangeAspect="1"/>
+          </p:cNvSpPr>
+          <p:nvPr>
+            <p:ph type="sldImg"/>
+          </p:nvPr>
+        </p:nvSpPr>
+        <p:spPr/>
+      </p:sp>
+      <p:sp>
+        <p:nvSpPr>
+          <p:cNvPr id="3" name="Notizenplatzhalter 2">
+            <a:extLst>
+              <a:ext uri="{FF2B5EF4-FFF2-40B4-BE49-F238E27FC236}">
+                <a16:creationId xmlns:a16="http://schemas.microsoft.com/office/drawing/2014/main" id="{6AEA5E53-B0CE-F467-2F13-743A022E1CDA}"/>
+              </a:ext>
+            </a:extLst>
+          </p:cNvPr>
+          <p:cNvSpPr>
+            <a:spLocks noGrp="1"/>
+          </p:cNvSpPr>
+          <p:nvPr>
+            <p:ph type="body" idx="1"/>
+          </p:nvPr>
+        </p:nvSpPr>
+        <p:spPr/>
+        <p:txBody>
+          <a:bodyPr/>
+          <a:lstStyle/>
+          <a:p>
+            <a:endParaRPr lang="de-DE" dirty="0"/>
+          </a:p>
+        </p:txBody>
+      </p:sp>
+      <p:sp>
+        <p:nvSpPr>
+          <p:cNvPr id="4" name="Foliennummernplatzhalter 3">
+            <a:extLst>
+              <a:ext uri="{FF2B5EF4-FFF2-40B4-BE49-F238E27FC236}">
+                <a16:creationId xmlns:a16="http://schemas.microsoft.com/office/drawing/2014/main" id="{80C20424-5149-B7CF-4D51-E3C495517D7E}"/>
+              </a:ext>
+            </a:extLst>
+          </p:cNvPr>
+          <p:cNvSpPr>
+            <a:spLocks noGrp="1"/>
+          </p:cNvSpPr>
+          <p:nvPr>
+            <p:ph type="sldNum" sz="quarter" idx="5"/>
+          </p:nvPr>
+        </p:nvSpPr>
+        <p:spPr/>
+        <p:txBody>
+          <a:bodyPr/>
+          <a:lstStyle/>
+          <a:p>
+            <a:fld id="{98D8EA45-FC5F-4659-A7BF-F45CEF0BCAC4}" type="slidenum">
+              <a:rPr lang="de-DE" smtClean="0"/>
+              <a:t>6</a:t>
+            </a:fld>
+            <a:endParaRPr lang="de-DE"/>
+          </a:p>
+        </p:txBody>
+      </p:sp>
+    </p:spTree>
+    <p:extLst>
+      <p:ext uri="{BB962C8B-B14F-4D97-AF65-F5344CB8AC3E}">
+        <p14:creationId xmlns:p14="http://schemas.microsoft.com/office/powerpoint/2010/main" val="2434461064"/>
+      </p:ext>
+    </p:extLst>
+  </p:cSld>
+  <p:clrMapOvr>
+    <a:masterClrMapping/>
+  </p:clrMapOvr>
+</p:notes>
+</file>
+
+<file path=ppt/notesSlides/notesSlide3.xml><?xml version="1.0" encoding="utf-8"?>
+<p:notes xmlns:a="http://schemas.openxmlformats.org/drawingml/2006/main" xmlns:r="http://schemas.openxmlformats.org/officeDocument/2006/relationships" xmlns:p="http://schemas.openxmlformats.org/presentationml/2006/main">
+  <p:cSld>
+    <p:spTree>
+      <p:nvGrpSpPr>
+        <p:cNvPr id="1" name="">
+          <a:extLst>
+            <a:ext uri="{FF2B5EF4-FFF2-40B4-BE49-F238E27FC236}">
+              <a16:creationId xmlns:a16="http://schemas.microsoft.com/office/drawing/2014/main" id="{4FC20717-79DC-BFFF-4246-47109E5F4459}"/>
+            </a:ext>
+          </a:extLst>
+        </p:cNvPr>
+        <p:cNvGrpSpPr/>
+        <p:nvPr/>
+      </p:nvGrpSpPr>
+      <p:grpSpPr>
+        <a:xfrm>
+          <a:off x="0" y="0"/>
+          <a:ext cx="0" cy="0"/>
+          <a:chOff x="0" y="0"/>
+          <a:chExt cx="0" cy="0"/>
+        </a:xfrm>
+      </p:grpSpPr>
+      <p:sp>
+        <p:nvSpPr>
+          <p:cNvPr id="2" name="Folienbildplatzhalter 1">
+            <a:extLst>
+              <a:ext uri="{FF2B5EF4-FFF2-40B4-BE49-F238E27FC236}">
+                <a16:creationId xmlns:a16="http://schemas.microsoft.com/office/drawing/2014/main" id="{DB653A53-05A3-0B4B-42AD-846B8632AA49}"/>
+              </a:ext>
+            </a:extLst>
+          </p:cNvPr>
+          <p:cNvSpPr>
+            <a:spLocks noGrp="1" noRot="1" noChangeAspect="1"/>
+          </p:cNvSpPr>
+          <p:nvPr>
+            <p:ph type="sldImg"/>
+          </p:nvPr>
+        </p:nvSpPr>
+        <p:spPr/>
+      </p:sp>
+      <p:sp>
+        <p:nvSpPr>
+          <p:cNvPr id="3" name="Notizenplatzhalter 2">
+            <a:extLst>
+              <a:ext uri="{FF2B5EF4-FFF2-40B4-BE49-F238E27FC236}">
+                <a16:creationId xmlns:a16="http://schemas.microsoft.com/office/drawing/2014/main" id="{0EDBE1B1-B432-6D86-B532-DEE563F64A6A}"/>
+              </a:ext>
+            </a:extLst>
+          </p:cNvPr>
+          <p:cNvSpPr>
+            <a:spLocks noGrp="1"/>
+          </p:cNvSpPr>
+          <p:nvPr>
+            <p:ph type="body" idx="1"/>
+          </p:nvPr>
+        </p:nvSpPr>
+        <p:spPr/>
+        <p:txBody>
+          <a:bodyPr/>
+          <a:lstStyle/>
+          <a:p>
+            <a:endParaRPr lang="de-DE" dirty="0"/>
+          </a:p>
+        </p:txBody>
+      </p:sp>
+      <p:sp>
+        <p:nvSpPr>
+          <p:cNvPr id="4" name="Foliennummernplatzhalter 3">
+            <a:extLst>
+              <a:ext uri="{FF2B5EF4-FFF2-40B4-BE49-F238E27FC236}">
+                <a16:creationId xmlns:a16="http://schemas.microsoft.com/office/drawing/2014/main" id="{5930C59B-B97D-4C93-C32C-D18282BB6C89}"/>
+              </a:ext>
+            </a:extLst>
+          </p:cNvPr>
+          <p:cNvSpPr>
+            <a:spLocks noGrp="1"/>
+          </p:cNvSpPr>
+          <p:nvPr>
+            <p:ph type="sldNum" sz="quarter" idx="5"/>
+          </p:nvPr>
+        </p:nvSpPr>
+        <p:spPr/>
+        <p:txBody>
+          <a:bodyPr/>
+          <a:lstStyle/>
+          <a:p>
+            <a:fld id="{98D8EA45-FC5F-4659-A7BF-F45CEF0BCAC4}" type="slidenum">
+              <a:rPr lang="de-DE" smtClean="0"/>
+              <a:t>7</a:t>
+            </a:fld>
+            <a:endParaRPr lang="de-DE"/>
+          </a:p>
+        </p:txBody>
+      </p:sp>
+    </p:spTree>
+    <p:extLst>
+      <p:ext uri="{BB962C8B-B14F-4D97-AF65-F5344CB8AC3E}">
+        <p14:creationId xmlns:p14="http://schemas.microsoft.com/office/powerpoint/2010/main" val="729926993"/>
+      </p:ext>
+    </p:extLst>
+  </p:cSld>
+  <p:clrMapOvr>
+    <a:masterClrMapping/>
+  </p:clrMapOvr>
+</p:notes>
+</file>
+
+<file path=ppt/notesSlides/notesSlide4.xml><?xml version="1.0" encoding="utf-8"?>
+<p:notes xmlns:a="http://schemas.openxmlformats.org/drawingml/2006/main" xmlns:r="http://schemas.openxmlformats.org/officeDocument/2006/relationships" xmlns:p="http://schemas.openxmlformats.org/presentationml/2006/main">
+  <p:cSld>
+    <p:spTree>
+      <p:nvGrpSpPr>
+        <p:cNvPr id="1" name="">
+          <a:extLst>
+            <a:ext uri="{FF2B5EF4-FFF2-40B4-BE49-F238E27FC236}">
+              <a16:creationId xmlns:a16="http://schemas.microsoft.com/office/drawing/2014/main" id="{E15C62CB-5454-2EA8-BF11-9F1115363998}"/>
+            </a:ext>
+          </a:extLst>
+        </p:cNvPr>
+        <p:cNvGrpSpPr/>
+        <p:nvPr/>
+      </p:nvGrpSpPr>
+      <p:grpSpPr>
+        <a:xfrm>
+          <a:off x="0" y="0"/>
+          <a:ext cx="0" cy="0"/>
+          <a:chOff x="0" y="0"/>
+          <a:chExt cx="0" cy="0"/>
+        </a:xfrm>
+      </p:grpSpPr>
+      <p:sp>
+        <p:nvSpPr>
+          <p:cNvPr id="2" name="Folienbildplatzhalter 1">
+            <a:extLst>
+              <a:ext uri="{FF2B5EF4-FFF2-40B4-BE49-F238E27FC236}">
+                <a16:creationId xmlns:a16="http://schemas.microsoft.com/office/drawing/2014/main" id="{423F1FB4-B135-2343-BF37-761858623887}"/>
+              </a:ext>
+            </a:extLst>
+          </p:cNvPr>
+          <p:cNvSpPr>
+            <a:spLocks noGrp="1" noRot="1" noChangeAspect="1"/>
+          </p:cNvSpPr>
+          <p:nvPr>
+            <p:ph type="sldImg"/>
+          </p:nvPr>
+        </p:nvSpPr>
+        <p:spPr/>
+      </p:sp>
+      <p:sp>
+        <p:nvSpPr>
+          <p:cNvPr id="3" name="Notizenplatzhalter 2">
+            <a:extLst>
+              <a:ext uri="{FF2B5EF4-FFF2-40B4-BE49-F238E27FC236}">
+                <a16:creationId xmlns:a16="http://schemas.microsoft.com/office/drawing/2014/main" id="{FDAF605A-E14C-FCF8-8B5F-0E74F427E4BA}"/>
+              </a:ext>
+            </a:extLst>
+          </p:cNvPr>
+          <p:cNvSpPr>
+            <a:spLocks noGrp="1"/>
+          </p:cNvSpPr>
+          <p:nvPr>
+            <p:ph type="body" idx="1"/>
+          </p:nvPr>
+        </p:nvSpPr>
+        <p:spPr/>
+        <p:txBody>
+          <a:bodyPr/>
+          <a:lstStyle/>
+          <a:p>
+            <a:endParaRPr lang="de-DE" dirty="0"/>
+          </a:p>
+        </p:txBody>
+      </p:sp>
+      <p:sp>
+        <p:nvSpPr>
+          <p:cNvPr id="4" name="Foliennummernplatzhalter 3">
+            <a:extLst>
+              <a:ext uri="{FF2B5EF4-FFF2-40B4-BE49-F238E27FC236}">
+                <a16:creationId xmlns:a16="http://schemas.microsoft.com/office/drawing/2014/main" id="{B5807158-3888-51F8-D6A6-5230EC36B7BB}"/>
+              </a:ext>
+            </a:extLst>
+          </p:cNvPr>
+          <p:cNvSpPr>
+            <a:spLocks noGrp="1"/>
+          </p:cNvSpPr>
+          <p:nvPr>
+            <p:ph type="sldNum" sz="quarter" idx="5"/>
+          </p:nvPr>
+        </p:nvSpPr>
+        <p:spPr/>
+        <p:txBody>
+          <a:bodyPr/>
+          <a:lstStyle/>
+          <a:p>
+            <a:fld id="{98D8EA45-FC5F-4659-A7BF-F45CEF0BCAC4}" type="slidenum">
+              <a:rPr lang="de-DE" smtClean="0"/>
+              <a:t>8</a:t>
+            </a:fld>
+            <a:endParaRPr lang="de-DE"/>
+          </a:p>
+        </p:txBody>
+      </p:sp>
+    </p:spTree>
+    <p:extLst>
+      <p:ext uri="{BB962C8B-B14F-4D97-AF65-F5344CB8AC3E}">
+        <p14:creationId xmlns:p14="http://schemas.microsoft.com/office/powerpoint/2010/main" val="2767374405"/>
+      </p:ext>
+    </p:extLst>
+  </p:cSld>
+  <p:clrMapOvr>
+    <a:masterClrMapping/>
+  </p:clrMapOvr>
+</p:notes>
+</file>
+
+<file path=ppt/notesSlides/notesSlide5.xml><?xml version="1.0" encoding="utf-8"?>
+<p:notes xmlns:a="http://schemas.openxmlformats.org/drawingml/2006/main" xmlns:r="http://schemas.openxmlformats.org/officeDocument/2006/relationships" xmlns:p="http://schemas.openxmlformats.org/presentationml/2006/main">
+  <p:cSld>
+    <p:spTree>
+      <p:nvGrpSpPr>
+        <p:cNvPr id="1" name="">
+          <a:extLst>
+            <a:ext uri="{FF2B5EF4-FFF2-40B4-BE49-F238E27FC236}">
+              <a16:creationId xmlns:a16="http://schemas.microsoft.com/office/drawing/2014/main" id="{D03B345C-7D9D-227B-F5ED-BB5FAFC0538F}"/>
+            </a:ext>
+          </a:extLst>
+        </p:cNvPr>
+        <p:cNvGrpSpPr/>
+        <p:nvPr/>
+      </p:nvGrpSpPr>
+      <p:grpSpPr>
+        <a:xfrm>
+          <a:off x="0" y="0"/>
+          <a:ext cx="0" cy="0"/>
+          <a:chOff x="0" y="0"/>
+          <a:chExt cx="0" cy="0"/>
+        </a:xfrm>
+      </p:grpSpPr>
+      <p:sp>
+        <p:nvSpPr>
+          <p:cNvPr id="2" name="Folienbildplatzhalter 1">
+            <a:extLst>
+              <a:ext uri="{FF2B5EF4-FFF2-40B4-BE49-F238E27FC236}">
+                <a16:creationId xmlns:a16="http://schemas.microsoft.com/office/drawing/2014/main" id="{D88FE76D-4366-7870-D359-325AF28BC5BA}"/>
+              </a:ext>
+            </a:extLst>
+          </p:cNvPr>
+          <p:cNvSpPr>
+            <a:spLocks noGrp="1" noRot="1" noChangeAspect="1"/>
+          </p:cNvSpPr>
+          <p:nvPr>
+            <p:ph type="sldImg"/>
+          </p:nvPr>
+        </p:nvSpPr>
+        <p:spPr/>
+      </p:sp>
+      <p:sp>
+        <p:nvSpPr>
+          <p:cNvPr id="3" name="Notizenplatzhalter 2">
+            <a:extLst>
+              <a:ext uri="{FF2B5EF4-FFF2-40B4-BE49-F238E27FC236}">
+                <a16:creationId xmlns:a16="http://schemas.microsoft.com/office/drawing/2014/main" id="{EE716DA1-1361-35AF-845E-5B04AB2B8BBB}"/>
+              </a:ext>
+            </a:extLst>
+          </p:cNvPr>
+          <p:cNvSpPr>
+            <a:spLocks noGrp="1"/>
+          </p:cNvSpPr>
+          <p:nvPr>
+            <p:ph type="body" idx="1"/>
+          </p:nvPr>
+        </p:nvSpPr>
+        <p:spPr/>
+        <p:txBody>
+          <a:bodyPr/>
+          <a:lstStyle/>
+          <a:p>
+            <a:endParaRPr lang="de-DE" dirty="0"/>
+          </a:p>
+        </p:txBody>
+      </p:sp>
+      <p:sp>
+        <p:nvSpPr>
+          <p:cNvPr id="4" name="Foliennummernplatzhalter 3">
+            <a:extLst>
+              <a:ext uri="{FF2B5EF4-FFF2-40B4-BE49-F238E27FC236}">
+                <a16:creationId xmlns:a16="http://schemas.microsoft.com/office/drawing/2014/main" id="{773A498D-7843-BDE7-1853-75D2F7D2BAF5}"/>
+              </a:ext>
+            </a:extLst>
+          </p:cNvPr>
+          <p:cNvSpPr>
+            <a:spLocks noGrp="1"/>
+          </p:cNvSpPr>
+          <p:nvPr>
+            <p:ph type="sldNum" sz="quarter" idx="5"/>
+          </p:nvPr>
+        </p:nvSpPr>
+        <p:spPr/>
+        <p:txBody>
+          <a:bodyPr/>
+          <a:lstStyle/>
+          <a:p>
+            <a:fld id="{98D8EA45-FC5F-4659-A7BF-F45CEF0BCAC4}" type="slidenum">
+              <a:rPr lang="de-DE" smtClean="0"/>
+              <a:t>9</a:t>
+            </a:fld>
+            <a:endParaRPr lang="de-DE"/>
+          </a:p>
+        </p:txBody>
+      </p:sp>
+    </p:spTree>
+    <p:extLst>
+      <p:ext uri="{BB962C8B-B14F-4D97-AF65-F5344CB8AC3E}">
+        <p14:creationId xmlns:p14="http://schemas.microsoft.com/office/powerpoint/2010/main" val="1403014010"/>
+      </p:ext>
+    </p:extLst>
+  </p:cSld>
+  <p:clrMapOvr>
+    <a:masterClrMapping/>
+  </p:clrMapOvr>
+</p:notes>
 </file>
 
 <file path=ppt/slideLayouts/slideLayout1.xml><?xml version="1.0" encoding="utf-8"?>
@@ -3671,6 +4544,268 @@
 </p:sld>
 </file>
 
+<file path=ppt/slides/slide10.xml><?xml version="1.0" encoding="utf-8"?>
+<p:sld xmlns:a="http://schemas.openxmlformats.org/drawingml/2006/main" xmlns:r="http://schemas.openxmlformats.org/officeDocument/2006/relationships" xmlns:p="http://schemas.openxmlformats.org/presentationml/2006/main">
+  <p:cSld>
+    <p:spTree>
+      <p:nvGrpSpPr>
+        <p:cNvPr id="1" name=""/>
+        <p:cNvGrpSpPr/>
+        <p:nvPr/>
+      </p:nvGrpSpPr>
+      <p:grpSpPr>
+        <a:xfrm>
+          <a:off x="0" y="0"/>
+          <a:ext cx="0" cy="0"/>
+          <a:chOff x="0" y="0"/>
+          <a:chExt cx="0" cy="0"/>
+        </a:xfrm>
+      </p:grpSpPr>
+      <p:sp>
+        <p:nvSpPr>
+          <p:cNvPr id="2" name="Titel 1">
+            <a:extLst>
+              <a:ext uri="{FF2B5EF4-FFF2-40B4-BE49-F238E27FC236}">
+                <a16:creationId xmlns:a16="http://schemas.microsoft.com/office/drawing/2014/main" id="{5BBB6FAE-8EFD-732A-B884-CC2BFCE3D1D4}"/>
+              </a:ext>
+            </a:extLst>
+          </p:cNvPr>
+          <p:cNvSpPr>
+            <a:spLocks noGrp="1"/>
+          </p:cNvSpPr>
+          <p:nvPr>
+            <p:ph type="title"/>
+          </p:nvPr>
+        </p:nvSpPr>
+        <p:spPr/>
+        <p:txBody>
+          <a:bodyPr/>
+          <a:lstStyle/>
+          <a:p>
+            <a:r>
+              <a:rPr lang="de-DE" dirty="0"/>
+              <a:t>ER-Modell</a:t>
+            </a:r>
+          </a:p>
+        </p:txBody>
+      </p:sp>
+      <p:pic>
+        <p:nvPicPr>
+          <p:cNvPr id="5" name="Inhaltsplatzhalter 4">
+            <a:extLst>
+              <a:ext uri="{FF2B5EF4-FFF2-40B4-BE49-F238E27FC236}">
+                <a16:creationId xmlns:a16="http://schemas.microsoft.com/office/drawing/2014/main" id="{0D2403A4-EB58-D608-A62E-0208F7D5C169}"/>
+              </a:ext>
+            </a:extLst>
+          </p:cNvPr>
+          <p:cNvPicPr>
+            <a:picLocks noGrp="1" noChangeAspect="1"/>
+          </p:cNvPicPr>
+          <p:nvPr>
+            <p:ph idx="1"/>
+          </p:nvPr>
+        </p:nvPicPr>
+        <p:blipFill>
+          <a:blip>
+            <a:extLst>
+              <a:ext uri="{96DAC541-7B7A-43D3-8B79-37D633B846F1}">
+                <asvg:svgBlip xmlns:asvg="http://schemas.microsoft.com/office/drawing/2016/SVG/main" r:embed="rId2"/>
+              </a:ext>
+            </a:extLst>
+          </a:blip>
+          <a:stretch>
+            <a:fillRect/>
+          </a:stretch>
+        </p:blipFill>
+        <p:spPr>
+          <a:xfrm>
+            <a:off x="3904672" y="171450"/>
+            <a:ext cx="7172903" cy="10047199"/>
+          </a:xfrm>
+          <a:prstGeom prst="rect">
+            <a:avLst/>
+          </a:prstGeom>
+        </p:spPr>
+      </p:pic>
+    </p:spTree>
+    <p:extLst>
+      <p:ext uri="{BB962C8B-B14F-4D97-AF65-F5344CB8AC3E}">
+        <p14:creationId xmlns:p14="http://schemas.microsoft.com/office/powerpoint/2010/main" val="3200518224"/>
+      </p:ext>
+    </p:extLst>
+  </p:cSld>
+  <p:clrMapOvr>
+    <a:masterClrMapping/>
+  </p:clrMapOvr>
+</p:sld>
+</file>
+
+<file path=ppt/slides/slide11.xml><?xml version="1.0" encoding="utf-8"?>
+<p:sld xmlns:a="http://schemas.openxmlformats.org/drawingml/2006/main" xmlns:r="http://schemas.openxmlformats.org/officeDocument/2006/relationships" xmlns:p="http://schemas.openxmlformats.org/presentationml/2006/main">
+  <p:cSld>
+    <p:spTree>
+      <p:nvGrpSpPr>
+        <p:cNvPr id="1" name=""/>
+        <p:cNvGrpSpPr/>
+        <p:nvPr/>
+      </p:nvGrpSpPr>
+      <p:grpSpPr>
+        <a:xfrm>
+          <a:off x="0" y="0"/>
+          <a:ext cx="0" cy="0"/>
+          <a:chOff x="0" y="0"/>
+          <a:chExt cx="0" cy="0"/>
+        </a:xfrm>
+      </p:grpSpPr>
+      <p:sp>
+        <p:nvSpPr>
+          <p:cNvPr id="2" name="Titel 1">
+            <a:extLst>
+              <a:ext uri="{FF2B5EF4-FFF2-40B4-BE49-F238E27FC236}">
+                <a16:creationId xmlns:a16="http://schemas.microsoft.com/office/drawing/2014/main" id="{AB7F007A-CDD3-0B03-2018-5B50FCE46489}"/>
+              </a:ext>
+            </a:extLst>
+          </p:cNvPr>
+          <p:cNvSpPr>
+            <a:spLocks noGrp="1"/>
+          </p:cNvSpPr>
+          <p:nvPr>
+            <p:ph type="title"/>
+          </p:nvPr>
+        </p:nvSpPr>
+        <p:spPr/>
+        <p:txBody>
+          <a:bodyPr/>
+          <a:lstStyle/>
+          <a:p>
+            <a:r>
+              <a:rPr lang="de-DE" dirty="0"/>
+              <a:t>Logischer Datenbankenentwurf</a:t>
+            </a:r>
+          </a:p>
+        </p:txBody>
+      </p:sp>
+      <p:sp>
+        <p:nvSpPr>
+          <p:cNvPr id="3" name="Inhaltsplatzhalter 2">
+            <a:extLst>
+              <a:ext uri="{FF2B5EF4-FFF2-40B4-BE49-F238E27FC236}">
+                <a16:creationId xmlns:a16="http://schemas.microsoft.com/office/drawing/2014/main" id="{CD85E2FD-6D86-6F17-972C-B3DBA1BBD723}"/>
+              </a:ext>
+            </a:extLst>
+          </p:cNvPr>
+          <p:cNvSpPr>
+            <a:spLocks noGrp="1"/>
+          </p:cNvSpPr>
+          <p:nvPr>
+            <p:ph idx="1"/>
+          </p:nvPr>
+        </p:nvSpPr>
+        <p:spPr/>
+        <p:txBody>
+          <a:bodyPr/>
+          <a:lstStyle/>
+          <a:p>
+            <a:endParaRPr lang="de-DE" dirty="0"/>
+          </a:p>
+        </p:txBody>
+      </p:sp>
+    </p:spTree>
+    <p:extLst>
+      <p:ext uri="{BB962C8B-B14F-4D97-AF65-F5344CB8AC3E}">
+        <p14:creationId xmlns:p14="http://schemas.microsoft.com/office/powerpoint/2010/main" val="1397456177"/>
+      </p:ext>
+    </p:extLst>
+  </p:cSld>
+  <p:clrMapOvr>
+    <a:masterClrMapping/>
+  </p:clrMapOvr>
+</p:sld>
+</file>
+
+<file path=ppt/slides/slide12.xml><?xml version="1.0" encoding="utf-8"?>
+<p:sld xmlns:a="http://schemas.openxmlformats.org/drawingml/2006/main" xmlns:r="http://schemas.openxmlformats.org/officeDocument/2006/relationships" xmlns:p="http://schemas.openxmlformats.org/presentationml/2006/main">
+  <p:cSld>
+    <p:spTree>
+      <p:nvGrpSpPr>
+        <p:cNvPr id="1" name=""/>
+        <p:cNvGrpSpPr/>
+        <p:nvPr/>
+      </p:nvGrpSpPr>
+      <p:grpSpPr>
+        <a:xfrm>
+          <a:off x="0" y="0"/>
+          <a:ext cx="0" cy="0"/>
+          <a:chOff x="0" y="0"/>
+          <a:chExt cx="0" cy="0"/>
+        </a:xfrm>
+      </p:grpSpPr>
+      <p:sp>
+        <p:nvSpPr>
+          <p:cNvPr id="2" name="Titel 1">
+            <a:extLst>
+              <a:ext uri="{FF2B5EF4-FFF2-40B4-BE49-F238E27FC236}">
+                <a16:creationId xmlns:a16="http://schemas.microsoft.com/office/drawing/2014/main" id="{E36216E1-F291-DBE4-2223-D0512FDF505C}"/>
+              </a:ext>
+            </a:extLst>
+          </p:cNvPr>
+          <p:cNvSpPr>
+            <a:spLocks noGrp="1"/>
+          </p:cNvSpPr>
+          <p:nvPr>
+            <p:ph type="title"/>
+          </p:nvPr>
+        </p:nvSpPr>
+        <p:spPr/>
+        <p:txBody>
+          <a:bodyPr/>
+          <a:lstStyle/>
+          <a:p>
+            <a:r>
+              <a:rPr lang="de-DE" dirty="0"/>
+              <a:t>SQL-Datenbank</a:t>
+            </a:r>
+          </a:p>
+        </p:txBody>
+      </p:sp>
+      <p:sp>
+        <p:nvSpPr>
+          <p:cNvPr id="3" name="Inhaltsplatzhalter 2">
+            <a:extLst>
+              <a:ext uri="{FF2B5EF4-FFF2-40B4-BE49-F238E27FC236}">
+                <a16:creationId xmlns:a16="http://schemas.microsoft.com/office/drawing/2014/main" id="{05616802-8963-F5B0-CFC7-5C7E4AD7F7B2}"/>
+              </a:ext>
+            </a:extLst>
+          </p:cNvPr>
+          <p:cNvSpPr>
+            <a:spLocks noGrp="1"/>
+          </p:cNvSpPr>
+          <p:nvPr>
+            <p:ph idx="1"/>
+          </p:nvPr>
+        </p:nvSpPr>
+        <p:spPr/>
+        <p:txBody>
+          <a:bodyPr/>
+          <a:lstStyle/>
+          <a:p>
+            <a:endParaRPr lang="de-DE"/>
+          </a:p>
+        </p:txBody>
+      </p:sp>
+    </p:spTree>
+    <p:extLst>
+      <p:ext uri="{BB962C8B-B14F-4D97-AF65-F5344CB8AC3E}">
+        <p14:creationId xmlns:p14="http://schemas.microsoft.com/office/powerpoint/2010/main" val="1051220518"/>
+      </p:ext>
+    </p:extLst>
+  </p:cSld>
+  <p:clrMapOvr>
+    <a:masterClrMapping/>
+  </p:clrMapOvr>
+</p:sld>
+</file>
+
 <file path=ppt/slides/slide2.xml><?xml version="1.0" encoding="utf-8"?>
 <p:sld xmlns:a="http://schemas.openxmlformats.org/drawingml/2006/main" xmlns:r="http://schemas.openxmlformats.org/officeDocument/2006/relationships" xmlns:p="http://schemas.openxmlformats.org/presentationml/2006/main">
   <p:cSld>
@@ -4067,10 +5202,10 @@
       </p:grpSpPr>
       <p:sp>
         <p:nvSpPr>
-          <p:cNvPr id="2" name="Titel 1">
-            <a:extLst>
-              <a:ext uri="{FF2B5EF4-FFF2-40B4-BE49-F238E27FC236}">
-                <a16:creationId xmlns:a16="http://schemas.microsoft.com/office/drawing/2014/main" id="{8B977070-4EB5-9C1E-392B-A253DF45AA22}"/>
+          <p:cNvPr id="7" name="Titel 6">
+            <a:extLst>
+              <a:ext uri="{FF2B5EF4-FFF2-40B4-BE49-F238E27FC236}">
+                <a16:creationId xmlns:a16="http://schemas.microsoft.com/office/drawing/2014/main" id="{6FF92828-3B8D-3E77-E9D9-79326EF306EF}"/>
               </a:ext>
             </a:extLst>
           </p:cNvPr>
@@ -4086,38 +5221,49 @@
           <a:bodyPr/>
           <a:lstStyle/>
           <a:p>
-            <a:r>
-              <a:rPr lang="de-DE" dirty="0"/>
-              <a:t>Use-Case Diagramm</a:t>
-            </a:r>
-          </a:p>
-        </p:txBody>
-      </p:sp>
-      <p:sp>
-        <p:nvSpPr>
-          <p:cNvPr id="3" name="Inhaltsplatzhalter 2">
-            <a:extLst>
-              <a:ext uri="{FF2B5EF4-FFF2-40B4-BE49-F238E27FC236}">
-                <a16:creationId xmlns:a16="http://schemas.microsoft.com/office/drawing/2014/main" id="{229671DC-CA7B-9D88-FB5D-E4BF1DCF4616}"/>
-              </a:ext>
-            </a:extLst>
-          </p:cNvPr>
-          <p:cNvSpPr>
-            <a:spLocks noGrp="1"/>
-          </p:cNvSpPr>
+            <a:endParaRPr lang="de-DE"/>
+          </a:p>
+        </p:txBody>
+      </p:sp>
+      <p:pic>
+        <p:nvPicPr>
+          <p:cNvPr id="15" name="Inhaltsplatzhalter 14">
+            <a:extLst>
+              <a:ext uri="{FF2B5EF4-FFF2-40B4-BE49-F238E27FC236}">
+                <a16:creationId xmlns:a16="http://schemas.microsoft.com/office/drawing/2014/main" id="{6BB573B1-6ED2-1559-D9E3-D7F1A2806410}"/>
+              </a:ext>
+            </a:extLst>
+          </p:cNvPr>
+          <p:cNvPicPr>
+            <a:picLocks noGrp="1" noChangeAspect="1"/>
+          </p:cNvPicPr>
           <p:nvPr>
             <p:ph idx="1"/>
           </p:nvPr>
-        </p:nvSpPr>
-        <p:spPr/>
-        <p:txBody>
-          <a:bodyPr/>
-          <a:lstStyle/>
-          <a:p>
-            <a:endParaRPr lang="de-DE"/>
-          </a:p>
-        </p:txBody>
-      </p:sp>
+        </p:nvPicPr>
+        <p:blipFill>
+          <a:blip>
+            <a:extLst>
+              <a:ext uri="{96DAC541-7B7A-43D3-8B79-37D633B846F1}">
+                <asvg:svgBlip xmlns:asvg="http://schemas.microsoft.com/office/drawing/2016/SVG/main" r:embed="rId2"/>
+              </a:ext>
+            </a:extLst>
+          </a:blip>
+          <a:srcRect b="15592"/>
+          <a:stretch>
+            <a:fillRect/>
+          </a:stretch>
+        </p:blipFill>
+        <p:spPr>
+          <a:xfrm>
+            <a:off x="838200" y="95517"/>
+            <a:ext cx="10601691" cy="6666966"/>
+          </a:xfrm>
+          <a:prstGeom prst="rect">
+            <a:avLst/>
+          </a:prstGeom>
+        </p:spPr>
+      </p:pic>
     </p:spTree>
     <p:extLst>
       <p:ext uri="{BB962C8B-B14F-4D97-AF65-F5344CB8AC3E}">
@@ -4128,6 +5274,18 @@
   <p:clrMapOvr>
     <a:masterClrMapping/>
   </p:clrMapOvr>
+  <mc:AlternateContent xmlns:mc="http://schemas.openxmlformats.org/markup-compatibility/2006">
+    <mc:Choice xmlns:p159="http://schemas.microsoft.com/office/powerpoint/2015/09/main" Requires="p159">
+      <p:transition xmlns:p14="http://schemas.microsoft.com/office/powerpoint/2010/main" spd="slow" p14:dur="2000">
+        <p159:morph option="byObject"/>
+      </p:transition>
+    </mc:Choice>
+    <mc:Fallback>
+      <p:transition spd="slow">
+        <p:fade/>
+      </p:transition>
+    </mc:Fallback>
+  </mc:AlternateContent>
 </p:sld>
 </file>
 
@@ -4136,7 +5294,13 @@
   <p:cSld>
     <p:spTree>
       <p:nvGrpSpPr>
-        <p:cNvPr id="1" name=""/>
+        <p:cNvPr id="1" name="">
+          <a:extLst>
+            <a:ext uri="{FF2B5EF4-FFF2-40B4-BE49-F238E27FC236}">
+              <a16:creationId xmlns:a16="http://schemas.microsoft.com/office/drawing/2014/main" id="{9B7BA40D-19A5-D8DD-683E-0D36B974BCD9}"/>
+            </a:ext>
+          </a:extLst>
+        </p:cNvPr>
         <p:cNvGrpSpPr/>
         <p:nvPr/>
       </p:nvGrpSpPr>
@@ -4150,10 +5314,10 @@
       </p:grpSpPr>
       <p:sp>
         <p:nvSpPr>
-          <p:cNvPr id="2" name="Titel 1">
-            <a:extLst>
-              <a:ext uri="{FF2B5EF4-FFF2-40B4-BE49-F238E27FC236}">
-                <a16:creationId xmlns:a16="http://schemas.microsoft.com/office/drawing/2014/main" id="{5BBB6FAE-8EFD-732A-B884-CC2BFCE3D1D4}"/>
+          <p:cNvPr id="7" name="Titel 6">
+            <a:extLst>
+              <a:ext uri="{FF2B5EF4-FFF2-40B4-BE49-F238E27FC236}">
+                <a16:creationId xmlns:a16="http://schemas.microsoft.com/office/drawing/2014/main" id="{58FB199E-BDBF-554E-780B-A8F52216EB05}"/>
               </a:ext>
             </a:extLst>
           </p:cNvPr>
@@ -4169,48 +5333,71 @@
           <a:bodyPr/>
           <a:lstStyle/>
           <a:p>
-            <a:r>
-              <a:rPr lang="de-DE" dirty="0"/>
-              <a:t>ER-Modell</a:t>
-            </a:r>
-          </a:p>
-        </p:txBody>
-      </p:sp>
-      <p:sp>
-        <p:nvSpPr>
-          <p:cNvPr id="3" name="Inhaltsplatzhalter 2">
-            <a:extLst>
-              <a:ext uri="{FF2B5EF4-FFF2-40B4-BE49-F238E27FC236}">
-                <a16:creationId xmlns:a16="http://schemas.microsoft.com/office/drawing/2014/main" id="{EB2D0694-4539-1D95-55C2-9B4E2E19A3DD}"/>
-              </a:ext>
-            </a:extLst>
-          </p:cNvPr>
-          <p:cNvSpPr>
-            <a:spLocks noGrp="1"/>
-          </p:cNvSpPr>
+            <a:endParaRPr lang="de-DE"/>
+          </a:p>
+        </p:txBody>
+      </p:sp>
+      <p:pic>
+        <p:nvPicPr>
+          <p:cNvPr id="15" name="Inhaltsplatzhalter 14">
+            <a:extLst>
+              <a:ext uri="{FF2B5EF4-FFF2-40B4-BE49-F238E27FC236}">
+                <a16:creationId xmlns:a16="http://schemas.microsoft.com/office/drawing/2014/main" id="{F86EB5EB-302C-A137-426D-E994D15B3C41}"/>
+              </a:ext>
+            </a:extLst>
+          </p:cNvPr>
+          <p:cNvPicPr>
+            <a:picLocks noGrp="1" noChangeAspect="1"/>
+          </p:cNvPicPr>
           <p:nvPr>
             <p:ph idx="1"/>
           </p:nvPr>
-        </p:nvSpPr>
-        <p:spPr/>
-        <p:txBody>
-          <a:bodyPr/>
-          <a:lstStyle/>
-          <a:p>
-            <a:endParaRPr lang="de-DE"/>
-          </a:p>
-        </p:txBody>
-      </p:sp>
+        </p:nvPicPr>
+        <p:blipFill>
+          <a:blip>
+            <a:extLst>
+              <a:ext uri="{96DAC541-7B7A-43D3-8B79-37D633B846F1}">
+                <asvg:svgBlip xmlns:asvg="http://schemas.microsoft.com/office/drawing/2016/SVG/main" r:embed="rId3"/>
+              </a:ext>
+            </a:extLst>
+          </a:blip>
+          <a:srcRect b="15592"/>
+          <a:stretch>
+            <a:fillRect/>
+          </a:stretch>
+        </p:blipFill>
+        <p:spPr>
+          <a:xfrm>
+            <a:off x="-2208973" y="-1669143"/>
+            <a:ext cx="21745201" cy="13674660"/>
+          </a:xfrm>
+          <a:prstGeom prst="rect">
+            <a:avLst/>
+          </a:prstGeom>
+        </p:spPr>
+      </p:pic>
     </p:spTree>
     <p:extLst>
       <p:ext uri="{BB962C8B-B14F-4D97-AF65-F5344CB8AC3E}">
-        <p14:creationId xmlns:p14="http://schemas.microsoft.com/office/powerpoint/2010/main" val="3200518224"/>
+        <p14:creationId xmlns:p14="http://schemas.microsoft.com/office/powerpoint/2010/main" val="1576795926"/>
       </p:ext>
     </p:extLst>
   </p:cSld>
   <p:clrMapOvr>
     <a:masterClrMapping/>
   </p:clrMapOvr>
+  <mc:AlternateContent xmlns:mc="http://schemas.openxmlformats.org/markup-compatibility/2006">
+    <mc:Choice xmlns:p159="http://schemas.microsoft.com/office/powerpoint/2015/09/main" Requires="p159">
+      <p:transition xmlns:p14="http://schemas.microsoft.com/office/powerpoint/2010/main" spd="slow" p14:dur="2000">
+        <p159:morph option="byObject"/>
+      </p:transition>
+    </mc:Choice>
+    <mc:Fallback>
+      <p:transition spd="slow">
+        <p:fade/>
+      </p:transition>
+    </mc:Fallback>
+  </mc:AlternateContent>
 </p:sld>
 </file>
 
@@ -4219,7 +5406,13 @@
   <p:cSld>
     <p:spTree>
       <p:nvGrpSpPr>
-        <p:cNvPr id="1" name=""/>
+        <p:cNvPr id="1" name="">
+          <a:extLst>
+            <a:ext uri="{FF2B5EF4-FFF2-40B4-BE49-F238E27FC236}">
+              <a16:creationId xmlns:a16="http://schemas.microsoft.com/office/drawing/2014/main" id="{66BF74F6-9C26-5B13-39F0-B82140CF61DF}"/>
+            </a:ext>
+          </a:extLst>
+        </p:cNvPr>
         <p:cNvGrpSpPr/>
         <p:nvPr/>
       </p:nvGrpSpPr>
@@ -4233,10 +5426,10 @@
       </p:grpSpPr>
       <p:sp>
         <p:nvSpPr>
-          <p:cNvPr id="2" name="Titel 1">
-            <a:extLst>
-              <a:ext uri="{FF2B5EF4-FFF2-40B4-BE49-F238E27FC236}">
-                <a16:creationId xmlns:a16="http://schemas.microsoft.com/office/drawing/2014/main" id="{AB7F007A-CDD3-0B03-2018-5B50FCE46489}"/>
+          <p:cNvPr id="7" name="Titel 6">
+            <a:extLst>
+              <a:ext uri="{FF2B5EF4-FFF2-40B4-BE49-F238E27FC236}">
+                <a16:creationId xmlns:a16="http://schemas.microsoft.com/office/drawing/2014/main" id="{D896FA19-8749-5624-E7A5-08CF39D4F2B9}"/>
               </a:ext>
             </a:extLst>
           </p:cNvPr>
@@ -4252,48 +5445,71 @@
           <a:bodyPr/>
           <a:lstStyle/>
           <a:p>
-            <a:r>
-              <a:rPr lang="de-DE" dirty="0"/>
-              <a:t>Logischer Datenbankenentwurf</a:t>
-            </a:r>
-          </a:p>
-        </p:txBody>
-      </p:sp>
-      <p:sp>
-        <p:nvSpPr>
-          <p:cNvPr id="3" name="Inhaltsplatzhalter 2">
-            <a:extLst>
-              <a:ext uri="{FF2B5EF4-FFF2-40B4-BE49-F238E27FC236}">
-                <a16:creationId xmlns:a16="http://schemas.microsoft.com/office/drawing/2014/main" id="{CD85E2FD-6D86-6F17-972C-B3DBA1BBD723}"/>
-              </a:ext>
-            </a:extLst>
-          </p:cNvPr>
-          <p:cNvSpPr>
-            <a:spLocks noGrp="1"/>
-          </p:cNvSpPr>
+            <a:endParaRPr lang="de-DE"/>
+          </a:p>
+        </p:txBody>
+      </p:sp>
+      <p:pic>
+        <p:nvPicPr>
+          <p:cNvPr id="15" name="Inhaltsplatzhalter 14">
+            <a:extLst>
+              <a:ext uri="{FF2B5EF4-FFF2-40B4-BE49-F238E27FC236}">
+                <a16:creationId xmlns:a16="http://schemas.microsoft.com/office/drawing/2014/main" id="{32926976-291F-2867-C8BC-D9676B4C4219}"/>
+              </a:ext>
+            </a:extLst>
+          </p:cNvPr>
+          <p:cNvPicPr>
+            <a:picLocks noGrp="1" noChangeAspect="1"/>
+          </p:cNvPicPr>
           <p:nvPr>
             <p:ph idx="1"/>
           </p:nvPr>
-        </p:nvSpPr>
-        <p:spPr/>
-        <p:txBody>
-          <a:bodyPr/>
-          <a:lstStyle/>
-          <a:p>
-            <a:endParaRPr lang="de-DE" dirty="0"/>
-          </a:p>
-        </p:txBody>
-      </p:sp>
+        </p:nvPicPr>
+        <p:blipFill>
+          <a:blip>
+            <a:extLst>
+              <a:ext uri="{96DAC541-7B7A-43D3-8B79-37D633B846F1}">
+                <asvg:svgBlip xmlns:asvg="http://schemas.microsoft.com/office/drawing/2016/SVG/main" r:embed="rId3"/>
+              </a:ext>
+            </a:extLst>
+          </a:blip>
+          <a:srcRect b="15592"/>
+          <a:stretch>
+            <a:fillRect/>
+          </a:stretch>
+        </p:blipFill>
+        <p:spPr>
+          <a:xfrm>
+            <a:off x="-5155373" y="-6816660"/>
+            <a:ext cx="21745201" cy="13674660"/>
+          </a:xfrm>
+          <a:prstGeom prst="rect">
+            <a:avLst/>
+          </a:prstGeom>
+        </p:spPr>
+      </p:pic>
     </p:spTree>
     <p:extLst>
       <p:ext uri="{BB962C8B-B14F-4D97-AF65-F5344CB8AC3E}">
-        <p14:creationId xmlns:p14="http://schemas.microsoft.com/office/powerpoint/2010/main" val="1397456177"/>
+        <p14:creationId xmlns:p14="http://schemas.microsoft.com/office/powerpoint/2010/main" val="450136571"/>
       </p:ext>
     </p:extLst>
   </p:cSld>
   <p:clrMapOvr>
     <a:masterClrMapping/>
   </p:clrMapOvr>
+  <mc:AlternateContent xmlns:mc="http://schemas.openxmlformats.org/markup-compatibility/2006">
+    <mc:Choice xmlns:p159="http://schemas.microsoft.com/office/powerpoint/2015/09/main" Requires="p159">
+      <p:transition xmlns:p14="http://schemas.microsoft.com/office/powerpoint/2010/main" spd="slow" p14:dur="2000">
+        <p159:morph option="byObject"/>
+      </p:transition>
+    </mc:Choice>
+    <mc:Fallback>
+      <p:transition spd="slow">
+        <p:fade/>
+      </p:transition>
+    </mc:Fallback>
+  </mc:AlternateContent>
 </p:sld>
 </file>
 
@@ -4302,7 +5518,13 @@
   <p:cSld>
     <p:spTree>
       <p:nvGrpSpPr>
-        <p:cNvPr id="1" name=""/>
+        <p:cNvPr id="1" name="">
+          <a:extLst>
+            <a:ext uri="{FF2B5EF4-FFF2-40B4-BE49-F238E27FC236}">
+              <a16:creationId xmlns:a16="http://schemas.microsoft.com/office/drawing/2014/main" id="{3B4F163C-17F3-F226-3B7A-05CD4C815BA5}"/>
+            </a:ext>
+          </a:extLst>
+        </p:cNvPr>
         <p:cNvGrpSpPr/>
         <p:nvPr/>
       </p:nvGrpSpPr>
@@ -4316,10 +5538,10 @@
       </p:grpSpPr>
       <p:sp>
         <p:nvSpPr>
-          <p:cNvPr id="2" name="Titel 1">
-            <a:extLst>
-              <a:ext uri="{FF2B5EF4-FFF2-40B4-BE49-F238E27FC236}">
-                <a16:creationId xmlns:a16="http://schemas.microsoft.com/office/drawing/2014/main" id="{E36216E1-F291-DBE4-2223-D0512FDF505C}"/>
+          <p:cNvPr id="7" name="Titel 6">
+            <a:extLst>
+              <a:ext uri="{FF2B5EF4-FFF2-40B4-BE49-F238E27FC236}">
+                <a16:creationId xmlns:a16="http://schemas.microsoft.com/office/drawing/2014/main" id="{7746C388-C250-B32A-191C-38364B464815}"/>
               </a:ext>
             </a:extLst>
           </p:cNvPr>
@@ -4335,48 +5557,341 @@
           <a:bodyPr/>
           <a:lstStyle/>
           <a:p>
-            <a:r>
-              <a:rPr lang="de-DE" dirty="0"/>
-              <a:t>SQL-Datenbank</a:t>
-            </a:r>
-          </a:p>
-        </p:txBody>
-      </p:sp>
-      <p:sp>
-        <p:nvSpPr>
-          <p:cNvPr id="3" name="Inhaltsplatzhalter 2">
-            <a:extLst>
-              <a:ext uri="{FF2B5EF4-FFF2-40B4-BE49-F238E27FC236}">
-                <a16:creationId xmlns:a16="http://schemas.microsoft.com/office/drawing/2014/main" id="{05616802-8963-F5B0-CFC7-5C7E4AD7F7B2}"/>
-              </a:ext>
-            </a:extLst>
-          </p:cNvPr>
-          <p:cNvSpPr>
-            <a:spLocks noGrp="1"/>
-          </p:cNvSpPr>
+            <a:endParaRPr lang="de-DE"/>
+          </a:p>
+        </p:txBody>
+      </p:sp>
+      <p:pic>
+        <p:nvPicPr>
+          <p:cNvPr id="15" name="Inhaltsplatzhalter 14">
+            <a:extLst>
+              <a:ext uri="{FF2B5EF4-FFF2-40B4-BE49-F238E27FC236}">
+                <a16:creationId xmlns:a16="http://schemas.microsoft.com/office/drawing/2014/main" id="{76889E32-8C45-A88E-D3E2-B946E76F91D3}"/>
+              </a:ext>
+            </a:extLst>
+          </p:cNvPr>
+          <p:cNvPicPr>
+            <a:picLocks noGrp="1" noChangeAspect="1"/>
+          </p:cNvPicPr>
           <p:nvPr>
             <p:ph idx="1"/>
           </p:nvPr>
-        </p:nvSpPr>
-        <p:spPr/>
-        <p:txBody>
-          <a:bodyPr/>
-          <a:lstStyle/>
-          <a:p>
-            <a:endParaRPr lang="de-DE"/>
-          </a:p>
-        </p:txBody>
-      </p:sp>
+        </p:nvPicPr>
+        <p:blipFill>
+          <a:blip>
+            <a:extLst>
+              <a:ext uri="{96DAC541-7B7A-43D3-8B79-37D633B846F1}">
+                <asvg:svgBlip xmlns:asvg="http://schemas.microsoft.com/office/drawing/2016/SVG/main" r:embed="rId3"/>
+              </a:ext>
+            </a:extLst>
+          </a:blip>
+          <a:srcRect b="15592"/>
+          <a:stretch>
+            <a:fillRect/>
+          </a:stretch>
+        </p:blipFill>
+        <p:spPr>
+          <a:xfrm>
+            <a:off x="-7303488" y="-6657003"/>
+            <a:ext cx="21745201" cy="13674660"/>
+          </a:xfrm>
+          <a:prstGeom prst="rect">
+            <a:avLst/>
+          </a:prstGeom>
+        </p:spPr>
+      </p:pic>
     </p:spTree>
     <p:extLst>
       <p:ext uri="{BB962C8B-B14F-4D97-AF65-F5344CB8AC3E}">
-        <p14:creationId xmlns:p14="http://schemas.microsoft.com/office/powerpoint/2010/main" val="1051220518"/>
+        <p14:creationId xmlns:p14="http://schemas.microsoft.com/office/powerpoint/2010/main" val="379338538"/>
       </p:ext>
     </p:extLst>
   </p:cSld>
   <p:clrMapOvr>
     <a:masterClrMapping/>
   </p:clrMapOvr>
+  <mc:AlternateContent xmlns:mc="http://schemas.openxmlformats.org/markup-compatibility/2006">
+    <mc:Choice xmlns:p159="http://schemas.microsoft.com/office/powerpoint/2015/09/main" Requires="p159">
+      <p:transition xmlns:p14="http://schemas.microsoft.com/office/powerpoint/2010/main" spd="slow" p14:dur="2000">
+        <p159:morph option="byObject"/>
+      </p:transition>
+    </mc:Choice>
+    <mc:Fallback>
+      <p:transition spd="slow">
+        <p:fade/>
+      </p:transition>
+    </mc:Fallback>
+  </mc:AlternateContent>
+</p:sld>
+</file>
+
+<file path=ppt/slides/slide8.xml><?xml version="1.0" encoding="utf-8"?>
+<p:sld xmlns:a="http://schemas.openxmlformats.org/drawingml/2006/main" xmlns:r="http://schemas.openxmlformats.org/officeDocument/2006/relationships" xmlns:p="http://schemas.openxmlformats.org/presentationml/2006/main">
+  <p:cSld>
+    <p:spTree>
+      <p:nvGrpSpPr>
+        <p:cNvPr id="1" name="">
+          <a:extLst>
+            <a:ext uri="{FF2B5EF4-FFF2-40B4-BE49-F238E27FC236}">
+              <a16:creationId xmlns:a16="http://schemas.microsoft.com/office/drawing/2014/main" id="{E1128364-D26D-4073-CFD6-5EBBE1FE642E}"/>
+            </a:ext>
+          </a:extLst>
+        </p:cNvPr>
+        <p:cNvGrpSpPr/>
+        <p:nvPr/>
+      </p:nvGrpSpPr>
+      <p:grpSpPr>
+        <a:xfrm>
+          <a:off x="0" y="0"/>
+          <a:ext cx="0" cy="0"/>
+          <a:chOff x="0" y="0"/>
+          <a:chExt cx="0" cy="0"/>
+        </a:xfrm>
+      </p:grpSpPr>
+      <p:sp>
+        <p:nvSpPr>
+          <p:cNvPr id="7" name="Titel 6">
+            <a:extLst>
+              <a:ext uri="{FF2B5EF4-FFF2-40B4-BE49-F238E27FC236}">
+                <a16:creationId xmlns:a16="http://schemas.microsoft.com/office/drawing/2014/main" id="{20CACEDA-2C35-5F1D-3657-6293468E16D9}"/>
+              </a:ext>
+            </a:extLst>
+          </p:cNvPr>
+          <p:cNvSpPr>
+            <a:spLocks noGrp="1"/>
+          </p:cNvSpPr>
+          <p:nvPr>
+            <p:ph type="title"/>
+          </p:nvPr>
+        </p:nvSpPr>
+        <p:spPr/>
+        <p:txBody>
+          <a:bodyPr/>
+          <a:lstStyle/>
+          <a:p>
+            <a:endParaRPr lang="de-DE"/>
+          </a:p>
+        </p:txBody>
+      </p:sp>
+      <p:sp>
+        <p:nvSpPr>
+          <p:cNvPr id="3" name="Inhaltsplatzhalter 2">
+            <a:extLst>
+              <a:ext uri="{FF2B5EF4-FFF2-40B4-BE49-F238E27FC236}">
+                <a16:creationId xmlns:a16="http://schemas.microsoft.com/office/drawing/2014/main" id="{1583BA65-497D-7F7C-2D10-295C92AB4318}"/>
+              </a:ext>
+            </a:extLst>
+          </p:cNvPr>
+          <p:cNvSpPr>
+            <a:spLocks noGrp="1"/>
+          </p:cNvSpPr>
+          <p:nvPr>
+            <p:ph idx="1"/>
+          </p:nvPr>
+        </p:nvSpPr>
+        <p:spPr/>
+        <p:txBody>
+          <a:bodyPr/>
+          <a:lstStyle/>
+          <a:p>
+            <a:endParaRPr lang="de-DE"/>
+          </a:p>
+        </p:txBody>
+      </p:sp>
+      <p:pic>
+        <p:nvPicPr>
+          <p:cNvPr id="4" name="Inhaltsplatzhalter 14">
+            <a:extLst>
+              <a:ext uri="{FF2B5EF4-FFF2-40B4-BE49-F238E27FC236}">
+                <a16:creationId xmlns:a16="http://schemas.microsoft.com/office/drawing/2014/main" id="{65168C1B-7BFC-4DCB-902F-E8048403DFAE}"/>
+              </a:ext>
+            </a:extLst>
+          </p:cNvPr>
+          <p:cNvPicPr>
+            <a:picLocks noChangeAspect="1"/>
+          </p:cNvPicPr>
+          <p:nvPr/>
+        </p:nvPicPr>
+        <p:blipFill>
+          <a:blip>
+            <a:extLst>
+              <a:ext uri="{96DAC541-7B7A-43D3-8B79-37D633B846F1}">
+                <asvg:svgBlip xmlns:asvg="http://schemas.microsoft.com/office/drawing/2016/SVG/main" r:embed="rId3"/>
+              </a:ext>
+            </a:extLst>
+          </a:blip>
+          <a:srcRect b="15592"/>
+          <a:stretch>
+            <a:fillRect/>
+          </a:stretch>
+        </p:blipFill>
+        <p:spPr>
+          <a:xfrm>
+            <a:off x="838200" y="95517"/>
+            <a:ext cx="10601691" cy="6666966"/>
+          </a:xfrm>
+          <a:prstGeom prst="rect">
+            <a:avLst/>
+          </a:prstGeom>
+        </p:spPr>
+      </p:pic>
+    </p:spTree>
+    <p:extLst>
+      <p:ext uri="{BB962C8B-B14F-4D97-AF65-F5344CB8AC3E}">
+        <p14:creationId xmlns:p14="http://schemas.microsoft.com/office/powerpoint/2010/main" val="575951321"/>
+      </p:ext>
+    </p:extLst>
+  </p:cSld>
+  <p:clrMapOvr>
+    <a:masterClrMapping/>
+  </p:clrMapOvr>
+  <mc:AlternateContent xmlns:mc="http://schemas.openxmlformats.org/markup-compatibility/2006">
+    <mc:Choice xmlns:p159="http://schemas.microsoft.com/office/powerpoint/2015/09/main" Requires="p159">
+      <p:transition xmlns:p14="http://schemas.microsoft.com/office/powerpoint/2010/main" spd="slow" p14:dur="2000">
+        <p159:morph option="byObject"/>
+      </p:transition>
+    </mc:Choice>
+    <mc:Fallback>
+      <p:transition spd="slow">
+        <p:fade/>
+      </p:transition>
+    </mc:Fallback>
+  </mc:AlternateContent>
+</p:sld>
+</file>
+
+<file path=ppt/slides/slide9.xml><?xml version="1.0" encoding="utf-8"?>
+<p:sld xmlns:a="http://schemas.openxmlformats.org/drawingml/2006/main" xmlns:r="http://schemas.openxmlformats.org/officeDocument/2006/relationships" xmlns:p="http://schemas.openxmlformats.org/presentationml/2006/main">
+  <p:cSld>
+    <p:spTree>
+      <p:nvGrpSpPr>
+        <p:cNvPr id="1" name="">
+          <a:extLst>
+            <a:ext uri="{FF2B5EF4-FFF2-40B4-BE49-F238E27FC236}">
+              <a16:creationId xmlns:a16="http://schemas.microsoft.com/office/drawing/2014/main" id="{B60FF8A6-E39E-56CF-4BBA-FCF33ABD9C2C}"/>
+            </a:ext>
+          </a:extLst>
+        </p:cNvPr>
+        <p:cNvGrpSpPr/>
+        <p:nvPr/>
+      </p:nvGrpSpPr>
+      <p:grpSpPr>
+        <a:xfrm>
+          <a:off x="0" y="0"/>
+          <a:ext cx="0" cy="0"/>
+          <a:chOff x="0" y="0"/>
+          <a:chExt cx="0" cy="0"/>
+        </a:xfrm>
+      </p:grpSpPr>
+      <p:sp>
+        <p:nvSpPr>
+          <p:cNvPr id="7" name="Titel 6">
+            <a:extLst>
+              <a:ext uri="{FF2B5EF4-FFF2-40B4-BE49-F238E27FC236}">
+                <a16:creationId xmlns:a16="http://schemas.microsoft.com/office/drawing/2014/main" id="{B5480E9F-4CDA-DDBF-3261-FAEF92481E91}"/>
+              </a:ext>
+            </a:extLst>
+          </p:cNvPr>
+          <p:cNvSpPr>
+            <a:spLocks noGrp="1"/>
+          </p:cNvSpPr>
+          <p:nvPr>
+            <p:ph type="title"/>
+          </p:nvPr>
+        </p:nvSpPr>
+        <p:spPr/>
+        <p:txBody>
+          <a:bodyPr/>
+          <a:lstStyle/>
+          <a:p>
+            <a:endParaRPr lang="de-DE"/>
+          </a:p>
+        </p:txBody>
+      </p:sp>
+      <p:sp>
+        <p:nvSpPr>
+          <p:cNvPr id="3" name="Inhaltsplatzhalter 2">
+            <a:extLst>
+              <a:ext uri="{FF2B5EF4-FFF2-40B4-BE49-F238E27FC236}">
+                <a16:creationId xmlns:a16="http://schemas.microsoft.com/office/drawing/2014/main" id="{3C79DBDF-78A5-74FC-DF1B-9BFE7F62DE28}"/>
+              </a:ext>
+            </a:extLst>
+          </p:cNvPr>
+          <p:cNvSpPr>
+            <a:spLocks noGrp="1"/>
+          </p:cNvSpPr>
+          <p:nvPr>
+            <p:ph idx="1"/>
+          </p:nvPr>
+        </p:nvSpPr>
+        <p:spPr/>
+        <p:txBody>
+          <a:bodyPr/>
+          <a:lstStyle/>
+          <a:p>
+            <a:endParaRPr lang="de-DE"/>
+          </a:p>
+        </p:txBody>
+      </p:sp>
+      <p:pic>
+        <p:nvPicPr>
+          <p:cNvPr id="4" name="Inhaltsplatzhalter 14">
+            <a:extLst>
+              <a:ext uri="{FF2B5EF4-FFF2-40B4-BE49-F238E27FC236}">
+                <a16:creationId xmlns:a16="http://schemas.microsoft.com/office/drawing/2014/main" id="{CA2DCC2B-CDA0-327D-682A-426EC808590D}"/>
+              </a:ext>
+            </a:extLst>
+          </p:cNvPr>
+          <p:cNvPicPr>
+            <a:picLocks noChangeAspect="1"/>
+          </p:cNvPicPr>
+          <p:nvPr/>
+        </p:nvPicPr>
+        <p:blipFill>
+          <a:blip>
+            <a:extLst>
+              <a:ext uri="{96DAC541-7B7A-43D3-8B79-37D633B846F1}">
+                <asvg:svgBlip xmlns:asvg="http://schemas.microsoft.com/office/drawing/2016/SVG/main" r:embed="rId3"/>
+              </a:ext>
+            </a:extLst>
+          </a:blip>
+          <a:srcRect b="15592"/>
+          <a:stretch>
+            <a:fillRect/>
+          </a:stretch>
+        </p:blipFill>
+        <p:spPr>
+          <a:xfrm>
+            <a:off x="-8748683" y="-1582057"/>
+            <a:ext cx="20751998" cy="13050075"/>
+          </a:xfrm>
+          <a:prstGeom prst="rect">
+            <a:avLst/>
+          </a:prstGeom>
+        </p:spPr>
+      </p:pic>
+    </p:spTree>
+    <p:extLst>
+      <p:ext uri="{BB962C8B-B14F-4D97-AF65-F5344CB8AC3E}">
+        <p14:creationId xmlns:p14="http://schemas.microsoft.com/office/powerpoint/2010/main" val="3273819884"/>
+      </p:ext>
+    </p:extLst>
+  </p:cSld>
+  <p:clrMapOvr>
+    <a:masterClrMapping/>
+  </p:clrMapOvr>
+  <mc:AlternateContent xmlns:mc="http://schemas.openxmlformats.org/markup-compatibility/2006">
+    <mc:Choice xmlns:p159="http://schemas.microsoft.com/office/powerpoint/2015/09/main" Requires="p159">
+      <p:transition xmlns:p14="http://schemas.microsoft.com/office/powerpoint/2010/main" spd="slow" p14:dur="2000">
+        <p159:morph option="byObject"/>
+      </p:transition>
+    </mc:Choice>
+    <mc:Fallback>
+      <p:transition spd="slow">
+        <p:fade/>
+      </p:transition>
+    </mc:Fallback>
+  </mc:AlternateContent>
 </p:sld>
 </file>
 
@@ -4693,4 +6208,319 @@
     </a:ext>
   </a:extLst>
 </a:theme>
+</file>
+
+<file path=ppt/theme/theme2.xml><?xml version="1.0" encoding="utf-8"?>
+<a:theme xmlns:a="http://schemas.openxmlformats.org/drawingml/2006/main" name="Office">
+  <a:themeElements>
+    <a:clrScheme name="Office">
+      <a:dk1>
+        <a:sysClr val="windowText" lastClr="000000"/>
+      </a:dk1>
+      <a:lt1>
+        <a:sysClr val="window" lastClr="FFFFFF"/>
+      </a:lt1>
+      <a:dk2>
+        <a:srgbClr val="0E2841"/>
+      </a:dk2>
+      <a:lt2>
+        <a:srgbClr val="E8E8E8"/>
+      </a:lt2>
+      <a:accent1>
+        <a:srgbClr val="156082"/>
+      </a:accent1>
+      <a:accent2>
+        <a:srgbClr val="E97132"/>
+      </a:accent2>
+      <a:accent3>
+        <a:srgbClr val="196B24"/>
+      </a:accent3>
+      <a:accent4>
+        <a:srgbClr val="0F9ED5"/>
+      </a:accent4>
+      <a:accent5>
+        <a:srgbClr val="A02B93"/>
+      </a:accent5>
+      <a:accent6>
+        <a:srgbClr val="4EA72E"/>
+      </a:accent6>
+      <a:hlink>
+        <a:srgbClr val="467886"/>
+      </a:hlink>
+      <a:folHlink>
+        <a:srgbClr val="96607D"/>
+      </a:folHlink>
+    </a:clrScheme>
+    <a:fontScheme name="Office">
+      <a:majorFont>
+        <a:latin typeface="Aptos Display" panose="02110004020202020204"/>
+        <a:ea typeface=""/>
+        <a:cs typeface=""/>
+        <a:font script="Jpan" typeface="游ゴシック Light"/>
+        <a:font script="Hang" typeface="맑은 고딕"/>
+        <a:font script="Hans" typeface="等线 Light"/>
+        <a:font script="Hant" typeface="新細明體"/>
+        <a:font script="Arab" typeface="Times New Roman"/>
+        <a:font script="Hebr" typeface="Times New Roman"/>
+        <a:font script="Thai" typeface="Angsana New"/>
+        <a:font script="Ethi" typeface="Nyala"/>
+        <a:font script="Beng" typeface="Vrinda"/>
+        <a:font script="Gujr" typeface="Shruti"/>
+        <a:font script="Khmr" typeface="MoolBoran"/>
+        <a:font script="Knda" typeface="Tunga"/>
+        <a:font script="Guru" typeface="Raavi"/>
+        <a:font script="Cans" typeface="Euphemia"/>
+        <a:font script="Cher" typeface="Plantagenet Cherokee"/>
+        <a:font script="Yiii" typeface="Microsoft Yi Baiti"/>
+        <a:font script="Tibt" typeface="Microsoft Himalaya"/>
+        <a:font script="Thaa" typeface="MV Boli"/>
+        <a:font script="Deva" typeface="Mangal"/>
+        <a:font script="Telu" typeface="Gautami"/>
+        <a:font script="Taml" typeface="Latha"/>
+        <a:font script="Syrc" typeface="Estrangelo Edessa"/>
+        <a:font script="Orya" typeface="Kalinga"/>
+        <a:font script="Mlym" typeface="Kartika"/>
+        <a:font script="Laoo" typeface="DokChampa"/>
+        <a:font script="Sinh" typeface="Iskoola Pota"/>
+        <a:font script="Mong" typeface="Mongolian Baiti"/>
+        <a:font script="Viet" typeface="Times New Roman"/>
+        <a:font script="Uigh" typeface="Microsoft Uighur"/>
+        <a:font script="Geor" typeface="Sylfaen"/>
+        <a:font script="Armn" typeface="Arial"/>
+        <a:font script="Bugi" typeface="Leelawadee UI"/>
+        <a:font script="Bopo" typeface="Microsoft JhengHei"/>
+        <a:font script="Java" typeface="Javanese Text"/>
+        <a:font script="Lisu" typeface="Segoe UI"/>
+        <a:font script="Mymr" typeface="Myanmar Text"/>
+        <a:font script="Nkoo" typeface="Ebrima"/>
+        <a:font script="Olck" typeface="Nirmala UI"/>
+        <a:font script="Osma" typeface="Ebrima"/>
+        <a:font script="Phag" typeface="Phagspa"/>
+        <a:font script="Syrn" typeface="Estrangelo Edessa"/>
+        <a:font script="Syrj" typeface="Estrangelo Edessa"/>
+        <a:font script="Syre" typeface="Estrangelo Edessa"/>
+        <a:font script="Sora" typeface="Nirmala UI"/>
+        <a:font script="Tale" typeface="Microsoft Tai Le"/>
+        <a:font script="Talu" typeface="Microsoft New Tai Lue"/>
+        <a:font script="Tfng" typeface="Ebrima"/>
+      </a:majorFont>
+      <a:minorFont>
+        <a:latin typeface="Aptos" panose="02110004020202020204"/>
+        <a:ea typeface=""/>
+        <a:cs typeface=""/>
+        <a:font script="Jpan" typeface="游ゴシック"/>
+        <a:font script="Hang" typeface="맑은 고딕"/>
+        <a:font script="Hans" typeface="等线"/>
+        <a:font script="Hant" typeface="新細明體"/>
+        <a:font script="Arab" typeface="Arial"/>
+        <a:font script="Hebr" typeface="Arial"/>
+        <a:font script="Thai" typeface="Cordia New"/>
+        <a:font script="Ethi" typeface="Nyala"/>
+        <a:font script="Beng" typeface="Vrinda"/>
+        <a:font script="Gujr" typeface="Shruti"/>
+        <a:font script="Khmr" typeface="DaunPenh"/>
+        <a:font script="Knda" typeface="Tunga"/>
+        <a:font script="Guru" typeface="Raavi"/>
+        <a:font script="Cans" typeface="Euphemia"/>
+        <a:font script="Cher" typeface="Plantagenet Cherokee"/>
+        <a:font script="Yiii" typeface="Microsoft Yi Baiti"/>
+        <a:font script="Tibt" typeface="Microsoft Himalaya"/>
+        <a:font script="Thaa" typeface="MV Boli"/>
+        <a:font script="Deva" typeface="Mangal"/>
+        <a:font script="Telu" typeface="Gautami"/>
+        <a:font script="Taml" typeface="Latha"/>
+        <a:font script="Syrc" typeface="Estrangelo Edessa"/>
+        <a:font script="Orya" typeface="Kalinga"/>
+        <a:font script="Mlym" typeface="Kartika"/>
+        <a:font script="Laoo" typeface="DokChampa"/>
+        <a:font script="Sinh" typeface="Iskoola Pota"/>
+        <a:font script="Mong" typeface="Mongolian Baiti"/>
+        <a:font script="Viet" typeface="Arial"/>
+        <a:font script="Uigh" typeface="Microsoft Uighur"/>
+        <a:font script="Geor" typeface="Sylfaen"/>
+        <a:font script="Armn" typeface="Arial"/>
+        <a:font script="Bugi" typeface="Leelawadee UI"/>
+        <a:font script="Bopo" typeface="Microsoft JhengHei"/>
+        <a:font script="Java" typeface="Javanese Text"/>
+        <a:font script="Lisu" typeface="Segoe UI"/>
+        <a:font script="Mymr" typeface="Myanmar Text"/>
+        <a:font script="Nkoo" typeface="Ebrima"/>
+        <a:font script="Olck" typeface="Nirmala UI"/>
+        <a:font script="Osma" typeface="Ebrima"/>
+        <a:font script="Phag" typeface="Phagspa"/>
+        <a:font script="Syrn" typeface="Estrangelo Edessa"/>
+        <a:font script="Syrj" typeface="Estrangelo Edessa"/>
+        <a:font script="Syre" typeface="Estrangelo Edessa"/>
+        <a:font script="Sora" typeface="Nirmala UI"/>
+        <a:font script="Tale" typeface="Microsoft Tai Le"/>
+        <a:font script="Talu" typeface="Microsoft New Tai Lue"/>
+        <a:font script="Tfng" typeface="Ebrima"/>
+      </a:minorFont>
+    </a:fontScheme>
+    <a:fmtScheme name="Office">
+      <a:fillStyleLst>
+        <a:solidFill>
+          <a:schemeClr val="phClr"/>
+        </a:solidFill>
+        <a:gradFill rotWithShape="1">
+          <a:gsLst>
+            <a:gs pos="0">
+              <a:schemeClr val="phClr">
+                <a:lumMod val="110000"/>
+                <a:satMod val="105000"/>
+                <a:tint val="67000"/>
+              </a:schemeClr>
+            </a:gs>
+            <a:gs pos="50000">
+              <a:schemeClr val="phClr">
+                <a:lumMod val="105000"/>
+                <a:satMod val="103000"/>
+                <a:tint val="73000"/>
+              </a:schemeClr>
+            </a:gs>
+            <a:gs pos="100000">
+              <a:schemeClr val="phClr">
+                <a:lumMod val="105000"/>
+                <a:satMod val="109000"/>
+                <a:tint val="81000"/>
+              </a:schemeClr>
+            </a:gs>
+          </a:gsLst>
+          <a:lin ang="5400000" scaled="0"/>
+        </a:gradFill>
+        <a:gradFill rotWithShape="1">
+          <a:gsLst>
+            <a:gs pos="0">
+              <a:schemeClr val="phClr">
+                <a:satMod val="103000"/>
+                <a:lumMod val="102000"/>
+                <a:tint val="94000"/>
+              </a:schemeClr>
+            </a:gs>
+            <a:gs pos="50000">
+              <a:schemeClr val="phClr">
+                <a:satMod val="110000"/>
+                <a:lumMod val="100000"/>
+                <a:shade val="100000"/>
+              </a:schemeClr>
+            </a:gs>
+            <a:gs pos="100000">
+              <a:schemeClr val="phClr">
+                <a:lumMod val="99000"/>
+                <a:satMod val="120000"/>
+                <a:shade val="78000"/>
+              </a:schemeClr>
+            </a:gs>
+          </a:gsLst>
+          <a:lin ang="5400000" scaled="0"/>
+        </a:gradFill>
+      </a:fillStyleLst>
+      <a:lnStyleLst>
+        <a:ln w="12700" cap="flat" cmpd="sng" algn="ctr">
+          <a:solidFill>
+            <a:schemeClr val="phClr"/>
+          </a:solidFill>
+          <a:prstDash val="solid"/>
+          <a:miter lim="800000"/>
+        </a:ln>
+        <a:ln w="19050" cap="flat" cmpd="sng" algn="ctr">
+          <a:solidFill>
+            <a:schemeClr val="phClr"/>
+          </a:solidFill>
+          <a:prstDash val="solid"/>
+          <a:miter lim="800000"/>
+        </a:ln>
+        <a:ln w="25400" cap="flat" cmpd="sng" algn="ctr">
+          <a:solidFill>
+            <a:schemeClr val="phClr"/>
+          </a:solidFill>
+          <a:prstDash val="solid"/>
+          <a:miter lim="800000"/>
+        </a:ln>
+      </a:lnStyleLst>
+      <a:effectStyleLst>
+        <a:effectStyle>
+          <a:effectLst/>
+        </a:effectStyle>
+        <a:effectStyle>
+          <a:effectLst/>
+        </a:effectStyle>
+        <a:effectStyle>
+          <a:effectLst>
+            <a:outerShdw blurRad="57150" dist="19050" dir="5400000" algn="ctr" rotWithShape="0">
+              <a:srgbClr val="000000">
+                <a:alpha val="63000"/>
+              </a:srgbClr>
+            </a:outerShdw>
+          </a:effectLst>
+        </a:effectStyle>
+      </a:effectStyleLst>
+      <a:bgFillStyleLst>
+        <a:solidFill>
+          <a:schemeClr val="phClr"/>
+        </a:solidFill>
+        <a:solidFill>
+          <a:schemeClr val="phClr">
+            <a:tint val="95000"/>
+            <a:satMod val="170000"/>
+          </a:schemeClr>
+        </a:solidFill>
+        <a:gradFill rotWithShape="1">
+          <a:gsLst>
+            <a:gs pos="0">
+              <a:schemeClr val="phClr">
+                <a:tint val="93000"/>
+                <a:satMod val="150000"/>
+                <a:shade val="98000"/>
+                <a:lumMod val="102000"/>
+              </a:schemeClr>
+            </a:gs>
+            <a:gs pos="50000">
+              <a:schemeClr val="phClr">
+                <a:tint val="98000"/>
+                <a:satMod val="130000"/>
+                <a:shade val="90000"/>
+                <a:lumMod val="103000"/>
+              </a:schemeClr>
+            </a:gs>
+            <a:gs pos="100000">
+              <a:schemeClr val="phClr">
+                <a:shade val="63000"/>
+                <a:satMod val="120000"/>
+              </a:schemeClr>
+            </a:gs>
+          </a:gsLst>
+          <a:lin ang="5400000" scaled="0"/>
+        </a:gradFill>
+      </a:bgFillStyleLst>
+    </a:fmtScheme>
+  </a:themeElements>
+  <a:objectDefaults>
+    <a:lnDef>
+      <a:spPr/>
+      <a:bodyPr/>
+      <a:lstStyle/>
+      <a:style>
+        <a:lnRef idx="2">
+          <a:schemeClr val="accent1"/>
+        </a:lnRef>
+        <a:fillRef idx="0">
+          <a:schemeClr val="accent1"/>
+        </a:fillRef>
+        <a:effectRef idx="1">
+          <a:schemeClr val="accent1"/>
+        </a:effectRef>
+        <a:fontRef idx="minor">
+          <a:schemeClr val="tx1"/>
+        </a:fontRef>
+      </a:style>
+    </a:lnDef>
+  </a:objectDefaults>
+  <a:extraClrSchemeLst/>
+  <a:extLst>
+    <a:ext uri="{05A4C25C-085E-4340-85A3-A5531E510DB2}">
+      <thm15:themeFamily xmlns:thm15="http://schemas.microsoft.com/office/thememl/2012/main" name="Office Theme" id="{2E142A2C-CD16-42D6-873A-C26D2A0506FA}" vid="{1BDDFF52-6CD6-40A5-AB3C-68EB2F1E4D0A}"/>
+    </a:ext>
+  </a:extLst>
+</a:theme>
 </file>
--- a/BibPräsi.pptx
+++ b/BibPräsi.pptx
@@ -119,6 +119,38 @@
     </a:lvl9pPr>
   </p:defaultTextStyle>
   <p:extLst>
+    <p:ext uri="{521415D9-36F7-43E2-AB2F-B90AF26B5E84}">
+      <p14:sectionLst xmlns:p14="http://schemas.microsoft.com/office/powerpoint/2010/main">
+        <p14:section name="Standardabschnitt" id="{CF3ACC40-1163-4A6C-A82C-1E1D84D424A7}">
+          <p14:sldIdLst>
+            <p14:sldId id="256"/>
+          </p14:sldIdLst>
+        </p14:section>
+        <p14:section name="Mouna" id="{D23AACBD-D1EF-42DE-9590-C0A8AC384857}">
+          <p14:sldIdLst>
+            <p14:sldId id="257"/>
+            <p14:sldId id="258"/>
+            <p14:sldId id="259"/>
+            <p14:sldId id="263"/>
+            <p14:sldId id="264"/>
+            <p14:sldId id="265"/>
+            <p14:sldId id="266"/>
+            <p14:sldId id="267"/>
+          </p14:sldIdLst>
+        </p14:section>
+        <p14:section name="Mia" id="{04D14486-FA9D-4BB9-B280-97EF10716047}">
+          <p14:sldIdLst>
+            <p14:sldId id="260"/>
+            <p14:sldId id="261"/>
+          </p14:sldIdLst>
+        </p14:section>
+        <p14:section name="Finja" id="{A6477248-0C57-4DD1-B721-E15CF765ABA0}">
+          <p14:sldIdLst>
+            <p14:sldId id="262"/>
+          </p14:sldIdLst>
+        </p14:section>
+      </p14:sectionLst>
+    </p:ext>
     <p:ext uri="{EFAFB233-063F-42B5-8137-9DF3F51BA10A}">
       <p15:sldGuideLst xmlns:p15="http://schemas.microsoft.com/office/powerpoint/2012/main"/>
     </p:ext>
@@ -208,7 +240,7 @@
           <a:p>
             <a:fld id="{29AB276D-0B6C-4441-8D54-6BA680AC8953}" type="datetimeFigureOut">
               <a:rPr lang="de-DE" smtClean="0"/>
-              <a:t>12.06.2026</a:t>
+              <a:t>14.06.2026</a:t>
             </a:fld>
             <a:endParaRPr lang="de-DE"/>
           </a:p>
@@ -1138,7 +1170,7 @@
           <a:p>
             <a:fld id="{47687675-1CDB-48C0-9C87-57F4E3A33078}" type="datetimeFigureOut">
               <a:rPr lang="de-DE" smtClean="0"/>
-              <a:t>12.06.2026</a:t>
+              <a:t>14.06.2026</a:t>
             </a:fld>
             <a:endParaRPr lang="de-DE"/>
           </a:p>
@@ -1336,7 +1368,7 @@
           <a:p>
             <a:fld id="{47687675-1CDB-48C0-9C87-57F4E3A33078}" type="datetimeFigureOut">
               <a:rPr lang="de-DE" smtClean="0"/>
-              <a:t>12.06.2026</a:t>
+              <a:t>14.06.2026</a:t>
             </a:fld>
             <a:endParaRPr lang="de-DE"/>
           </a:p>
@@ -1544,7 +1576,7 @@
           <a:p>
             <a:fld id="{47687675-1CDB-48C0-9C87-57F4E3A33078}" type="datetimeFigureOut">
               <a:rPr lang="de-DE" smtClean="0"/>
-              <a:t>12.06.2026</a:t>
+              <a:t>14.06.2026</a:t>
             </a:fld>
             <a:endParaRPr lang="de-DE"/>
           </a:p>
@@ -1742,7 +1774,7 @@
           <a:p>
             <a:fld id="{47687675-1CDB-48C0-9C87-57F4E3A33078}" type="datetimeFigureOut">
               <a:rPr lang="de-DE" smtClean="0"/>
-              <a:t>12.06.2026</a:t>
+              <a:t>14.06.2026</a:t>
             </a:fld>
             <a:endParaRPr lang="de-DE"/>
           </a:p>
@@ -2017,7 +2049,7 @@
           <a:p>
             <a:fld id="{47687675-1CDB-48C0-9C87-57F4E3A33078}" type="datetimeFigureOut">
               <a:rPr lang="de-DE" smtClean="0"/>
-              <a:t>12.06.2026</a:t>
+              <a:t>14.06.2026</a:t>
             </a:fld>
             <a:endParaRPr lang="de-DE"/>
           </a:p>
@@ -2282,7 +2314,7 @@
           <a:p>
             <a:fld id="{47687675-1CDB-48C0-9C87-57F4E3A33078}" type="datetimeFigureOut">
               <a:rPr lang="de-DE" smtClean="0"/>
-              <a:t>12.06.2026</a:t>
+              <a:t>14.06.2026</a:t>
             </a:fld>
             <a:endParaRPr lang="de-DE"/>
           </a:p>
@@ -2694,7 +2726,7 @@
           <a:p>
             <a:fld id="{47687675-1CDB-48C0-9C87-57F4E3A33078}" type="datetimeFigureOut">
               <a:rPr lang="de-DE" smtClean="0"/>
-              <a:t>12.06.2026</a:t>
+              <a:t>14.06.2026</a:t>
             </a:fld>
             <a:endParaRPr lang="de-DE"/>
           </a:p>
@@ -2835,7 +2867,7 @@
           <a:p>
             <a:fld id="{47687675-1CDB-48C0-9C87-57F4E3A33078}" type="datetimeFigureOut">
               <a:rPr lang="de-DE" smtClean="0"/>
-              <a:t>12.06.2026</a:t>
+              <a:t>14.06.2026</a:t>
             </a:fld>
             <a:endParaRPr lang="de-DE"/>
           </a:p>
@@ -2948,7 +2980,7 @@
           <a:p>
             <a:fld id="{47687675-1CDB-48C0-9C87-57F4E3A33078}" type="datetimeFigureOut">
               <a:rPr lang="de-DE" smtClean="0"/>
-              <a:t>12.06.2026</a:t>
+              <a:t>14.06.2026</a:t>
             </a:fld>
             <a:endParaRPr lang="de-DE"/>
           </a:p>
@@ -3259,7 +3291,7 @@
           <a:p>
             <a:fld id="{47687675-1CDB-48C0-9C87-57F4E3A33078}" type="datetimeFigureOut">
               <a:rPr lang="de-DE" smtClean="0"/>
-              <a:t>12.06.2026</a:t>
+              <a:t>14.06.2026</a:t>
             </a:fld>
             <a:endParaRPr lang="de-DE"/>
           </a:p>
@@ -3547,7 +3579,7 @@
           <a:p>
             <a:fld id="{47687675-1CDB-48C0-9C87-57F4E3A33078}" type="datetimeFigureOut">
               <a:rPr lang="de-DE" smtClean="0"/>
-              <a:t>12.06.2026</a:t>
+              <a:t>14.06.2026</a:t>
             </a:fld>
             <a:endParaRPr lang="de-DE"/>
           </a:p>
@@ -3788,7 +3820,7 @@
           <a:p>
             <a:fld id="{47687675-1CDB-48C0-9C87-57F4E3A33078}" type="datetimeFigureOut">
               <a:rPr lang="de-DE" smtClean="0"/>
-              <a:t>12.06.2026</a:t>
+              <a:t>14.06.2026</a:t>
             </a:fld>
             <a:endParaRPr lang="de-DE"/>
           </a:p>
@@ -5274,13 +5306,13 @@
   <p:clrMapOvr>
     <a:masterClrMapping/>
   </p:clrMapOvr>
-  <mc:AlternateContent xmlns:mc="http://schemas.openxmlformats.org/markup-compatibility/2006">
-    <mc:Choice xmlns:p159="http://schemas.microsoft.com/office/powerpoint/2015/09/main" Requires="p159">
+  <mc:AlternateContent xmlns:mc="http://schemas.openxmlformats.org/markup-compatibility/2006" xmlns:p159="http://schemas.microsoft.com/office/powerpoint/2015/09/main">
+    <mc:Choice Requires="p159">
       <p:transition xmlns:p14="http://schemas.microsoft.com/office/powerpoint/2010/main" spd="slow" p14:dur="2000">
         <p159:morph option="byObject"/>
       </p:transition>
     </mc:Choice>
-    <mc:Fallback>
+    <mc:Fallback xmlns="">
       <p:transition spd="slow">
         <p:fade/>
       </p:transition>
@@ -5386,13 +5418,13 @@
   <p:clrMapOvr>
     <a:masterClrMapping/>
   </p:clrMapOvr>
-  <mc:AlternateContent xmlns:mc="http://schemas.openxmlformats.org/markup-compatibility/2006">
-    <mc:Choice xmlns:p159="http://schemas.microsoft.com/office/powerpoint/2015/09/main" Requires="p159">
+  <mc:AlternateContent xmlns:mc="http://schemas.openxmlformats.org/markup-compatibility/2006" xmlns:p159="http://schemas.microsoft.com/office/powerpoint/2015/09/main">
+    <mc:Choice Requires="p159">
       <p:transition xmlns:p14="http://schemas.microsoft.com/office/powerpoint/2010/main" spd="slow" p14:dur="2000">
         <p159:morph option="byObject"/>
       </p:transition>
     </mc:Choice>
-    <mc:Fallback>
+    <mc:Fallback xmlns="">
       <p:transition spd="slow">
         <p:fade/>
       </p:transition>
@@ -5498,13 +5530,13 @@
   <p:clrMapOvr>
     <a:masterClrMapping/>
   </p:clrMapOvr>
-  <mc:AlternateContent xmlns:mc="http://schemas.openxmlformats.org/markup-compatibility/2006">
-    <mc:Choice xmlns:p159="http://schemas.microsoft.com/office/powerpoint/2015/09/main" Requires="p159">
+  <mc:AlternateContent xmlns:mc="http://schemas.openxmlformats.org/markup-compatibility/2006" xmlns:p159="http://schemas.microsoft.com/office/powerpoint/2015/09/main">
+    <mc:Choice Requires="p159">
       <p:transition xmlns:p14="http://schemas.microsoft.com/office/powerpoint/2010/main" spd="slow" p14:dur="2000">
         <p159:morph option="byObject"/>
       </p:transition>
     </mc:Choice>
-    <mc:Fallback>
+    <mc:Fallback xmlns="">
       <p:transition spd="slow">
         <p:fade/>
       </p:transition>
@@ -5610,13 +5642,13 @@
   <p:clrMapOvr>
     <a:masterClrMapping/>
   </p:clrMapOvr>
-  <mc:AlternateContent xmlns:mc="http://schemas.openxmlformats.org/markup-compatibility/2006">
-    <mc:Choice xmlns:p159="http://schemas.microsoft.com/office/powerpoint/2015/09/main" Requires="p159">
+  <mc:AlternateContent xmlns:mc="http://schemas.openxmlformats.org/markup-compatibility/2006" xmlns:p159="http://schemas.microsoft.com/office/powerpoint/2015/09/main">
+    <mc:Choice Requires="p159">
       <p:transition xmlns:p14="http://schemas.microsoft.com/office/powerpoint/2010/main" spd="slow" p14:dur="2000">
         <p159:morph option="byObject"/>
       </p:transition>
     </mc:Choice>
-    <mc:Fallback>
+    <mc:Fallback xmlns="">
       <p:transition spd="slow">
         <p:fade/>
       </p:transition>
@@ -5745,13 +5777,13 @@
   <p:clrMapOvr>
     <a:masterClrMapping/>
   </p:clrMapOvr>
-  <mc:AlternateContent xmlns:mc="http://schemas.openxmlformats.org/markup-compatibility/2006">
-    <mc:Choice xmlns:p159="http://schemas.microsoft.com/office/powerpoint/2015/09/main" Requires="p159">
+  <mc:AlternateContent xmlns:mc="http://schemas.openxmlformats.org/markup-compatibility/2006" xmlns:p159="http://schemas.microsoft.com/office/powerpoint/2015/09/main">
+    <mc:Choice Requires="p159">
       <p:transition xmlns:p14="http://schemas.microsoft.com/office/powerpoint/2010/main" spd="slow" p14:dur="2000">
         <p159:morph option="byObject"/>
       </p:transition>
     </mc:Choice>
-    <mc:Fallback>
+    <mc:Fallback xmlns="">
       <p:transition spd="slow">
         <p:fade/>
       </p:transition>
@@ -5880,13 +5912,13 @@
   <p:clrMapOvr>
     <a:masterClrMapping/>
   </p:clrMapOvr>
-  <mc:AlternateContent xmlns:mc="http://schemas.openxmlformats.org/markup-compatibility/2006">
-    <mc:Choice xmlns:p159="http://schemas.microsoft.com/office/powerpoint/2015/09/main" Requires="p159">
+  <mc:AlternateContent xmlns:mc="http://schemas.openxmlformats.org/markup-compatibility/2006" xmlns:p159="http://schemas.microsoft.com/office/powerpoint/2015/09/main">
+    <mc:Choice Requires="p159">
       <p:transition xmlns:p14="http://schemas.microsoft.com/office/powerpoint/2010/main" spd="slow" p14:dur="2000">
         <p159:morph option="byObject"/>
       </p:transition>
     </mc:Choice>
-    <mc:Fallback>
+    <mc:Fallback xmlns="">
       <p:transition spd="slow">
         <p:fade/>
       </p:transition>

--- a/BibPräsi.pptx
+++ b/BibPräsi.pptx
@@ -5,7 +5,7 @@
     <p:sldMasterId id="2147483648" r:id="rId1"/>
   </p:sldMasterIdLst>
   <p:notesMasterIdLst>
-    <p:notesMasterId r:id="rId14"/>
+    <p:notesMasterId r:id="rId17"/>
   </p:notesMasterIdLst>
   <p:sldIdLst>
     <p:sldId id="256" r:id="rId2"/>
@@ -19,7 +19,10 @@
     <p:sldId id="267" r:id="rId10"/>
     <p:sldId id="260" r:id="rId11"/>
     <p:sldId id="261" r:id="rId12"/>
-    <p:sldId id="262" r:id="rId13"/>
+    <p:sldId id="270" r:id="rId13"/>
+    <p:sldId id="262" r:id="rId14"/>
+    <p:sldId id="269" r:id="rId15"/>
+    <p:sldId id="268" r:id="rId16"/>
   </p:sldIdLst>
   <p:sldSz cx="12192000" cy="6858000"/>
   <p:notesSz cx="6858000" cy="9144000"/>
@@ -146,7 +149,10 @@
         </p14:section>
         <p14:section name="Finja" id="{A6477248-0C57-4DD1-B721-E15CF765ABA0}">
           <p14:sldIdLst>
+            <p14:sldId id="270"/>
             <p14:sldId id="262"/>
+            <p14:sldId id="269"/>
+            <p14:sldId id="268"/>
           </p14:sldIdLst>
         </p14:section>
       </p14:sectionLst>
@@ -4760,6 +4766,95 @@
   <p:cSld>
     <p:spTree>
       <p:nvGrpSpPr>
+        <p:cNvPr id="1" name="">
+          <a:extLst>
+            <a:ext uri="{FF2B5EF4-FFF2-40B4-BE49-F238E27FC236}">
+              <a16:creationId xmlns:a16="http://schemas.microsoft.com/office/drawing/2014/main" id="{EF8FE411-5EAD-4A87-F0FD-EA55E15BCB1D}"/>
+            </a:ext>
+          </a:extLst>
+        </p:cNvPr>
+        <p:cNvGrpSpPr/>
+        <p:nvPr/>
+      </p:nvGrpSpPr>
+      <p:grpSpPr>
+        <a:xfrm>
+          <a:off x="0" y="0"/>
+          <a:ext cx="0" cy="0"/>
+          <a:chOff x="0" y="0"/>
+          <a:chExt cx="0" cy="0"/>
+        </a:xfrm>
+      </p:grpSpPr>
+      <p:sp>
+        <p:nvSpPr>
+          <p:cNvPr id="2" name="Titel 1">
+            <a:extLst>
+              <a:ext uri="{FF2B5EF4-FFF2-40B4-BE49-F238E27FC236}">
+                <a16:creationId xmlns:a16="http://schemas.microsoft.com/office/drawing/2014/main" id="{251152F5-7660-F4F5-D578-694650152193}"/>
+              </a:ext>
+            </a:extLst>
+          </p:cNvPr>
+          <p:cNvSpPr>
+            <a:spLocks noGrp="1"/>
+          </p:cNvSpPr>
+          <p:nvPr>
+            <p:ph type="title"/>
+          </p:nvPr>
+        </p:nvSpPr>
+        <p:spPr/>
+        <p:txBody>
+          <a:bodyPr/>
+          <a:lstStyle/>
+          <a:p>
+            <a:r>
+              <a:rPr lang="de-DE" dirty="0"/>
+              <a:t>SQL-Datenbank</a:t>
+            </a:r>
+          </a:p>
+        </p:txBody>
+      </p:sp>
+      <p:sp>
+        <p:nvSpPr>
+          <p:cNvPr id="3" name="Inhaltsplatzhalter 2">
+            <a:extLst>
+              <a:ext uri="{FF2B5EF4-FFF2-40B4-BE49-F238E27FC236}">
+                <a16:creationId xmlns:a16="http://schemas.microsoft.com/office/drawing/2014/main" id="{6A4CFCED-E2AC-C2E2-A3DC-4C79B81A54B1}"/>
+              </a:ext>
+            </a:extLst>
+          </p:cNvPr>
+          <p:cNvSpPr>
+            <a:spLocks noGrp="1"/>
+          </p:cNvSpPr>
+          <p:nvPr>
+            <p:ph idx="1"/>
+          </p:nvPr>
+        </p:nvSpPr>
+        <p:spPr/>
+        <p:txBody>
+          <a:bodyPr/>
+          <a:lstStyle/>
+          <a:p>
+            <a:endParaRPr lang="de-DE"/>
+          </a:p>
+        </p:txBody>
+      </p:sp>
+    </p:spTree>
+    <p:extLst>
+      <p:ext uri="{BB962C8B-B14F-4D97-AF65-F5344CB8AC3E}">
+        <p14:creationId xmlns:p14="http://schemas.microsoft.com/office/powerpoint/2010/main" val="1869039110"/>
+      </p:ext>
+    </p:extLst>
+  </p:cSld>
+  <p:clrMapOvr>
+    <a:masterClrMapping/>
+  </p:clrMapOvr>
+</p:sld>
+</file>
+
+<file path=ppt/slides/slide13.xml><?xml version="1.0" encoding="utf-8"?>
+<p:sld xmlns:a="http://schemas.openxmlformats.org/drawingml/2006/main" xmlns:r="http://schemas.openxmlformats.org/officeDocument/2006/relationships" xmlns:p="http://schemas.openxmlformats.org/presentationml/2006/main">
+  <p:cSld>
+    <p:spTree>
+      <p:nvGrpSpPr>
         <p:cNvPr id="1" name=""/>
         <p:cNvGrpSpPr/>
         <p:nvPr/>
@@ -4795,7 +4890,7 @@
           <a:p>
             <a:r>
               <a:rPr lang="de-DE" dirty="0"/>
-              <a:t>SQL-Datenbank</a:t>
+              <a:t>Abfragen</a:t>
             </a:r>
           </a:p>
         </p:txBody>
@@ -4821,7 +4916,7 @@
           <a:bodyPr/>
           <a:lstStyle/>
           <a:p>
-            <a:endParaRPr lang="de-DE"/>
+            <a:endParaRPr lang="de-DE" dirty="0"/>
           </a:p>
         </p:txBody>
       </p:sp>
@@ -4829,6 +4924,975 @@
     <p:extLst>
       <p:ext uri="{BB962C8B-B14F-4D97-AF65-F5344CB8AC3E}">
         <p14:creationId xmlns:p14="http://schemas.microsoft.com/office/powerpoint/2010/main" val="1051220518"/>
+      </p:ext>
+    </p:extLst>
+  </p:cSld>
+  <p:clrMapOvr>
+    <a:masterClrMapping/>
+  </p:clrMapOvr>
+</p:sld>
+</file>
+
+<file path=ppt/slides/slide14.xml><?xml version="1.0" encoding="utf-8"?>
+<p:sld xmlns:a="http://schemas.openxmlformats.org/drawingml/2006/main" xmlns:r="http://schemas.openxmlformats.org/officeDocument/2006/relationships" xmlns:p="http://schemas.openxmlformats.org/presentationml/2006/main">
+  <p:cSld>
+    <p:spTree>
+      <p:nvGrpSpPr>
+        <p:cNvPr id="1" name="">
+          <a:extLst>
+            <a:ext uri="{FF2B5EF4-FFF2-40B4-BE49-F238E27FC236}">
+              <a16:creationId xmlns:a16="http://schemas.microsoft.com/office/drawing/2014/main" id="{3BAB9CA6-964C-0A1D-85C9-E295C4DB862E}"/>
+            </a:ext>
+          </a:extLst>
+        </p:cNvPr>
+        <p:cNvGrpSpPr/>
+        <p:nvPr/>
+      </p:nvGrpSpPr>
+      <p:grpSpPr>
+        <a:xfrm>
+          <a:off x="0" y="0"/>
+          <a:ext cx="0" cy="0"/>
+          <a:chOff x="0" y="0"/>
+          <a:chExt cx="0" cy="0"/>
+        </a:xfrm>
+      </p:grpSpPr>
+      <p:sp>
+        <p:nvSpPr>
+          <p:cNvPr id="2" name="Titel 1">
+            <a:extLst>
+              <a:ext uri="{FF2B5EF4-FFF2-40B4-BE49-F238E27FC236}">
+                <a16:creationId xmlns:a16="http://schemas.microsoft.com/office/drawing/2014/main" id="{2CB994A6-A646-821B-C28C-9C9385BE011D}"/>
+              </a:ext>
+            </a:extLst>
+          </p:cNvPr>
+          <p:cNvSpPr>
+            <a:spLocks noGrp="1"/>
+          </p:cNvSpPr>
+          <p:nvPr>
+            <p:ph type="title"/>
+          </p:nvPr>
+        </p:nvSpPr>
+        <p:spPr/>
+        <p:txBody>
+          <a:bodyPr/>
+          <a:lstStyle/>
+          <a:p>
+            <a:r>
+              <a:rPr lang="de-DE" dirty="0"/>
+              <a:t>Views</a:t>
+            </a:r>
+          </a:p>
+        </p:txBody>
+      </p:sp>
+      <p:sp>
+        <p:nvSpPr>
+          <p:cNvPr id="3" name="Inhaltsplatzhalter 2">
+            <a:extLst>
+              <a:ext uri="{FF2B5EF4-FFF2-40B4-BE49-F238E27FC236}">
+                <a16:creationId xmlns:a16="http://schemas.microsoft.com/office/drawing/2014/main" id="{88B80C0E-0090-CD89-0D7C-A170A8147627}"/>
+              </a:ext>
+            </a:extLst>
+          </p:cNvPr>
+          <p:cNvSpPr>
+            <a:spLocks noGrp="1"/>
+          </p:cNvSpPr>
+          <p:nvPr>
+            <p:ph idx="1"/>
+          </p:nvPr>
+        </p:nvSpPr>
+        <p:spPr/>
+        <p:txBody>
+          <a:bodyPr/>
+          <a:lstStyle/>
+          <a:p>
+            <a:endParaRPr lang="de-DE"/>
+          </a:p>
+        </p:txBody>
+      </p:sp>
+    </p:spTree>
+    <p:extLst>
+      <p:ext uri="{BB962C8B-B14F-4D97-AF65-F5344CB8AC3E}">
+        <p14:creationId xmlns:p14="http://schemas.microsoft.com/office/powerpoint/2010/main" val="3209845253"/>
+      </p:ext>
+    </p:extLst>
+  </p:cSld>
+  <p:clrMapOvr>
+    <a:masterClrMapping/>
+  </p:clrMapOvr>
+</p:sld>
+</file>
+
+<file path=ppt/slides/slide15.xml><?xml version="1.0" encoding="utf-8"?>
+<p:sld xmlns:a="http://schemas.openxmlformats.org/drawingml/2006/main" xmlns:r="http://schemas.openxmlformats.org/officeDocument/2006/relationships" xmlns:p="http://schemas.openxmlformats.org/presentationml/2006/main">
+  <p:cSld>
+    <p:spTree>
+      <p:nvGrpSpPr>
+        <p:cNvPr id="1" name="">
+          <a:extLst>
+            <a:ext uri="{FF2B5EF4-FFF2-40B4-BE49-F238E27FC236}">
+              <a16:creationId xmlns:a16="http://schemas.microsoft.com/office/drawing/2014/main" id="{CFB2534D-C210-3207-5B71-AD4757277E0A}"/>
+            </a:ext>
+          </a:extLst>
+        </p:cNvPr>
+        <p:cNvGrpSpPr/>
+        <p:nvPr/>
+      </p:nvGrpSpPr>
+      <p:grpSpPr>
+        <a:xfrm>
+          <a:off x="0" y="0"/>
+          <a:ext cx="0" cy="0"/>
+          <a:chOff x="0" y="0"/>
+          <a:chExt cx="0" cy="0"/>
+        </a:xfrm>
+      </p:grpSpPr>
+      <p:sp>
+        <p:nvSpPr>
+          <p:cNvPr id="2" name="Titel 1">
+            <a:extLst>
+              <a:ext uri="{FF2B5EF4-FFF2-40B4-BE49-F238E27FC236}">
+                <a16:creationId xmlns:a16="http://schemas.microsoft.com/office/drawing/2014/main" id="{0ABA5964-3AA6-2FA3-1965-C6FD5888376D}"/>
+              </a:ext>
+            </a:extLst>
+          </p:cNvPr>
+          <p:cNvSpPr>
+            <a:spLocks noGrp="1"/>
+          </p:cNvSpPr>
+          <p:nvPr>
+            <p:ph type="title"/>
+          </p:nvPr>
+        </p:nvSpPr>
+        <p:spPr/>
+        <p:txBody>
+          <a:bodyPr/>
+          <a:lstStyle/>
+          <a:p>
+            <a:r>
+              <a:rPr lang="de-DE" dirty="0"/>
+              <a:t>Trigger</a:t>
+            </a:r>
+          </a:p>
+        </p:txBody>
+      </p:sp>
+      <p:grpSp>
+        <p:nvGrpSpPr>
+          <p:cNvPr id="9" name="Gruppieren 8">
+            <a:extLst>
+              <a:ext uri="{FF2B5EF4-FFF2-40B4-BE49-F238E27FC236}">
+                <a16:creationId xmlns:a16="http://schemas.microsoft.com/office/drawing/2014/main" id="{9DD2887E-4F09-EAD2-63BA-E7119A1DED4E}"/>
+              </a:ext>
+            </a:extLst>
+          </p:cNvPr>
+          <p:cNvGrpSpPr/>
+          <p:nvPr/>
+        </p:nvGrpSpPr>
+        <p:grpSpPr>
+          <a:xfrm>
+            <a:off x="8600645" y="2213857"/>
+            <a:ext cx="3319260" cy="3319260"/>
+            <a:chOff x="645908" y="2156347"/>
+            <a:chExt cx="3319260" cy="3319260"/>
+          </a:xfrm>
+        </p:grpSpPr>
+        <p:pic>
+          <p:nvPicPr>
+            <p:cNvPr id="5" name="Grafik 4" descr="Frau Silhouette">
+              <a:extLst>
+                <a:ext uri="{FF2B5EF4-FFF2-40B4-BE49-F238E27FC236}">
+                  <a16:creationId xmlns:a16="http://schemas.microsoft.com/office/drawing/2014/main" id="{97FA342B-8DB0-6FE2-01CD-99DB02AC0324}"/>
+                </a:ext>
+              </a:extLst>
+            </p:cNvPr>
+            <p:cNvPicPr>
+              <a:picLocks noChangeAspect="1"/>
+            </p:cNvPicPr>
+            <p:nvPr/>
+          </p:nvPicPr>
+          <p:blipFill>
+            <a:blip>
+              <a:extLst>
+                <a:ext uri="{96DAC541-7B7A-43D3-8B79-37D633B846F1}">
+                  <asvg:svgBlip xmlns:asvg="http://schemas.microsoft.com/office/drawing/2016/SVG/main" r:embed="rId2"/>
+                </a:ext>
+              </a:extLst>
+            </a:blip>
+            <a:stretch>
+              <a:fillRect/>
+            </a:stretch>
+          </p:blipFill>
+          <p:spPr>
+            <a:xfrm>
+              <a:off x="645908" y="2156347"/>
+              <a:ext cx="3319260" cy="3319260"/>
+            </a:xfrm>
+            <a:prstGeom prst="rect">
+              <a:avLst/>
+            </a:prstGeom>
+          </p:spPr>
+        </p:pic>
+        <p:pic>
+          <p:nvPicPr>
+            <p:cNvPr id="7" name="Grafik 6" descr="Geschlossenes Buch Silhouette">
+              <a:extLst>
+                <a:ext uri="{FF2B5EF4-FFF2-40B4-BE49-F238E27FC236}">
+                  <a16:creationId xmlns:a16="http://schemas.microsoft.com/office/drawing/2014/main" id="{F6F9DF15-C138-A391-2B77-9CCE22A4B3D5}"/>
+                </a:ext>
+              </a:extLst>
+            </p:cNvPr>
+            <p:cNvPicPr>
+              <a:picLocks noChangeAspect="1"/>
+            </p:cNvPicPr>
+            <p:nvPr/>
+          </p:nvPicPr>
+          <p:blipFill>
+            <a:blip>
+              <a:extLst>
+                <a:ext uri="{96DAC541-7B7A-43D3-8B79-37D633B846F1}">
+                  <asvg:svgBlip xmlns:asvg="http://schemas.microsoft.com/office/drawing/2016/SVG/main" r:embed="rId3"/>
+                </a:ext>
+              </a:extLst>
+            </a:blip>
+            <a:stretch>
+              <a:fillRect/>
+            </a:stretch>
+          </p:blipFill>
+          <p:spPr>
+            <a:xfrm>
+              <a:off x="2841009" y="3473355"/>
+              <a:ext cx="914400" cy="914400"/>
+            </a:xfrm>
+            <a:prstGeom prst="rect">
+              <a:avLst/>
+            </a:prstGeom>
+          </p:spPr>
+        </p:pic>
+      </p:grpSp>
+      <p:sp>
+        <p:nvSpPr>
+          <p:cNvPr id="8" name="Textfeld 7">
+            <a:extLst>
+              <a:ext uri="{FF2B5EF4-FFF2-40B4-BE49-F238E27FC236}">
+                <a16:creationId xmlns:a16="http://schemas.microsoft.com/office/drawing/2014/main" id="{6F1051A8-0DC8-F159-3372-04C077D9296C}"/>
+              </a:ext>
+            </a:extLst>
+          </p:cNvPr>
+          <p:cNvSpPr txBox="1"/>
+          <p:nvPr/>
+        </p:nvSpPr>
+        <p:spPr>
+          <a:xfrm>
+            <a:off x="508476" y="1472830"/>
+            <a:ext cx="9751799" cy="4801314"/>
+          </a:xfrm>
+          <a:prstGeom prst="rect">
+            <a:avLst/>
+          </a:prstGeom>
+          <a:noFill/>
+        </p:spPr>
+        <p:txBody>
+          <a:bodyPr wrap="square" rtlCol="0">
+            <a:spAutoFit/>
+          </a:bodyPr>
+          <a:lstStyle/>
+          <a:p>
+            <a:r>
+              <a:rPr lang="de-DE" dirty="0"/>
+              <a:t>-&gt;Ausgangszustand</a:t>
+            </a:r>
+          </a:p>
+          <a:p>
+            <a:r>
+              <a:rPr lang="de-DE" b="1" dirty="0">
+                <a:solidFill>
+                  <a:srgbClr val="0070C0"/>
+                </a:solidFill>
+              </a:rPr>
+              <a:t>SELECT</a:t>
+            </a:r>
+            <a:r>
+              <a:rPr lang="de-DE" dirty="0"/>
+              <a:t> </a:t>
+            </a:r>
+            <a:r>
+              <a:rPr lang="de-DE" dirty="0" err="1"/>
+              <a:t>MediumID</a:t>
+            </a:r>
+            <a:r>
+              <a:rPr lang="de-DE" dirty="0"/>
+              <a:t>, Titel, </a:t>
+            </a:r>
+            <a:r>
+              <a:rPr lang="de-DE" dirty="0" err="1"/>
+              <a:t>Verfuegbarkeit</a:t>
+            </a:r>
+            <a:r>
+              <a:rPr lang="de-DE" dirty="0"/>
+              <a:t> </a:t>
+            </a:r>
+            <a:r>
+              <a:rPr lang="de-DE" b="1" dirty="0">
+                <a:solidFill>
+                  <a:srgbClr val="0070C0"/>
+                </a:solidFill>
+              </a:rPr>
+              <a:t>FROM</a:t>
+            </a:r>
+            <a:r>
+              <a:rPr lang="de-DE" dirty="0"/>
+              <a:t> medium </a:t>
+            </a:r>
+            <a:r>
+              <a:rPr lang="de-DE" b="1" dirty="0">
+                <a:solidFill>
+                  <a:srgbClr val="0070C0"/>
+                </a:solidFill>
+              </a:rPr>
+              <a:t>WHERE</a:t>
+            </a:r>
+            <a:r>
+              <a:rPr lang="de-DE" dirty="0"/>
+              <a:t> </a:t>
+            </a:r>
+            <a:r>
+              <a:rPr lang="de-DE" dirty="0" err="1"/>
+              <a:t>MediumID</a:t>
+            </a:r>
+            <a:r>
+              <a:rPr lang="de-DE" dirty="0"/>
+              <a:t> = 10;</a:t>
+            </a:r>
+          </a:p>
+          <a:p>
+            <a:r>
+              <a:rPr lang="de-DE" b="1" dirty="0">
+                <a:solidFill>
+                  <a:srgbClr val="0070C0"/>
+                </a:solidFill>
+              </a:rPr>
+              <a:t>SELECT</a:t>
+            </a:r>
+            <a:r>
+              <a:rPr lang="de-DE" dirty="0"/>
+              <a:t> </a:t>
+            </a:r>
+            <a:r>
+              <a:rPr lang="de-DE" dirty="0" err="1"/>
+              <a:t>AusleiheID</a:t>
+            </a:r>
+            <a:r>
+              <a:rPr lang="de-DE" dirty="0"/>
+              <a:t>, </a:t>
+            </a:r>
+            <a:r>
+              <a:rPr lang="de-DE" dirty="0" err="1"/>
+              <a:t>Ausleihedatum</a:t>
+            </a:r>
+            <a:r>
+              <a:rPr lang="de-DE" dirty="0"/>
+              <a:t>, </a:t>
+            </a:r>
+            <a:r>
+              <a:rPr lang="de-DE" dirty="0" err="1"/>
+              <a:t>Rueckgabedatum</a:t>
+            </a:r>
+            <a:r>
+              <a:rPr lang="de-DE" dirty="0"/>
+              <a:t>, </a:t>
+            </a:r>
+            <a:r>
+              <a:rPr lang="de-DE" dirty="0" err="1"/>
+              <a:t>status</a:t>
+            </a:r>
+            <a:r>
+              <a:rPr lang="de-DE" dirty="0"/>
+              <a:t>, </a:t>
+            </a:r>
+            <a:r>
+              <a:rPr lang="de-DE" dirty="0" err="1"/>
+              <a:t>MitgliedID</a:t>
+            </a:r>
+            <a:r>
+              <a:rPr lang="de-DE" dirty="0"/>
+              <a:t>, </a:t>
+            </a:r>
+            <a:r>
+              <a:rPr lang="de-DE" dirty="0" err="1"/>
+              <a:t>MediumID</a:t>
+            </a:r>
+            <a:r>
+              <a:rPr lang="de-DE" dirty="0"/>
+              <a:t> </a:t>
+            </a:r>
+            <a:r>
+              <a:rPr lang="de-DE" b="1" dirty="0">
+                <a:solidFill>
+                  <a:srgbClr val="0070C0"/>
+                </a:solidFill>
+              </a:rPr>
+              <a:t>FROM</a:t>
+            </a:r>
+            <a:r>
+              <a:rPr lang="de-DE" dirty="0"/>
+              <a:t> ausleihe </a:t>
+            </a:r>
+            <a:r>
+              <a:rPr lang="de-DE" b="1" dirty="0">
+                <a:solidFill>
+                  <a:srgbClr val="0070C0"/>
+                </a:solidFill>
+              </a:rPr>
+              <a:t>WHERE</a:t>
+            </a:r>
+            <a:r>
+              <a:rPr lang="de-DE" dirty="0"/>
+              <a:t> </a:t>
+            </a:r>
+            <a:r>
+              <a:rPr lang="de-DE" dirty="0" err="1"/>
+              <a:t>MediumID</a:t>
+            </a:r>
+            <a:r>
+              <a:rPr lang="de-DE" dirty="0"/>
+              <a:t> = 10;</a:t>
+            </a:r>
+          </a:p>
+          <a:p>
+            <a:endParaRPr lang="de-DE" dirty="0"/>
+          </a:p>
+          <a:p>
+            <a:r>
+              <a:rPr lang="de-DE" dirty="0"/>
+              <a:t>-&gt;Insert</a:t>
+            </a:r>
+          </a:p>
+          <a:p>
+            <a:r>
+              <a:rPr lang="de-DE" b="1" dirty="0">
+                <a:solidFill>
+                  <a:srgbClr val="0070C0"/>
+                </a:solidFill>
+              </a:rPr>
+              <a:t>INSERT</a:t>
+            </a:r>
+            <a:r>
+              <a:rPr lang="de-DE" dirty="0"/>
+              <a:t> </a:t>
+            </a:r>
+            <a:r>
+              <a:rPr lang="de-DE" b="1" dirty="0">
+                <a:solidFill>
+                  <a:srgbClr val="0070C0"/>
+                </a:solidFill>
+              </a:rPr>
+              <a:t>INTO</a:t>
+            </a:r>
+            <a:r>
+              <a:rPr lang="de-DE" dirty="0"/>
+              <a:t> ausleihe (</a:t>
+            </a:r>
+            <a:r>
+              <a:rPr lang="de-DE" dirty="0" err="1"/>
+              <a:t>AusleiheID</a:t>
+            </a:r>
+            <a:r>
+              <a:rPr lang="de-DE" dirty="0"/>
+              <a:t>, </a:t>
+            </a:r>
+            <a:r>
+              <a:rPr lang="de-DE" dirty="0" err="1"/>
+              <a:t>Ausleihedatum</a:t>
+            </a:r>
+            <a:r>
+              <a:rPr lang="de-DE" dirty="0"/>
+              <a:t>, </a:t>
+            </a:r>
+            <a:r>
+              <a:rPr lang="de-DE" dirty="0" err="1"/>
+              <a:t>Rueckgabedatum</a:t>
+            </a:r>
+            <a:r>
+              <a:rPr lang="de-DE" dirty="0"/>
+              <a:t>, Status, </a:t>
+            </a:r>
+            <a:r>
+              <a:rPr lang="de-DE" dirty="0" err="1"/>
+              <a:t>MitgliedID</a:t>
+            </a:r>
+            <a:r>
+              <a:rPr lang="de-DE" dirty="0"/>
+              <a:t>, </a:t>
+            </a:r>
+            <a:r>
+              <a:rPr lang="de-DE" dirty="0" err="1"/>
+              <a:t>MediumID</a:t>
+            </a:r>
+            <a:r>
+              <a:rPr lang="de-DE" dirty="0"/>
+              <a:t>) </a:t>
+            </a:r>
+            <a:r>
+              <a:rPr lang="de-DE" b="1" dirty="0">
+                <a:solidFill>
+                  <a:srgbClr val="0070C0"/>
+                </a:solidFill>
+              </a:rPr>
+              <a:t>VALUES</a:t>
+            </a:r>
+            <a:r>
+              <a:rPr lang="de-DE" dirty="0"/>
+              <a:t> (101, '2026-06-14', NULL, 0, 1, 10);</a:t>
+            </a:r>
+          </a:p>
+          <a:p>
+            <a:r>
+              <a:rPr lang="de-DE" b="1" dirty="0">
+                <a:solidFill>
+                  <a:srgbClr val="0070C0"/>
+                </a:solidFill>
+              </a:rPr>
+              <a:t>SELECT</a:t>
+            </a:r>
+            <a:r>
+              <a:rPr lang="de-DE" dirty="0"/>
+              <a:t> </a:t>
+            </a:r>
+            <a:r>
+              <a:rPr lang="de-DE" dirty="0" err="1"/>
+              <a:t>MediumID</a:t>
+            </a:r>
+            <a:r>
+              <a:rPr lang="de-DE" dirty="0"/>
+              <a:t>, Titel, </a:t>
+            </a:r>
+            <a:r>
+              <a:rPr lang="de-DE" dirty="0" err="1"/>
+              <a:t>Verfuegbarkeit</a:t>
+            </a:r>
+            <a:r>
+              <a:rPr lang="de-DE" dirty="0"/>
+              <a:t> </a:t>
+            </a:r>
+            <a:r>
+              <a:rPr lang="de-DE" b="1" dirty="0">
+                <a:solidFill>
+                  <a:srgbClr val="0070C0"/>
+                </a:solidFill>
+              </a:rPr>
+              <a:t>FROM</a:t>
+            </a:r>
+            <a:r>
+              <a:rPr lang="de-DE" dirty="0"/>
+              <a:t> medium </a:t>
+            </a:r>
+            <a:r>
+              <a:rPr lang="de-DE" b="1" dirty="0">
+                <a:solidFill>
+                  <a:srgbClr val="0070C0"/>
+                </a:solidFill>
+              </a:rPr>
+              <a:t>WHERE</a:t>
+            </a:r>
+            <a:r>
+              <a:rPr lang="de-DE" dirty="0"/>
+              <a:t> </a:t>
+            </a:r>
+            <a:r>
+              <a:rPr lang="de-DE" dirty="0" err="1"/>
+              <a:t>MediumID</a:t>
+            </a:r>
+            <a:r>
+              <a:rPr lang="de-DE" dirty="0"/>
+              <a:t> = 10;</a:t>
+            </a:r>
+          </a:p>
+          <a:p>
+            <a:r>
+              <a:rPr lang="de-DE" b="1" dirty="0">
+                <a:solidFill>
+                  <a:srgbClr val="0070C0"/>
+                </a:solidFill>
+              </a:rPr>
+              <a:t>SELECT</a:t>
+            </a:r>
+            <a:r>
+              <a:rPr lang="de-DE" dirty="0"/>
+              <a:t> </a:t>
+            </a:r>
+            <a:r>
+              <a:rPr lang="de-DE" dirty="0" err="1"/>
+              <a:t>AusleiheID</a:t>
+            </a:r>
+            <a:r>
+              <a:rPr lang="de-DE" dirty="0"/>
+              <a:t>, </a:t>
+            </a:r>
+            <a:r>
+              <a:rPr lang="de-DE" dirty="0" err="1"/>
+              <a:t>Ausleihedatum</a:t>
+            </a:r>
+            <a:r>
+              <a:rPr lang="de-DE" dirty="0"/>
+              <a:t>, </a:t>
+            </a:r>
+            <a:r>
+              <a:rPr lang="de-DE" dirty="0" err="1"/>
+              <a:t>Rueckgabedatum</a:t>
+            </a:r>
+            <a:r>
+              <a:rPr lang="de-DE" dirty="0"/>
+              <a:t>, </a:t>
+            </a:r>
+            <a:r>
+              <a:rPr lang="de-DE" dirty="0" err="1"/>
+              <a:t>status</a:t>
+            </a:r>
+            <a:r>
+              <a:rPr lang="de-DE" dirty="0"/>
+              <a:t>, </a:t>
+            </a:r>
+            <a:r>
+              <a:rPr lang="de-DE" dirty="0" err="1"/>
+              <a:t>MitgliedID</a:t>
+            </a:r>
+            <a:r>
+              <a:rPr lang="de-DE" dirty="0"/>
+              <a:t>, </a:t>
+            </a:r>
+            <a:r>
+              <a:rPr lang="de-DE" dirty="0" err="1"/>
+              <a:t>MediumID</a:t>
+            </a:r>
+            <a:r>
+              <a:rPr lang="de-DE" dirty="0"/>
+              <a:t> </a:t>
+            </a:r>
+            <a:r>
+              <a:rPr lang="de-DE" b="1" dirty="0">
+                <a:solidFill>
+                  <a:srgbClr val="0070C0"/>
+                </a:solidFill>
+              </a:rPr>
+              <a:t>FROM</a:t>
+            </a:r>
+            <a:r>
+              <a:rPr lang="de-DE" dirty="0"/>
+              <a:t> ausleihe </a:t>
+            </a:r>
+            <a:r>
+              <a:rPr lang="de-DE" b="1" dirty="0">
+                <a:solidFill>
+                  <a:srgbClr val="0070C0"/>
+                </a:solidFill>
+              </a:rPr>
+              <a:t>WHERE</a:t>
+            </a:r>
+            <a:r>
+              <a:rPr lang="de-DE" dirty="0"/>
+              <a:t> </a:t>
+            </a:r>
+            <a:r>
+              <a:rPr lang="de-DE" dirty="0" err="1"/>
+              <a:t>MediumID</a:t>
+            </a:r>
+            <a:r>
+              <a:rPr lang="de-DE" dirty="0"/>
+              <a:t> = 10;</a:t>
+            </a:r>
+          </a:p>
+          <a:p>
+            <a:endParaRPr lang="de-DE" dirty="0"/>
+          </a:p>
+          <a:p>
+            <a:r>
+              <a:rPr lang="de-DE" dirty="0"/>
+              <a:t>-&gt;Update</a:t>
+            </a:r>
+          </a:p>
+          <a:p>
+            <a:r>
+              <a:rPr lang="de-DE" b="1" dirty="0">
+                <a:solidFill>
+                  <a:srgbClr val="0070C0"/>
+                </a:solidFill>
+              </a:rPr>
+              <a:t>UPDATE</a:t>
+            </a:r>
+            <a:r>
+              <a:rPr lang="de-DE" dirty="0"/>
+              <a:t> ausleihe </a:t>
+            </a:r>
+            <a:r>
+              <a:rPr lang="de-DE" b="1" dirty="0">
+                <a:solidFill>
+                  <a:srgbClr val="0070C0"/>
+                </a:solidFill>
+              </a:rPr>
+              <a:t>SET</a:t>
+            </a:r>
+            <a:r>
+              <a:rPr lang="de-DE" dirty="0"/>
+              <a:t> Status = 1, </a:t>
+            </a:r>
+            <a:r>
+              <a:rPr lang="de-DE" dirty="0" err="1"/>
+              <a:t>Rueckgabedatum</a:t>
+            </a:r>
+            <a:r>
+              <a:rPr lang="de-DE" dirty="0"/>
+              <a:t> = '2026-06-20' </a:t>
+            </a:r>
+            <a:r>
+              <a:rPr lang="de-DE" b="1" dirty="0">
+                <a:solidFill>
+                  <a:srgbClr val="0070C0"/>
+                </a:solidFill>
+              </a:rPr>
+              <a:t>WHERE</a:t>
+            </a:r>
+            <a:r>
+              <a:rPr lang="de-DE" dirty="0"/>
+              <a:t> </a:t>
+            </a:r>
+            <a:r>
+              <a:rPr lang="de-DE" dirty="0" err="1"/>
+              <a:t>AusleiheID</a:t>
+            </a:r>
+            <a:r>
+              <a:rPr lang="de-DE" dirty="0"/>
+              <a:t> = 101;</a:t>
+            </a:r>
+          </a:p>
+          <a:p>
+            <a:r>
+              <a:rPr lang="de-DE" b="1" dirty="0">
+                <a:solidFill>
+                  <a:srgbClr val="0070C0"/>
+                </a:solidFill>
+              </a:rPr>
+              <a:t>SELECT</a:t>
+            </a:r>
+            <a:r>
+              <a:rPr lang="de-DE" dirty="0"/>
+              <a:t> </a:t>
+            </a:r>
+            <a:r>
+              <a:rPr lang="de-DE" dirty="0" err="1"/>
+              <a:t>MediumID</a:t>
+            </a:r>
+            <a:r>
+              <a:rPr lang="de-DE" dirty="0"/>
+              <a:t>, Titel, </a:t>
+            </a:r>
+            <a:r>
+              <a:rPr lang="de-DE" dirty="0" err="1"/>
+              <a:t>Verfuegbarkeit</a:t>
+            </a:r>
+            <a:r>
+              <a:rPr lang="de-DE" dirty="0"/>
+              <a:t> </a:t>
+            </a:r>
+            <a:r>
+              <a:rPr lang="de-DE" b="1" dirty="0">
+                <a:solidFill>
+                  <a:srgbClr val="0070C0"/>
+                </a:solidFill>
+              </a:rPr>
+              <a:t>FROM</a:t>
+            </a:r>
+            <a:r>
+              <a:rPr lang="de-DE" dirty="0"/>
+              <a:t> medium </a:t>
+            </a:r>
+            <a:r>
+              <a:rPr lang="de-DE" b="1" dirty="0">
+                <a:solidFill>
+                  <a:srgbClr val="0070C0"/>
+                </a:solidFill>
+              </a:rPr>
+              <a:t>WHERE</a:t>
+            </a:r>
+            <a:r>
+              <a:rPr lang="de-DE" dirty="0"/>
+              <a:t> </a:t>
+            </a:r>
+            <a:r>
+              <a:rPr lang="de-DE" dirty="0" err="1"/>
+              <a:t>MediumID</a:t>
+            </a:r>
+            <a:r>
+              <a:rPr lang="de-DE" dirty="0"/>
+              <a:t> = 10;</a:t>
+            </a:r>
+          </a:p>
+          <a:p>
+            <a:r>
+              <a:rPr lang="de-DE" b="1" dirty="0">
+                <a:solidFill>
+                  <a:srgbClr val="0070C0"/>
+                </a:solidFill>
+              </a:rPr>
+              <a:t>SELECT</a:t>
+            </a:r>
+            <a:r>
+              <a:rPr lang="de-DE" dirty="0"/>
+              <a:t> </a:t>
+            </a:r>
+            <a:r>
+              <a:rPr lang="de-DE" dirty="0" err="1"/>
+              <a:t>AusleiheID</a:t>
+            </a:r>
+            <a:r>
+              <a:rPr lang="de-DE" dirty="0"/>
+              <a:t>, </a:t>
+            </a:r>
+            <a:r>
+              <a:rPr lang="de-DE" dirty="0" err="1"/>
+              <a:t>Ausleihedatum</a:t>
+            </a:r>
+            <a:r>
+              <a:rPr lang="de-DE" dirty="0"/>
+              <a:t>, </a:t>
+            </a:r>
+            <a:r>
+              <a:rPr lang="de-DE" dirty="0" err="1"/>
+              <a:t>Rueckgabedatum</a:t>
+            </a:r>
+            <a:r>
+              <a:rPr lang="de-DE" dirty="0"/>
+              <a:t>, </a:t>
+            </a:r>
+            <a:r>
+              <a:rPr lang="de-DE" dirty="0" err="1"/>
+              <a:t>status</a:t>
+            </a:r>
+            <a:r>
+              <a:rPr lang="de-DE" dirty="0"/>
+              <a:t>, </a:t>
+            </a:r>
+            <a:r>
+              <a:rPr lang="de-DE" dirty="0" err="1"/>
+              <a:t>MitgliedID</a:t>
+            </a:r>
+            <a:r>
+              <a:rPr lang="de-DE" dirty="0"/>
+              <a:t>, </a:t>
+            </a:r>
+            <a:r>
+              <a:rPr lang="de-DE" dirty="0" err="1"/>
+              <a:t>MediumID</a:t>
+            </a:r>
+            <a:r>
+              <a:rPr lang="de-DE" dirty="0"/>
+              <a:t> </a:t>
+            </a:r>
+            <a:r>
+              <a:rPr lang="de-DE" b="1" dirty="0">
+                <a:solidFill>
+                  <a:srgbClr val="0070C0"/>
+                </a:solidFill>
+              </a:rPr>
+              <a:t>FROM</a:t>
+            </a:r>
+            <a:r>
+              <a:rPr lang="de-DE" dirty="0"/>
+              <a:t> ausleihe </a:t>
+            </a:r>
+            <a:r>
+              <a:rPr lang="de-DE" b="1" dirty="0">
+                <a:solidFill>
+                  <a:srgbClr val="0070C0"/>
+                </a:solidFill>
+              </a:rPr>
+              <a:t>WHERE</a:t>
+            </a:r>
+            <a:r>
+              <a:rPr lang="de-DE" dirty="0"/>
+              <a:t> </a:t>
+            </a:r>
+            <a:r>
+              <a:rPr lang="de-DE" dirty="0" err="1"/>
+              <a:t>MediumID</a:t>
+            </a:r>
+            <a:r>
+              <a:rPr lang="de-DE" dirty="0"/>
+              <a:t> = 10;</a:t>
+            </a:r>
+          </a:p>
+        </p:txBody>
+      </p:sp>
+      <p:sp>
+        <p:nvSpPr>
+          <p:cNvPr id="10" name="Textfeld 9">
+            <a:extLst>
+              <a:ext uri="{FF2B5EF4-FFF2-40B4-BE49-F238E27FC236}">
+                <a16:creationId xmlns:a16="http://schemas.microsoft.com/office/drawing/2014/main" id="{49C51F07-4527-E760-1459-B7D7D1B3979C}"/>
+              </a:ext>
+            </a:extLst>
+          </p:cNvPr>
+          <p:cNvSpPr txBox="1"/>
+          <p:nvPr/>
+        </p:nvSpPr>
+        <p:spPr>
+          <a:xfrm>
+            <a:off x="9860711" y="1897722"/>
+            <a:ext cx="1115683" cy="369332"/>
+          </a:xfrm>
+          <a:prstGeom prst="rect">
+            <a:avLst/>
+          </a:prstGeom>
+          <a:noFill/>
+        </p:spPr>
+        <p:txBody>
+          <a:bodyPr wrap="square" rtlCol="0">
+            <a:spAutoFit/>
+          </a:bodyPr>
+          <a:lstStyle/>
+          <a:p>
+            <a:r>
+              <a:rPr lang="de-DE" dirty="0"/>
+              <a:t>ANNA</a:t>
+            </a:r>
+          </a:p>
+        </p:txBody>
+      </p:sp>
+      <p:sp>
+        <p:nvSpPr>
+          <p:cNvPr id="11" name="Textfeld 10">
+            <a:extLst>
+              <a:ext uri="{FF2B5EF4-FFF2-40B4-BE49-F238E27FC236}">
+                <a16:creationId xmlns:a16="http://schemas.microsoft.com/office/drawing/2014/main" id="{432DDB52-EB7C-AA42-BE6A-0E3919CC1DF5}"/>
+              </a:ext>
+            </a:extLst>
+          </p:cNvPr>
+          <p:cNvSpPr txBox="1"/>
+          <p:nvPr/>
+        </p:nvSpPr>
+        <p:spPr>
+          <a:xfrm>
+            <a:off x="10901631" y="3161533"/>
+            <a:ext cx="1290369" cy="369332"/>
+          </a:xfrm>
+          <a:prstGeom prst="rect">
+            <a:avLst/>
+          </a:prstGeom>
+          <a:noFill/>
+        </p:spPr>
+        <p:txBody>
+          <a:bodyPr wrap="square" rtlCol="0">
+            <a:spAutoFit/>
+          </a:bodyPr>
+          <a:lstStyle/>
+          <a:p>
+            <a:r>
+              <a:rPr lang="de-DE" dirty="0"/>
+              <a:t>Analysis 1</a:t>
+            </a:r>
+          </a:p>
+        </p:txBody>
+      </p:sp>
+    </p:spTree>
+    <p:extLst>
+      <p:ext uri="{BB962C8B-B14F-4D97-AF65-F5344CB8AC3E}">
+        <p14:creationId xmlns:p14="http://schemas.microsoft.com/office/powerpoint/2010/main" val="4138643185"/>
       </p:ext>
     </p:extLst>
   </p:cSld>

--- a/BibPräsi.pptx
+++ b/BibPräsi.pptx
@@ -5,7 +5,7 @@
     <p:sldMasterId id="2147483648" r:id="rId1"/>
   </p:sldMasterIdLst>
   <p:notesMasterIdLst>
-    <p:notesMasterId r:id="rId17"/>
+    <p:notesMasterId r:id="rId19"/>
   </p:notesMasterIdLst>
   <p:sldIdLst>
     <p:sldId id="256" r:id="rId2"/>
@@ -20,9 +20,11 @@
     <p:sldId id="260" r:id="rId11"/>
     <p:sldId id="261" r:id="rId12"/>
     <p:sldId id="270" r:id="rId13"/>
-    <p:sldId id="262" r:id="rId14"/>
-    <p:sldId id="269" r:id="rId15"/>
-    <p:sldId id="268" r:id="rId16"/>
+    <p:sldId id="271" r:id="rId14"/>
+    <p:sldId id="272" r:id="rId15"/>
+    <p:sldId id="262" r:id="rId16"/>
+    <p:sldId id="269" r:id="rId17"/>
+    <p:sldId id="268" r:id="rId18"/>
   </p:sldIdLst>
   <p:sldSz cx="12192000" cy="6858000"/>
   <p:notesSz cx="6858000" cy="9144000"/>
@@ -150,6 +152,8 @@
         <p14:section name="Finja" id="{A6477248-0C57-4DD1-B721-E15CF765ABA0}">
           <p14:sldIdLst>
             <p14:sldId id="270"/>
+            <p14:sldId id="271"/>
+            <p14:sldId id="272"/>
             <p14:sldId id="262"/>
             <p14:sldId id="269"/>
             <p14:sldId id="268"/>
@@ -4830,10 +4834,170 @@
         </p:nvSpPr>
         <p:spPr/>
         <p:txBody>
-          <a:bodyPr/>
-          <a:lstStyle/>
-          <a:p>
-            <a:endParaRPr lang="de-DE"/>
+          <a:bodyPr>
+            <a:normAutofit fontScale="85000" lnSpcReduction="20000"/>
+          </a:bodyPr>
+          <a:lstStyle/>
+          <a:p>
+            <a:pPr marL="0" indent="0">
+              <a:buNone/>
+            </a:pPr>
+            <a:r>
+              <a:rPr lang="de-DE" dirty="0"/>
+              <a:t>CREATE TABLE `</a:t>
+            </a:r>
+            <a:r>
+              <a:rPr lang="de-DE" dirty="0" err="1"/>
+              <a:t>personen</a:t>
+            </a:r>
+            <a:r>
+              <a:rPr lang="de-DE" dirty="0"/>
+              <a:t>` (</a:t>
+            </a:r>
+          </a:p>
+          <a:p>
+            <a:pPr marL="0" indent="0">
+              <a:buNone/>
+            </a:pPr>
+            <a:r>
+              <a:rPr lang="de-DE" dirty="0"/>
+              <a:t>    `</a:t>
+            </a:r>
+            <a:r>
+              <a:rPr lang="de-DE" dirty="0" err="1"/>
+              <a:t>PersonenID</a:t>
+            </a:r>
+            <a:r>
+              <a:rPr lang="de-DE" dirty="0"/>
+              <a:t>`  INT          NOT NULL,</a:t>
+            </a:r>
+          </a:p>
+          <a:p>
+            <a:pPr marL="0" indent="0">
+              <a:buNone/>
+            </a:pPr>
+            <a:r>
+              <a:rPr lang="de-DE" dirty="0"/>
+              <a:t>    `Vorname`     VARCHAR(40),</a:t>
+            </a:r>
+          </a:p>
+          <a:p>
+            <a:pPr marL="0" indent="0">
+              <a:buNone/>
+            </a:pPr>
+            <a:r>
+              <a:rPr lang="de-DE" dirty="0"/>
+              <a:t>    `Nachname`    VARCHAR(40),</a:t>
+            </a:r>
+          </a:p>
+          <a:p>
+            <a:pPr marL="0" indent="0">
+              <a:buNone/>
+            </a:pPr>
+            <a:r>
+              <a:rPr lang="de-DE" dirty="0"/>
+              <a:t>    `Email`       VARCHAR(40),</a:t>
+            </a:r>
+          </a:p>
+          <a:p>
+            <a:pPr marL="0" indent="0">
+              <a:buNone/>
+            </a:pPr>
+            <a:r>
+              <a:rPr lang="de-DE" dirty="0"/>
+              <a:t>    `Passwort`    VARCHAR(40),</a:t>
+            </a:r>
+          </a:p>
+          <a:p>
+            <a:pPr marL="0" indent="0">
+              <a:buNone/>
+            </a:pPr>
+            <a:r>
+              <a:rPr lang="de-DE" dirty="0"/>
+              <a:t>    `</a:t>
+            </a:r>
+            <a:r>
+              <a:rPr lang="de-DE" dirty="0" err="1"/>
+              <a:t>AdressID</a:t>
+            </a:r>
+            <a:r>
+              <a:rPr lang="de-DE" dirty="0"/>
+              <a:t>`    INT          NULL,</a:t>
+            </a:r>
+          </a:p>
+          <a:p>
+            <a:pPr marL="0" indent="0">
+              <a:buNone/>
+            </a:pPr>
+            <a:r>
+              <a:rPr lang="de-DE" dirty="0"/>
+              <a:t>    PRIMARY KEY (`</a:t>
+            </a:r>
+            <a:r>
+              <a:rPr lang="de-DE" dirty="0" err="1"/>
+              <a:t>PersonenID</a:t>
+            </a:r>
+            <a:r>
+              <a:rPr lang="de-DE" dirty="0"/>
+              <a:t>`),</a:t>
+            </a:r>
+          </a:p>
+          <a:p>
+            <a:pPr marL="0" indent="0">
+              <a:buNone/>
+            </a:pPr>
+            <a:r>
+              <a:rPr lang="de-DE" dirty="0"/>
+              <a:t>    FOREIGN KEY (`</a:t>
+            </a:r>
+            <a:r>
+              <a:rPr lang="de-DE" dirty="0" err="1"/>
+              <a:t>AdressID</a:t>
+            </a:r>
+            <a:r>
+              <a:rPr lang="de-DE" dirty="0"/>
+              <a:t>`) REFERENCES `</a:t>
+            </a:r>
+            <a:r>
+              <a:rPr lang="de-DE" dirty="0" err="1"/>
+              <a:t>adresse</a:t>
+            </a:r>
+            <a:r>
+              <a:rPr lang="de-DE" dirty="0"/>
+              <a:t>` (`</a:t>
+            </a:r>
+            <a:r>
+              <a:rPr lang="de-DE" dirty="0" err="1"/>
+              <a:t>AdressID</a:t>
+            </a:r>
+            <a:r>
+              <a:rPr lang="de-DE" dirty="0"/>
+              <a:t>`)</a:t>
+            </a:r>
+          </a:p>
+          <a:p>
+            <a:pPr marL="0" indent="0">
+              <a:buNone/>
+            </a:pPr>
+            <a:r>
+              <a:rPr lang="de-DE" dirty="0"/>
+              <a:t>        ON DELETE CASCADE</a:t>
+            </a:r>
+          </a:p>
+          <a:p>
+            <a:pPr marL="0" indent="0">
+              <a:buNone/>
+            </a:pPr>
+            <a:r>
+              <a:rPr lang="de-DE" dirty="0"/>
+              <a:t>);</a:t>
+            </a:r>
+          </a:p>
+          <a:p>
+            <a:pPr marL="0" indent="0">
+              <a:buNone/>
+            </a:pPr>
+            <a:endParaRPr lang="de-DE" dirty="0"/>
           </a:p>
         </p:txBody>
       </p:sp>
@@ -4855,6 +5019,435 @@
   <p:cSld>
     <p:spTree>
       <p:nvGrpSpPr>
+        <p:cNvPr id="1" name="">
+          <a:extLst>
+            <a:ext uri="{FF2B5EF4-FFF2-40B4-BE49-F238E27FC236}">
+              <a16:creationId xmlns:a16="http://schemas.microsoft.com/office/drawing/2014/main" id="{D720BB7D-A326-EFB2-AFC7-DC3731DF4BFE}"/>
+            </a:ext>
+          </a:extLst>
+        </p:cNvPr>
+        <p:cNvGrpSpPr/>
+        <p:nvPr/>
+      </p:nvGrpSpPr>
+      <p:grpSpPr>
+        <a:xfrm>
+          <a:off x="0" y="0"/>
+          <a:ext cx="0" cy="0"/>
+          <a:chOff x="0" y="0"/>
+          <a:chExt cx="0" cy="0"/>
+        </a:xfrm>
+      </p:grpSpPr>
+      <p:sp>
+        <p:nvSpPr>
+          <p:cNvPr id="2" name="Titel 1">
+            <a:extLst>
+              <a:ext uri="{FF2B5EF4-FFF2-40B4-BE49-F238E27FC236}">
+                <a16:creationId xmlns:a16="http://schemas.microsoft.com/office/drawing/2014/main" id="{839674AB-5C57-CB25-9251-CE20ABA78B24}"/>
+              </a:ext>
+            </a:extLst>
+          </p:cNvPr>
+          <p:cNvSpPr>
+            <a:spLocks noGrp="1"/>
+          </p:cNvSpPr>
+          <p:nvPr>
+            <p:ph type="title"/>
+          </p:nvPr>
+        </p:nvSpPr>
+        <p:spPr/>
+        <p:txBody>
+          <a:bodyPr/>
+          <a:lstStyle/>
+          <a:p>
+            <a:r>
+              <a:rPr lang="de-DE" dirty="0"/>
+              <a:t>SQL-Datenbank</a:t>
+            </a:r>
+          </a:p>
+        </p:txBody>
+      </p:sp>
+      <p:sp>
+        <p:nvSpPr>
+          <p:cNvPr id="3" name="Inhaltsplatzhalter 2">
+            <a:extLst>
+              <a:ext uri="{FF2B5EF4-FFF2-40B4-BE49-F238E27FC236}">
+                <a16:creationId xmlns:a16="http://schemas.microsoft.com/office/drawing/2014/main" id="{08DAF0C4-1E07-E280-577C-CE919B2CB0C3}"/>
+              </a:ext>
+            </a:extLst>
+          </p:cNvPr>
+          <p:cNvSpPr>
+            <a:spLocks noGrp="1"/>
+          </p:cNvSpPr>
+          <p:nvPr>
+            <p:ph idx="1"/>
+          </p:nvPr>
+        </p:nvSpPr>
+        <p:spPr>
+          <a:xfrm>
+            <a:off x="580845" y="1825625"/>
+            <a:ext cx="11530641" cy="4351338"/>
+          </a:xfrm>
+        </p:spPr>
+        <p:txBody>
+          <a:bodyPr>
+            <a:normAutofit/>
+          </a:bodyPr>
+          <a:lstStyle/>
+          <a:p>
+            <a:pPr marL="0" indent="0">
+              <a:buNone/>
+            </a:pPr>
+            <a:r>
+              <a:rPr lang="de-DE" dirty="0"/>
+              <a:t>CREATE TABLE `</a:t>
+            </a:r>
+            <a:r>
+              <a:rPr lang="de-DE" dirty="0" err="1"/>
+              <a:t>mitglied</a:t>
+            </a:r>
+            <a:r>
+              <a:rPr lang="de-DE" dirty="0"/>
+              <a:t>` (</a:t>
+            </a:r>
+          </a:p>
+          <a:p>
+            <a:pPr marL="0" indent="0">
+              <a:buNone/>
+            </a:pPr>
+            <a:r>
+              <a:rPr lang="de-DE" dirty="0"/>
+              <a:t>    `</a:t>
+            </a:r>
+            <a:r>
+              <a:rPr lang="de-DE" dirty="0" err="1"/>
+              <a:t>PersonenID</a:t>
+            </a:r>
+            <a:r>
+              <a:rPr lang="de-DE" dirty="0"/>
+              <a:t>`          INT        NOT NULL,</a:t>
+            </a:r>
+          </a:p>
+          <a:p>
+            <a:pPr marL="0" indent="0">
+              <a:buNone/>
+            </a:pPr>
+            <a:r>
+              <a:rPr lang="de-DE" dirty="0"/>
+              <a:t>    `Registrierungsdatum` DATE,</a:t>
+            </a:r>
+          </a:p>
+          <a:p>
+            <a:pPr marL="0" indent="0">
+              <a:buNone/>
+            </a:pPr>
+            <a:r>
+              <a:rPr lang="de-DE" dirty="0"/>
+              <a:t>    `Ausleiherlaubnis`    TINYINT(1) NOT NULL,</a:t>
+            </a:r>
+          </a:p>
+          <a:p>
+            <a:pPr marL="0" indent="0">
+              <a:buNone/>
+            </a:pPr>
+            <a:r>
+              <a:rPr lang="de-DE" dirty="0"/>
+              <a:t>    PRIMARY KEY (`</a:t>
+            </a:r>
+            <a:r>
+              <a:rPr lang="de-DE" dirty="0" err="1"/>
+              <a:t>PersonenID</a:t>
+            </a:r>
+            <a:r>
+              <a:rPr lang="de-DE" dirty="0"/>
+              <a:t>`),</a:t>
+            </a:r>
+          </a:p>
+          <a:p>
+            <a:pPr marL="0" indent="0">
+              <a:buNone/>
+            </a:pPr>
+            <a:r>
+              <a:rPr lang="de-DE" dirty="0"/>
+              <a:t>    FOREIGN KEY (`</a:t>
+            </a:r>
+            <a:r>
+              <a:rPr lang="de-DE" dirty="0" err="1"/>
+              <a:t>PersonenID</a:t>
+            </a:r>
+            <a:r>
+              <a:rPr lang="de-DE" dirty="0"/>
+              <a:t>`) REFERENCES `</a:t>
+            </a:r>
+            <a:r>
+              <a:rPr lang="de-DE" dirty="0" err="1"/>
+              <a:t>personen</a:t>
+            </a:r>
+            <a:r>
+              <a:rPr lang="de-DE" dirty="0"/>
+              <a:t>`(`</a:t>
+            </a:r>
+            <a:r>
+              <a:rPr lang="de-DE" dirty="0" err="1"/>
+              <a:t>PersonenID</a:t>
+            </a:r>
+            <a:r>
+              <a:rPr lang="de-DE" dirty="0"/>
+              <a:t>`)</a:t>
+            </a:r>
+          </a:p>
+          <a:p>
+            <a:pPr marL="0" indent="0">
+              <a:buNone/>
+            </a:pPr>
+            <a:r>
+              <a:rPr lang="de-DE" dirty="0"/>
+              <a:t>        ON DELETE CASCADE</a:t>
+            </a:r>
+          </a:p>
+          <a:p>
+            <a:pPr marL="0" indent="0">
+              <a:buNone/>
+            </a:pPr>
+            <a:r>
+              <a:rPr lang="de-DE" dirty="0"/>
+              <a:t>);</a:t>
+            </a:r>
+          </a:p>
+        </p:txBody>
+      </p:sp>
+    </p:spTree>
+    <p:extLst>
+      <p:ext uri="{BB962C8B-B14F-4D97-AF65-F5344CB8AC3E}">
+        <p14:creationId xmlns:p14="http://schemas.microsoft.com/office/powerpoint/2010/main" val="1960037255"/>
+      </p:ext>
+    </p:extLst>
+  </p:cSld>
+  <p:clrMapOvr>
+    <a:masterClrMapping/>
+  </p:clrMapOvr>
+</p:sld>
+</file>
+
+<file path=ppt/slides/slide14.xml><?xml version="1.0" encoding="utf-8"?>
+<p:sld xmlns:a="http://schemas.openxmlformats.org/drawingml/2006/main" xmlns:r="http://schemas.openxmlformats.org/officeDocument/2006/relationships" xmlns:p="http://schemas.openxmlformats.org/presentationml/2006/main">
+  <p:cSld>
+    <p:spTree>
+      <p:nvGrpSpPr>
+        <p:cNvPr id="1" name="">
+          <a:extLst>
+            <a:ext uri="{FF2B5EF4-FFF2-40B4-BE49-F238E27FC236}">
+              <a16:creationId xmlns:a16="http://schemas.microsoft.com/office/drawing/2014/main" id="{8C35B7BE-4784-014D-7426-824F2CB29D98}"/>
+            </a:ext>
+          </a:extLst>
+        </p:cNvPr>
+        <p:cNvGrpSpPr/>
+        <p:nvPr/>
+      </p:nvGrpSpPr>
+      <p:grpSpPr>
+        <a:xfrm>
+          <a:off x="0" y="0"/>
+          <a:ext cx="0" cy="0"/>
+          <a:chOff x="0" y="0"/>
+          <a:chExt cx="0" cy="0"/>
+        </a:xfrm>
+      </p:grpSpPr>
+      <p:sp>
+        <p:nvSpPr>
+          <p:cNvPr id="2" name="Titel 1">
+            <a:extLst>
+              <a:ext uri="{FF2B5EF4-FFF2-40B4-BE49-F238E27FC236}">
+                <a16:creationId xmlns:a16="http://schemas.microsoft.com/office/drawing/2014/main" id="{7CCBD4F6-FBD5-23AE-D237-08C0B7BE6966}"/>
+              </a:ext>
+            </a:extLst>
+          </p:cNvPr>
+          <p:cNvSpPr>
+            <a:spLocks noGrp="1"/>
+          </p:cNvSpPr>
+          <p:nvPr>
+            <p:ph type="title"/>
+          </p:nvPr>
+        </p:nvSpPr>
+        <p:spPr/>
+        <p:txBody>
+          <a:bodyPr/>
+          <a:lstStyle/>
+          <a:p>
+            <a:r>
+              <a:rPr lang="de-DE" dirty="0"/>
+              <a:t>SQL-Datenbank</a:t>
+            </a:r>
+          </a:p>
+        </p:txBody>
+      </p:sp>
+      <p:sp>
+        <p:nvSpPr>
+          <p:cNvPr id="3" name="Inhaltsplatzhalter 2">
+            <a:extLst>
+              <a:ext uri="{FF2B5EF4-FFF2-40B4-BE49-F238E27FC236}">
+                <a16:creationId xmlns:a16="http://schemas.microsoft.com/office/drawing/2014/main" id="{1DA576C3-AF0F-8D69-7BF2-8853DC9864AF}"/>
+              </a:ext>
+            </a:extLst>
+          </p:cNvPr>
+          <p:cNvSpPr>
+            <a:spLocks noGrp="1"/>
+          </p:cNvSpPr>
+          <p:nvPr>
+            <p:ph idx="1"/>
+          </p:nvPr>
+        </p:nvSpPr>
+        <p:spPr>
+          <a:xfrm>
+            <a:off x="258793" y="1825625"/>
+            <a:ext cx="12899366" cy="4351338"/>
+          </a:xfrm>
+        </p:spPr>
+        <p:txBody>
+          <a:bodyPr>
+            <a:normAutofit/>
+          </a:bodyPr>
+          <a:lstStyle/>
+          <a:p>
+            <a:pPr marL="0" indent="0">
+              <a:buNone/>
+            </a:pPr>
+            <a:r>
+              <a:rPr lang="de-DE" dirty="0"/>
+              <a:t>CREATE TABLE `</a:t>
+            </a:r>
+            <a:r>
+              <a:rPr lang="de-DE" dirty="0" err="1"/>
+              <a:t>mitarbeiter</a:t>
+            </a:r>
+            <a:r>
+              <a:rPr lang="de-DE" dirty="0"/>
+              <a:t>` (</a:t>
+            </a:r>
+          </a:p>
+          <a:p>
+            <a:pPr marL="0" indent="0">
+              <a:buNone/>
+            </a:pPr>
+            <a:r>
+              <a:rPr lang="de-DE" dirty="0"/>
+              <a:t>    `</a:t>
+            </a:r>
+            <a:r>
+              <a:rPr lang="de-DE" dirty="0" err="1"/>
+              <a:t>PersonenID</a:t>
+            </a:r>
+            <a:r>
+              <a:rPr lang="de-DE" dirty="0"/>
+              <a:t>`  INT         NOT NULL,</a:t>
+            </a:r>
+          </a:p>
+          <a:p>
+            <a:pPr marL="0" indent="0">
+              <a:buNone/>
+            </a:pPr>
+            <a:r>
+              <a:rPr lang="de-DE" dirty="0"/>
+              <a:t>    `Position`    VARCHAR(40),</a:t>
+            </a:r>
+          </a:p>
+          <a:p>
+            <a:pPr marL="0" indent="0">
+              <a:buNone/>
+            </a:pPr>
+            <a:r>
+              <a:rPr lang="de-DE" dirty="0"/>
+              <a:t>    PRIMARY KEY (`</a:t>
+            </a:r>
+            <a:r>
+              <a:rPr lang="de-DE" dirty="0" err="1"/>
+              <a:t>PersonenID</a:t>
+            </a:r>
+            <a:r>
+              <a:rPr lang="de-DE" dirty="0"/>
+              <a:t>`),</a:t>
+            </a:r>
+          </a:p>
+          <a:p>
+            <a:pPr marL="0" indent="0">
+              <a:buNone/>
+            </a:pPr>
+            <a:r>
+              <a:rPr lang="de-DE" dirty="0"/>
+              <a:t>    CONSTRAINT `mitarbeiter_ibfk_1`</a:t>
+            </a:r>
+          </a:p>
+          <a:p>
+            <a:pPr marL="0" indent="0">
+              <a:buNone/>
+            </a:pPr>
+            <a:r>
+              <a:rPr lang="de-DE" dirty="0"/>
+              <a:t>        FOREIGN KEY (`</a:t>
+            </a:r>
+            <a:r>
+              <a:rPr lang="de-DE" dirty="0" err="1"/>
+              <a:t>PersonenID</a:t>
+            </a:r>
+            <a:r>
+              <a:rPr lang="de-DE" dirty="0"/>
+              <a:t>`) REFERENCES `</a:t>
+            </a:r>
+            <a:r>
+              <a:rPr lang="de-DE" dirty="0" err="1"/>
+              <a:t>personen</a:t>
+            </a:r>
+            <a:r>
+              <a:rPr lang="de-DE" dirty="0"/>
+              <a:t>` (`</a:t>
+            </a:r>
+            <a:r>
+              <a:rPr lang="de-DE" dirty="0" err="1"/>
+              <a:t>PersonenID</a:t>
+            </a:r>
+            <a:r>
+              <a:rPr lang="de-DE" dirty="0"/>
+              <a:t>`)</a:t>
+            </a:r>
+          </a:p>
+          <a:p>
+            <a:pPr marL="0" indent="0">
+              <a:buNone/>
+            </a:pPr>
+            <a:r>
+              <a:rPr lang="de-DE" dirty="0"/>
+              <a:t>        ON DELETE CASCADE</a:t>
+            </a:r>
+          </a:p>
+          <a:p>
+            <a:pPr marL="0" indent="0">
+              <a:buNone/>
+            </a:pPr>
+            <a:r>
+              <a:rPr lang="de-DE" dirty="0"/>
+              <a:t>);</a:t>
+            </a:r>
+            <a:endParaRPr lang="de-DE" dirty="0">
+              <a:effectLst/>
+            </a:endParaRPr>
+          </a:p>
+        </p:txBody>
+      </p:sp>
+    </p:spTree>
+    <p:extLst>
+      <p:ext uri="{BB962C8B-B14F-4D97-AF65-F5344CB8AC3E}">
+        <p14:creationId xmlns:p14="http://schemas.microsoft.com/office/powerpoint/2010/main" val="1093226319"/>
+      </p:ext>
+    </p:extLst>
+  </p:cSld>
+  <p:clrMapOvr>
+    <a:masterClrMapping/>
+  </p:clrMapOvr>
+</p:sld>
+</file>
+
+<file path=ppt/slides/slide15.xml><?xml version="1.0" encoding="utf-8"?>
+<p:sld xmlns:a="http://schemas.openxmlformats.org/drawingml/2006/main" xmlns:r="http://schemas.openxmlformats.org/officeDocument/2006/relationships" xmlns:p="http://schemas.openxmlformats.org/presentationml/2006/main">
+  <p:cSld>
+    <p:spTree>
+      <p:nvGrpSpPr>
         <p:cNvPr id="1" name=""/>
         <p:cNvGrpSpPr/>
         <p:nvPr/>
@@ -4897,29 +5490,173 @@
       </p:sp>
       <p:sp>
         <p:nvSpPr>
-          <p:cNvPr id="3" name="Inhaltsplatzhalter 2">
-            <a:extLst>
-              <a:ext uri="{FF2B5EF4-FFF2-40B4-BE49-F238E27FC236}">
-                <a16:creationId xmlns:a16="http://schemas.microsoft.com/office/drawing/2014/main" id="{05616802-8963-F5B0-CFC7-5C7E4AD7F7B2}"/>
-              </a:ext>
-            </a:extLst>
-          </p:cNvPr>
-          <p:cNvSpPr>
-            <a:spLocks noGrp="1"/>
-          </p:cNvSpPr>
-          <p:nvPr>
-            <p:ph idx="1"/>
-          </p:nvPr>
-        </p:nvSpPr>
-        <p:spPr/>
-        <p:txBody>
-          <a:bodyPr/>
-          <a:lstStyle/>
-          <a:p>
-            <a:endParaRPr lang="de-DE" dirty="0"/>
-          </a:p>
-        </p:txBody>
-      </p:sp>
+          <p:cNvPr id="5" name="Textfeld 4">
+            <a:extLst>
+              <a:ext uri="{FF2B5EF4-FFF2-40B4-BE49-F238E27FC236}">
+                <a16:creationId xmlns:a16="http://schemas.microsoft.com/office/drawing/2014/main" id="{B97609C7-BEBB-CBD2-54D7-9EC9DD148091}"/>
+              </a:ext>
+            </a:extLst>
+          </p:cNvPr>
+          <p:cNvSpPr txBox="1"/>
+          <p:nvPr/>
+        </p:nvSpPr>
+        <p:spPr>
+          <a:xfrm>
+            <a:off x="908648" y="1496054"/>
+            <a:ext cx="7694763" cy="2031325"/>
+          </a:xfrm>
+          <a:prstGeom prst="rect">
+            <a:avLst/>
+          </a:prstGeom>
+          <a:noFill/>
+        </p:spPr>
+        <p:txBody>
+          <a:bodyPr wrap="square">
+            <a:spAutoFit/>
+          </a:bodyPr>
+          <a:lstStyle/>
+          <a:p>
+            <a:r>
+              <a:rPr lang="de-DE" dirty="0"/>
+              <a:t>SELECT MONTH(</a:t>
+            </a:r>
+            <a:r>
+              <a:rPr lang="de-DE" dirty="0" err="1"/>
+              <a:t>Ausleihedatum</a:t>
+            </a:r>
+            <a:r>
+              <a:rPr lang="de-DE" dirty="0"/>
+              <a:t>) AS Monat, COUNT(*) AS Ausleihen,</a:t>
+            </a:r>
+          </a:p>
+          <a:p>
+            <a:r>
+              <a:rPr lang="de-DE" dirty="0"/>
+              <a:t>           SUM(CASE WHEN Status = 0 THEN 1 ELSE 0 END) AS </a:t>
+            </a:r>
+            <a:r>
+              <a:rPr lang="de-DE" dirty="0" err="1"/>
+              <a:t>NochOffen</a:t>
+            </a:r>
+            <a:r>
+              <a:rPr lang="de-DE" dirty="0"/>
+              <a:t>,</a:t>
+            </a:r>
+          </a:p>
+          <a:p>
+            <a:r>
+              <a:rPr lang="de-DE" dirty="0"/>
+              <a:t>           SUM(CASE WHEN Status = 1 THEN 1 ELSE 0 END) AS Zurückgegeben</a:t>
+            </a:r>
+          </a:p>
+          <a:p>
+            <a:r>
+              <a:rPr lang="de-DE" dirty="0"/>
+              <a:t>    FROM ausleihe</a:t>
+            </a:r>
+          </a:p>
+          <a:p>
+            <a:r>
+              <a:rPr lang="de-DE" dirty="0"/>
+              <a:t>    WHERE YEAR(</a:t>
+            </a:r>
+            <a:r>
+              <a:rPr lang="de-DE" dirty="0" err="1"/>
+              <a:t>Ausleihedatum</a:t>
+            </a:r>
+            <a:r>
+              <a:rPr lang="de-DE" dirty="0"/>
+              <a:t>) = 2026</a:t>
+            </a:r>
+          </a:p>
+          <a:p>
+            <a:r>
+              <a:rPr lang="de-DE" dirty="0"/>
+              <a:t>    GROUP BY MONTH(</a:t>
+            </a:r>
+            <a:r>
+              <a:rPr lang="de-DE" dirty="0" err="1"/>
+              <a:t>Ausleihedatum</a:t>
+            </a:r>
+            <a:r>
+              <a:rPr lang="de-DE" dirty="0"/>
+              <a:t>)</a:t>
+            </a:r>
+          </a:p>
+          <a:p>
+            <a:r>
+              <a:rPr lang="de-DE" dirty="0"/>
+              <a:t>    ORDER BY Monat</a:t>
+            </a:r>
+          </a:p>
+        </p:txBody>
+      </p:sp>
+      <p:pic>
+        <p:nvPicPr>
+          <p:cNvPr id="7" name="Grafik 6" descr="The image shows a bar chart illustrating the number of books borrowed per month in 2026, with a peak in January and a steady decline towards February.&#10;&#10;KI-generierte Inhalte können fehlerhaft sein.">
+            <a:extLst>
+              <a:ext uri="{FF2B5EF4-FFF2-40B4-BE49-F238E27FC236}">
+                <a16:creationId xmlns:a16="http://schemas.microsoft.com/office/drawing/2014/main" id="{A709D323-B4BF-D649-3F5E-4D101FC96061}"/>
+              </a:ext>
+            </a:extLst>
+          </p:cNvPr>
+          <p:cNvPicPr>
+            <a:picLocks noChangeAspect="1"/>
+          </p:cNvPicPr>
+          <p:nvPr/>
+        </p:nvPicPr>
+        <p:blipFill>
+          <a:blip r:embed="rId2">
+            <a:extLst>
+              <a:ext uri="{28A0092B-C50C-407E-A947-70E740481C1C}">
+                <a14:useLocalDpi xmlns:a14="http://schemas.microsoft.com/office/drawing/2010/main" val="0"/>
+              </a:ext>
+            </a:extLst>
+          </a:blip>
+          <a:stretch>
+            <a:fillRect/>
+          </a:stretch>
+        </p:blipFill>
+        <p:spPr>
+          <a:xfrm>
+            <a:off x="5677325" y="2463743"/>
+            <a:ext cx="5852172" cy="4389129"/>
+          </a:xfrm>
+          <a:prstGeom prst="rect">
+            <a:avLst/>
+          </a:prstGeom>
+        </p:spPr>
+      </p:pic>
+      <p:pic>
+        <p:nvPicPr>
+          <p:cNvPr id="9" name="Grafik 8" descr="Noch&#10;&#10;KI-generierte Inhalte können fehlerhaft sein.">
+            <a:extLst>
+              <a:ext uri="{FF2B5EF4-FFF2-40B4-BE49-F238E27FC236}">
+                <a16:creationId xmlns:a16="http://schemas.microsoft.com/office/drawing/2014/main" id="{352C5446-FB60-E5E0-0520-652158333237}"/>
+              </a:ext>
+            </a:extLst>
+          </p:cNvPr>
+          <p:cNvPicPr>
+            <a:picLocks noChangeAspect="1"/>
+          </p:cNvPicPr>
+          <p:nvPr/>
+        </p:nvPicPr>
+        <p:blipFill>
+          <a:blip r:embed="rId3"/>
+          <a:stretch>
+            <a:fillRect/>
+          </a:stretch>
+        </p:blipFill>
+        <p:spPr>
+          <a:xfrm>
+            <a:off x="766020" y="3832548"/>
+            <a:ext cx="4786998" cy="2031325"/>
+          </a:xfrm>
+          <a:prstGeom prst="rect">
+            <a:avLst/>
+          </a:prstGeom>
+        </p:spPr>
+      </p:pic>
     </p:spTree>
     <p:extLst>
       <p:ext uri="{BB962C8B-B14F-4D97-AF65-F5344CB8AC3E}">
@@ -4933,7 +5670,7 @@
 </p:sld>
 </file>
 
-<file path=ppt/slides/slide14.xml><?xml version="1.0" encoding="utf-8"?>
+<file path=ppt/slides/slide16.xml><?xml version="1.0" encoding="utf-8"?>
 <p:sld xmlns:a="http://schemas.openxmlformats.org/drawingml/2006/main" xmlns:r="http://schemas.openxmlformats.org/officeDocument/2006/relationships" xmlns:p="http://schemas.openxmlformats.org/presentationml/2006/main">
   <p:cSld>
     <p:spTree>
@@ -4984,28 +5721,145 @@
           </a:p>
         </p:txBody>
       </p:sp>
-      <p:sp>
-        <p:nvSpPr>
-          <p:cNvPr id="3" name="Inhaltsplatzhalter 2">
-            <a:extLst>
-              <a:ext uri="{FF2B5EF4-FFF2-40B4-BE49-F238E27FC236}">
-                <a16:creationId xmlns:a16="http://schemas.microsoft.com/office/drawing/2014/main" id="{88B80C0E-0090-CD89-0D7C-A170A8147627}"/>
-              </a:ext>
-            </a:extLst>
-          </p:cNvPr>
-          <p:cNvSpPr>
-            <a:spLocks noGrp="1"/>
-          </p:cNvSpPr>
-          <p:nvPr>
-            <p:ph idx="1"/>
-          </p:nvPr>
-        </p:nvSpPr>
-        <p:spPr/>
-        <p:txBody>
-          <a:bodyPr/>
-          <a:lstStyle/>
-          <a:p>
-            <a:endParaRPr lang="de-DE"/>
+      <p:pic>
+        <p:nvPicPr>
+          <p:cNvPr id="5" name="Grafik 4" descr="Gruppe von Personen mit einfarbiger Füllung">
+            <a:extLst>
+              <a:ext uri="{FF2B5EF4-FFF2-40B4-BE49-F238E27FC236}">
+                <a16:creationId xmlns:a16="http://schemas.microsoft.com/office/drawing/2014/main" id="{FF072489-227C-2F79-80E9-64AF30AE0496}"/>
+              </a:ext>
+            </a:extLst>
+          </p:cNvPr>
+          <p:cNvPicPr>
+            <a:picLocks noChangeAspect="1"/>
+          </p:cNvPicPr>
+          <p:nvPr/>
+        </p:nvPicPr>
+        <p:blipFill>
+          <a:blip>
+            <a:extLst>
+              <a:ext uri="{96DAC541-7B7A-43D3-8B79-37D633B846F1}">
+                <asvg:svgBlip xmlns:asvg="http://schemas.microsoft.com/office/drawing/2016/SVG/main" r:embed="rId2"/>
+              </a:ext>
+            </a:extLst>
+          </a:blip>
+          <a:stretch>
+            <a:fillRect/>
+          </a:stretch>
+        </p:blipFill>
+        <p:spPr>
+          <a:xfrm>
+            <a:off x="1339756" y="2729677"/>
+            <a:ext cx="2801078" cy="2801078"/>
+          </a:xfrm>
+          <a:prstGeom prst="rect">
+            <a:avLst/>
+          </a:prstGeom>
+        </p:spPr>
+      </p:pic>
+      <p:pic>
+        <p:nvPicPr>
+          <p:cNvPr id="7" name="Grafik 6" descr="Kinder mit einfarbiger Füllung">
+            <a:extLst>
+              <a:ext uri="{FF2B5EF4-FFF2-40B4-BE49-F238E27FC236}">
+                <a16:creationId xmlns:a16="http://schemas.microsoft.com/office/drawing/2014/main" id="{EE3436D3-C44E-20DC-12F9-C99DE011F75E}"/>
+              </a:ext>
+            </a:extLst>
+          </p:cNvPr>
+          <p:cNvPicPr>
+            <a:picLocks noChangeAspect="1"/>
+          </p:cNvPicPr>
+          <p:nvPr/>
+        </p:nvPicPr>
+        <p:blipFill>
+          <a:blip>
+            <a:extLst>
+              <a:ext uri="{96DAC541-7B7A-43D3-8B79-37D633B846F1}">
+                <asvg:svgBlip xmlns:asvg="http://schemas.microsoft.com/office/drawing/2016/SVG/main" r:embed="rId3"/>
+              </a:ext>
+            </a:extLst>
+          </a:blip>
+          <a:stretch>
+            <a:fillRect/>
+          </a:stretch>
+        </p:blipFill>
+        <p:spPr>
+          <a:xfrm>
+            <a:off x="7563009" y="3311470"/>
+            <a:ext cx="2801078" cy="2801078"/>
+          </a:xfrm>
+          <a:prstGeom prst="rect">
+            <a:avLst/>
+          </a:prstGeom>
+        </p:spPr>
+      </p:pic>
+      <p:sp>
+        <p:nvSpPr>
+          <p:cNvPr id="8" name="Textfeld 7">
+            <a:extLst>
+              <a:ext uri="{FF2B5EF4-FFF2-40B4-BE49-F238E27FC236}">
+                <a16:creationId xmlns:a16="http://schemas.microsoft.com/office/drawing/2014/main" id="{125B85F7-0DF9-B6BB-958E-E72EED1FD442}"/>
+              </a:ext>
+            </a:extLst>
+          </p:cNvPr>
+          <p:cNvSpPr txBox="1"/>
+          <p:nvPr/>
+        </p:nvSpPr>
+        <p:spPr>
+          <a:xfrm>
+            <a:off x="2170119" y="5530755"/>
+            <a:ext cx="2694171" cy="369332"/>
+          </a:xfrm>
+          <a:prstGeom prst="rect">
+            <a:avLst/>
+          </a:prstGeom>
+          <a:noFill/>
+        </p:spPr>
+        <p:txBody>
+          <a:bodyPr wrap="square" rtlCol="0">
+            <a:spAutoFit/>
+          </a:bodyPr>
+          <a:lstStyle/>
+          <a:p>
+            <a:r>
+              <a:rPr lang="de-DE" dirty="0"/>
+              <a:t>Mitglieder</a:t>
+            </a:r>
+          </a:p>
+        </p:txBody>
+      </p:sp>
+      <p:sp>
+        <p:nvSpPr>
+          <p:cNvPr id="9" name="Textfeld 8">
+            <a:extLst>
+              <a:ext uri="{FF2B5EF4-FFF2-40B4-BE49-F238E27FC236}">
+                <a16:creationId xmlns:a16="http://schemas.microsoft.com/office/drawing/2014/main" id="{24BE59AB-3855-91B1-6726-7C65C80EEC86}"/>
+              </a:ext>
+            </a:extLst>
+          </p:cNvPr>
+          <p:cNvSpPr txBox="1"/>
+          <p:nvPr/>
+        </p:nvSpPr>
+        <p:spPr>
+          <a:xfrm>
+            <a:off x="8286465" y="5441751"/>
+            <a:ext cx="2694171" cy="369332"/>
+          </a:xfrm>
+          <a:prstGeom prst="rect">
+            <a:avLst/>
+          </a:prstGeom>
+          <a:noFill/>
+        </p:spPr>
+        <p:txBody>
+          <a:bodyPr wrap="square" rtlCol="0">
+            <a:spAutoFit/>
+          </a:bodyPr>
+          <a:lstStyle/>
+          <a:p>
+            <a:r>
+              <a:rPr lang="de-DE" dirty="0"/>
+              <a:t>Mitarbeiter</a:t>
+            </a:r>
           </a:p>
         </p:txBody>
       </p:sp>
@@ -5022,7 +5876,7 @@
 </p:sld>
 </file>
 
-<file path=ppt/slides/slide15.xml><?xml version="1.0" encoding="utf-8"?>
+<file path=ppt/slides/slide17.xml><?xml version="1.0" encoding="utf-8"?>
 <p:sld xmlns:a="http://schemas.openxmlformats.org/drawingml/2006/main" xmlns:r="http://schemas.openxmlformats.org/officeDocument/2006/relationships" xmlns:p="http://schemas.openxmlformats.org/presentationml/2006/main">
   <p:cSld>
     <p:spTree>

--- a/BibPräsi.pptx
+++ b/BibPräsi.pptx
@@ -5,7 +5,7 @@
     <p:sldMasterId id="2147483648" r:id="rId1"/>
   </p:sldMasterIdLst>
   <p:notesMasterIdLst>
-    <p:notesMasterId r:id="rId19"/>
+    <p:notesMasterId r:id="rId22"/>
   </p:notesMasterIdLst>
   <p:sldIdLst>
     <p:sldId id="256" r:id="rId2"/>
@@ -23,8 +23,11 @@
     <p:sldId id="271" r:id="rId14"/>
     <p:sldId id="272" r:id="rId15"/>
     <p:sldId id="262" r:id="rId16"/>
-    <p:sldId id="269" r:id="rId17"/>
-    <p:sldId id="268" r:id="rId18"/>
+    <p:sldId id="273" r:id="rId17"/>
+    <p:sldId id="275" r:id="rId18"/>
+    <p:sldId id="268" r:id="rId19"/>
+    <p:sldId id="269" r:id="rId20"/>
+    <p:sldId id="274" r:id="rId21"/>
   </p:sldIdLst>
   <p:sldSz cx="12192000" cy="6858000"/>
   <p:notesSz cx="6858000" cy="9144000"/>
@@ -155,8 +158,11 @@
             <p14:sldId id="271"/>
             <p14:sldId id="272"/>
             <p14:sldId id="262"/>
+            <p14:sldId id="273"/>
+            <p14:sldId id="275"/>
+            <p14:sldId id="268"/>
             <p14:sldId id="269"/>
-            <p14:sldId id="268"/>
+            <p14:sldId id="274"/>
           </p14:sldIdLst>
         </p14:section>
       </p14:sectionLst>
@@ -250,7 +256,7 @@
           <a:p>
             <a:fld id="{29AB276D-0B6C-4441-8D54-6BA680AC8953}" type="datetimeFigureOut">
               <a:rPr lang="de-DE" smtClean="0"/>
-              <a:t>14.06.2026</a:t>
+              <a:t>15.06.2026</a:t>
             </a:fld>
             <a:endParaRPr lang="de-DE"/>
           </a:p>
@@ -1180,7 +1186,7 @@
           <a:p>
             <a:fld id="{47687675-1CDB-48C0-9C87-57F4E3A33078}" type="datetimeFigureOut">
               <a:rPr lang="de-DE" smtClean="0"/>
-              <a:t>14.06.2026</a:t>
+              <a:t>15.06.2026</a:t>
             </a:fld>
             <a:endParaRPr lang="de-DE"/>
           </a:p>
@@ -1378,7 +1384,7 @@
           <a:p>
             <a:fld id="{47687675-1CDB-48C0-9C87-57F4E3A33078}" type="datetimeFigureOut">
               <a:rPr lang="de-DE" smtClean="0"/>
-              <a:t>14.06.2026</a:t>
+              <a:t>15.06.2026</a:t>
             </a:fld>
             <a:endParaRPr lang="de-DE"/>
           </a:p>
@@ -1586,7 +1592,7 @@
           <a:p>
             <a:fld id="{47687675-1CDB-48C0-9C87-57F4E3A33078}" type="datetimeFigureOut">
               <a:rPr lang="de-DE" smtClean="0"/>
-              <a:t>14.06.2026</a:t>
+              <a:t>15.06.2026</a:t>
             </a:fld>
             <a:endParaRPr lang="de-DE"/>
           </a:p>
@@ -1784,7 +1790,7 @@
           <a:p>
             <a:fld id="{47687675-1CDB-48C0-9C87-57F4E3A33078}" type="datetimeFigureOut">
               <a:rPr lang="de-DE" smtClean="0"/>
-              <a:t>14.06.2026</a:t>
+              <a:t>15.06.2026</a:t>
             </a:fld>
             <a:endParaRPr lang="de-DE"/>
           </a:p>
@@ -2059,7 +2065,7 @@
           <a:p>
             <a:fld id="{47687675-1CDB-48C0-9C87-57F4E3A33078}" type="datetimeFigureOut">
               <a:rPr lang="de-DE" smtClean="0"/>
-              <a:t>14.06.2026</a:t>
+              <a:t>15.06.2026</a:t>
             </a:fld>
             <a:endParaRPr lang="de-DE"/>
           </a:p>
@@ -2324,7 +2330,7 @@
           <a:p>
             <a:fld id="{47687675-1CDB-48C0-9C87-57F4E3A33078}" type="datetimeFigureOut">
               <a:rPr lang="de-DE" smtClean="0"/>
-              <a:t>14.06.2026</a:t>
+              <a:t>15.06.2026</a:t>
             </a:fld>
             <a:endParaRPr lang="de-DE"/>
           </a:p>
@@ -2736,7 +2742,7 @@
           <a:p>
             <a:fld id="{47687675-1CDB-48C0-9C87-57F4E3A33078}" type="datetimeFigureOut">
               <a:rPr lang="de-DE" smtClean="0"/>
-              <a:t>14.06.2026</a:t>
+              <a:t>15.06.2026</a:t>
             </a:fld>
             <a:endParaRPr lang="de-DE"/>
           </a:p>
@@ -2877,7 +2883,7 @@
           <a:p>
             <a:fld id="{47687675-1CDB-48C0-9C87-57F4E3A33078}" type="datetimeFigureOut">
               <a:rPr lang="de-DE" smtClean="0"/>
-              <a:t>14.06.2026</a:t>
+              <a:t>15.06.2026</a:t>
             </a:fld>
             <a:endParaRPr lang="de-DE"/>
           </a:p>
@@ -2990,7 +2996,7 @@
           <a:p>
             <a:fld id="{47687675-1CDB-48C0-9C87-57F4E3A33078}" type="datetimeFigureOut">
               <a:rPr lang="de-DE" smtClean="0"/>
-              <a:t>14.06.2026</a:t>
+              <a:t>15.06.2026</a:t>
             </a:fld>
             <a:endParaRPr lang="de-DE"/>
           </a:p>
@@ -3301,7 +3307,7 @@
           <a:p>
             <a:fld id="{47687675-1CDB-48C0-9C87-57F4E3A33078}" type="datetimeFigureOut">
               <a:rPr lang="de-DE" smtClean="0"/>
-              <a:t>14.06.2026</a:t>
+              <a:t>15.06.2026</a:t>
             </a:fld>
             <a:endParaRPr lang="de-DE"/>
           </a:p>
@@ -3589,7 +3595,7 @@
           <a:p>
             <a:fld id="{47687675-1CDB-48C0-9C87-57F4E3A33078}" type="datetimeFigureOut">
               <a:rPr lang="de-DE" smtClean="0"/>
-              <a:t>14.06.2026</a:t>
+              <a:t>15.06.2026</a:t>
             </a:fld>
             <a:endParaRPr lang="de-DE"/>
           </a:p>
@@ -3830,7 +3836,7 @@
           <a:p>
             <a:fld id="{47687675-1CDB-48C0-9C87-57F4E3A33078}" type="datetimeFigureOut">
               <a:rPr lang="de-DE" smtClean="0"/>
-              <a:t>14.06.2026</a:t>
+              <a:t>15.06.2026</a:t>
             </a:fld>
             <a:endParaRPr lang="de-DE"/>
           </a:p>
@@ -4633,10 +4639,10 @@
       </p:sp>
       <p:pic>
         <p:nvPicPr>
-          <p:cNvPr id="5" name="Inhaltsplatzhalter 4">
-            <a:extLst>
-              <a:ext uri="{FF2B5EF4-FFF2-40B4-BE49-F238E27FC236}">
-                <a16:creationId xmlns:a16="http://schemas.microsoft.com/office/drawing/2014/main" id="{0D2403A4-EB58-D608-A62E-0208F7D5C169}"/>
+          <p:cNvPr id="7" name="Inhaltsplatzhalter 6">
+            <a:extLst>
+              <a:ext uri="{FF2B5EF4-FFF2-40B4-BE49-F238E27FC236}">
+                <a16:creationId xmlns:a16="http://schemas.microsoft.com/office/drawing/2014/main" id="{A041451E-E2F1-81B5-D285-96AD5F8A3996}"/>
               </a:ext>
             </a:extLst>
           </p:cNvPr>
@@ -4655,14 +4661,15 @@
               </a:ext>
             </a:extLst>
           </a:blip>
+          <a:srcRect t="3639" r="52230" b="37649"/>
           <a:stretch>
             <a:fillRect/>
           </a:stretch>
         </p:blipFill>
         <p:spPr>
           <a:xfrm>
-            <a:off x="3904672" y="171450"/>
-            <a:ext cx="7172903" cy="10047199"/>
+            <a:off x="3410667" y="241070"/>
+            <a:ext cx="7687096" cy="6616930"/>
           </a:xfrm>
           <a:prstGeom prst="rect">
             <a:avLst/>
@@ -4835,7 +4842,7 @@
         <p:spPr/>
         <p:txBody>
           <a:bodyPr>
-            <a:normAutofit fontScale="85000" lnSpcReduction="20000"/>
+            <a:normAutofit fontScale="92500" lnSpcReduction="20000"/>
           </a:bodyPr>
           <a:lstStyle/>
           <a:p>
@@ -4843,8 +4850,16 @@
               <a:buNone/>
             </a:pPr>
             <a:r>
-              <a:rPr lang="de-DE" dirty="0"/>
-              <a:t>CREATE TABLE `</a:t>
+              <a:rPr lang="de-DE" dirty="0">
+                <a:solidFill>
+                  <a:srgbClr val="0070C0"/>
+                </a:solidFill>
+              </a:rPr>
+              <a:t>CREATE TABLE </a:t>
+            </a:r>
+            <a:r>
+              <a:rPr lang="de-DE" dirty="0"/>
+              <a:t>`</a:t>
             </a:r>
             <a:r>
               <a:rPr lang="de-DE" dirty="0" err="1"/>
@@ -4931,7 +4946,19 @@
             </a:pPr>
             <a:r>
               <a:rPr lang="de-DE" dirty="0"/>
-              <a:t>    PRIMARY KEY (`</a:t>
+              <a:t>    </a:t>
+            </a:r>
+            <a:r>
+              <a:rPr lang="de-DE" dirty="0">
+                <a:solidFill>
+                  <a:srgbClr val="0070C0"/>
+                </a:solidFill>
+              </a:rPr>
+              <a:t>PRIMARY KEY </a:t>
+            </a:r>
+            <a:r>
+              <a:rPr lang="de-DE" dirty="0"/>
+              <a:t>(`</a:t>
             </a:r>
             <a:r>
               <a:rPr lang="de-DE" dirty="0" err="1"/>
@@ -4948,7 +4975,19 @@
             </a:pPr>
             <a:r>
               <a:rPr lang="de-DE" dirty="0"/>
-              <a:t>    FOREIGN KEY (`</a:t>
+              <a:t>    </a:t>
+            </a:r>
+            <a:r>
+              <a:rPr lang="de-DE" dirty="0">
+                <a:solidFill>
+                  <a:srgbClr val="0070C0"/>
+                </a:solidFill>
+              </a:rPr>
+              <a:t>FOREIGN KEY </a:t>
+            </a:r>
+            <a:r>
+              <a:rPr lang="de-DE" dirty="0"/>
+              <a:t>(`</a:t>
             </a:r>
             <a:r>
               <a:rPr lang="de-DE" dirty="0" err="1"/>
@@ -4956,7 +4995,19 @@
             </a:r>
             <a:r>
               <a:rPr lang="de-DE" dirty="0"/>
-              <a:t>`) REFERENCES `</a:t>
+              <a:t>`) </a:t>
+            </a:r>
+            <a:r>
+              <a:rPr lang="de-DE" dirty="0">
+                <a:solidFill>
+                  <a:srgbClr val="0070C0"/>
+                </a:solidFill>
+              </a:rPr>
+              <a:t>REFERENCES</a:t>
+            </a:r>
+            <a:r>
+              <a:rPr lang="de-DE" dirty="0"/>
+              <a:t> `</a:t>
             </a:r>
             <a:r>
               <a:rPr lang="de-DE" dirty="0" err="1"/>
@@ -4981,13 +5032,16 @@
             </a:pPr>
             <a:r>
               <a:rPr lang="de-DE" dirty="0"/>
-              <a:t>        ON DELETE CASCADE</a:t>
-            </a:r>
-          </a:p>
-          <a:p>
-            <a:pPr marL="0" indent="0">
-              <a:buNone/>
-            </a:pPr>
+              <a:t>        </a:t>
+            </a:r>
+            <a:r>
+              <a:rPr lang="de-DE" dirty="0">
+                <a:solidFill>
+                  <a:srgbClr val="0070C0"/>
+                </a:solidFill>
+              </a:rPr>
+              <a:t>ON DELETE CASCADE</a:t>
+            </a:r>
             <a:r>
               <a:rPr lang="de-DE" dirty="0"/>
               <a:t>);</a:t>
@@ -5097,8 +5151,16 @@
               <a:buNone/>
             </a:pPr>
             <a:r>
-              <a:rPr lang="de-DE" dirty="0"/>
-              <a:t>CREATE TABLE `</a:t>
+              <a:rPr lang="de-DE" dirty="0">
+                <a:solidFill>
+                  <a:srgbClr val="0070C0"/>
+                </a:solidFill>
+              </a:rPr>
+              <a:t>CREATE TABLE </a:t>
+            </a:r>
+            <a:r>
+              <a:rPr lang="de-DE" dirty="0"/>
+              <a:t>`</a:t>
             </a:r>
             <a:r>
               <a:rPr lang="de-DE" dirty="0" err="1"/>
@@ -5150,7 +5212,19 @@
             </a:pPr>
             <a:r>
               <a:rPr lang="de-DE" dirty="0"/>
-              <a:t>    PRIMARY KEY (`</a:t>
+              <a:t>    </a:t>
+            </a:r>
+            <a:r>
+              <a:rPr lang="de-DE" dirty="0">
+                <a:solidFill>
+                  <a:srgbClr val="0070C0"/>
+                </a:solidFill>
+              </a:rPr>
+              <a:t>PRIMARY KEY </a:t>
+            </a:r>
+            <a:r>
+              <a:rPr lang="de-DE" dirty="0"/>
+              <a:t>(`</a:t>
             </a:r>
             <a:r>
               <a:rPr lang="de-DE" dirty="0" err="1"/>
@@ -5167,7 +5241,19 @@
             </a:pPr>
             <a:r>
               <a:rPr lang="de-DE" dirty="0"/>
-              <a:t>    FOREIGN KEY (`</a:t>
+              <a:t>    </a:t>
+            </a:r>
+            <a:r>
+              <a:rPr lang="de-DE" dirty="0">
+                <a:solidFill>
+                  <a:srgbClr val="0070C0"/>
+                </a:solidFill>
+              </a:rPr>
+              <a:t>FOREIGN KEY </a:t>
+            </a:r>
+            <a:r>
+              <a:rPr lang="de-DE" dirty="0"/>
+              <a:t>(`</a:t>
             </a:r>
             <a:r>
               <a:rPr lang="de-DE" dirty="0" err="1"/>
@@ -5175,7 +5261,19 @@
             </a:r>
             <a:r>
               <a:rPr lang="de-DE" dirty="0"/>
-              <a:t>`) REFERENCES `</a:t>
+              <a:t>`) </a:t>
+            </a:r>
+            <a:r>
+              <a:rPr lang="de-DE" dirty="0">
+                <a:solidFill>
+                  <a:srgbClr val="0070C0"/>
+                </a:solidFill>
+              </a:rPr>
+              <a:t>REFERENCES</a:t>
+            </a:r>
+            <a:r>
+              <a:rPr lang="de-DE" dirty="0"/>
+              <a:t> `</a:t>
             </a:r>
             <a:r>
               <a:rPr lang="de-DE" dirty="0" err="1"/>
@@ -5200,13 +5298,16 @@
             </a:pPr>
             <a:r>
               <a:rPr lang="de-DE" dirty="0"/>
-              <a:t>        ON DELETE CASCADE</a:t>
-            </a:r>
-          </a:p>
-          <a:p>
-            <a:pPr marL="0" indent="0">
-              <a:buNone/>
-            </a:pPr>
+              <a:t>        </a:t>
+            </a:r>
+            <a:r>
+              <a:rPr lang="de-DE" dirty="0">
+                <a:solidFill>
+                  <a:srgbClr val="0070C0"/>
+                </a:solidFill>
+              </a:rPr>
+              <a:t>ON DELETE CASCADE</a:t>
+            </a:r>
             <a:r>
               <a:rPr lang="de-DE" dirty="0"/>
               <a:t>);</a:t>
@@ -5310,8 +5411,16 @@
               <a:buNone/>
             </a:pPr>
             <a:r>
-              <a:rPr lang="de-DE" dirty="0"/>
-              <a:t>CREATE TABLE `</a:t>
+              <a:rPr lang="de-DE" dirty="0">
+                <a:solidFill>
+                  <a:srgbClr val="0070C0"/>
+                </a:solidFill>
+              </a:rPr>
+              <a:t>CREATE TABLE </a:t>
+            </a:r>
+            <a:r>
+              <a:rPr lang="de-DE" dirty="0"/>
+              <a:t>`</a:t>
             </a:r>
             <a:r>
               <a:rPr lang="de-DE" dirty="0" err="1"/>
@@ -5354,7 +5463,19 @@
             </a:pPr>
             <a:r>
               <a:rPr lang="de-DE" dirty="0"/>
-              <a:t>    PRIMARY KEY (`</a:t>
+              <a:t>    </a:t>
+            </a:r>
+            <a:r>
+              <a:rPr lang="de-DE" dirty="0">
+                <a:solidFill>
+                  <a:srgbClr val="0070C0"/>
+                </a:solidFill>
+              </a:rPr>
+              <a:t>PRIMARY KEY </a:t>
+            </a:r>
+            <a:r>
+              <a:rPr lang="de-DE" dirty="0"/>
+              <a:t>(`</a:t>
             </a:r>
             <a:r>
               <a:rPr lang="de-DE" dirty="0" err="1"/>
@@ -5370,8 +5491,52 @@
               <a:buNone/>
             </a:pPr>
             <a:r>
-              <a:rPr lang="de-DE" dirty="0"/>
-              <a:t>    CONSTRAINT `mitarbeiter_ibfk_1`</a:t>
+              <a:rPr lang="de-DE" dirty="0">
+                <a:solidFill>
+                  <a:srgbClr val="0070C0"/>
+                </a:solidFill>
+              </a:rPr>
+              <a:t>    FOREIGN KEY </a:t>
+            </a:r>
+            <a:r>
+              <a:rPr lang="de-DE" dirty="0"/>
+              <a:t>(`</a:t>
+            </a:r>
+            <a:r>
+              <a:rPr lang="de-DE" dirty="0" err="1"/>
+              <a:t>PersonenID</a:t>
+            </a:r>
+            <a:r>
+              <a:rPr lang="de-DE" dirty="0"/>
+              <a:t>`) </a:t>
+            </a:r>
+            <a:r>
+              <a:rPr lang="de-DE" dirty="0">
+                <a:solidFill>
+                  <a:srgbClr val="0070C0"/>
+                </a:solidFill>
+              </a:rPr>
+              <a:t>REFERENCES</a:t>
+            </a:r>
+            <a:r>
+              <a:rPr lang="de-DE" dirty="0"/>
+              <a:t> `</a:t>
+            </a:r>
+            <a:r>
+              <a:rPr lang="de-DE" dirty="0" err="1"/>
+              <a:t>personen</a:t>
+            </a:r>
+            <a:r>
+              <a:rPr lang="de-DE" dirty="0"/>
+              <a:t>` (`</a:t>
+            </a:r>
+            <a:r>
+              <a:rPr lang="de-DE" dirty="0" err="1"/>
+              <a:t>PersonenID</a:t>
+            </a:r>
+            <a:r>
+              <a:rPr lang="de-DE" dirty="0"/>
+              <a:t>`)</a:t>
             </a:r>
           </a:p>
           <a:p>
@@ -5380,46 +5545,16 @@
             </a:pPr>
             <a:r>
               <a:rPr lang="de-DE" dirty="0"/>
-              <a:t>        FOREIGN KEY (`</a:t>
-            </a:r>
-            <a:r>
-              <a:rPr lang="de-DE" dirty="0" err="1"/>
-              <a:t>PersonenID</a:t>
-            </a:r>
-            <a:r>
-              <a:rPr lang="de-DE" dirty="0"/>
-              <a:t>`) REFERENCES `</a:t>
-            </a:r>
-            <a:r>
-              <a:rPr lang="de-DE" dirty="0" err="1"/>
-              <a:t>personen</a:t>
-            </a:r>
-            <a:r>
-              <a:rPr lang="de-DE" dirty="0"/>
-              <a:t>` (`</a:t>
-            </a:r>
-            <a:r>
-              <a:rPr lang="de-DE" dirty="0" err="1"/>
-              <a:t>PersonenID</a:t>
-            </a:r>
-            <a:r>
-              <a:rPr lang="de-DE" dirty="0"/>
-              <a:t>`)</a:t>
-            </a:r>
-          </a:p>
-          <a:p>
-            <a:pPr marL="0" indent="0">
-              <a:buNone/>
-            </a:pPr>
-            <a:r>
-              <a:rPr lang="de-DE" dirty="0"/>
-              <a:t>        ON DELETE CASCADE</a:t>
-            </a:r>
-          </a:p>
-          <a:p>
-            <a:pPr marL="0" indent="0">
-              <a:buNone/>
-            </a:pPr>
+              <a:t>        </a:t>
+            </a:r>
+            <a:r>
+              <a:rPr lang="de-DE" dirty="0">
+                <a:solidFill>
+                  <a:srgbClr val="0070C0"/>
+                </a:solidFill>
+              </a:rPr>
+              <a:t>ON DELETE CASCADE</a:t>
+            </a:r>
             <a:r>
               <a:rPr lang="de-DE" dirty="0"/>
               <a:t>);</a:t>
@@ -5678,7 +5813,7 @@
         <p:cNvPr id="1" name="">
           <a:extLst>
             <a:ext uri="{FF2B5EF4-FFF2-40B4-BE49-F238E27FC236}">
-              <a16:creationId xmlns:a16="http://schemas.microsoft.com/office/drawing/2014/main" id="{3BAB9CA6-964C-0A1D-85C9-E295C4DB862E}"/>
+              <a16:creationId xmlns:a16="http://schemas.microsoft.com/office/drawing/2014/main" id="{6B3B9A02-3588-299C-B1D2-60A8CC3CD5E6}"/>
             </a:ext>
           </a:extLst>
         </p:cNvPr>
@@ -5698,7 +5833,7 @@
           <p:cNvPr id="2" name="Titel 1">
             <a:extLst>
               <a:ext uri="{FF2B5EF4-FFF2-40B4-BE49-F238E27FC236}">
-                <a16:creationId xmlns:a16="http://schemas.microsoft.com/office/drawing/2014/main" id="{2CB994A6-A646-821B-C28C-9C9385BE011D}"/>
+                <a16:creationId xmlns:a16="http://schemas.microsoft.com/office/drawing/2014/main" id="{548D29D2-1F8D-BB8C-C237-A348AA9BE0EA}"/>
               </a:ext>
             </a:extLst>
           </p:cNvPr>
@@ -5716,99 +5851,27 @@
           <a:p>
             <a:r>
               <a:rPr lang="de-DE" dirty="0"/>
-              <a:t>Views</a:t>
-            </a:r>
-          </a:p>
-        </p:txBody>
-      </p:sp>
-      <p:pic>
-        <p:nvPicPr>
-          <p:cNvPr id="5" name="Grafik 4" descr="Gruppe von Personen mit einfarbiger Füllung">
-            <a:extLst>
-              <a:ext uri="{FF2B5EF4-FFF2-40B4-BE49-F238E27FC236}">
-                <a16:creationId xmlns:a16="http://schemas.microsoft.com/office/drawing/2014/main" id="{FF072489-227C-2F79-80E9-64AF30AE0496}"/>
-              </a:ext>
-            </a:extLst>
-          </p:cNvPr>
-          <p:cNvPicPr>
-            <a:picLocks noChangeAspect="1"/>
-          </p:cNvPicPr>
+              <a:t>Trigger</a:t>
+            </a:r>
+          </a:p>
+        </p:txBody>
+      </p:sp>
+      <p:sp>
+        <p:nvSpPr>
+          <p:cNvPr id="3" name="Textfeld 2">
+            <a:extLst>
+              <a:ext uri="{FF2B5EF4-FFF2-40B4-BE49-F238E27FC236}">
+                <a16:creationId xmlns:a16="http://schemas.microsoft.com/office/drawing/2014/main" id="{CDCAB8BE-3EEB-7EDB-E30D-5AFC99392313}"/>
+              </a:ext>
+            </a:extLst>
+          </p:cNvPr>
+          <p:cNvSpPr txBox="1"/>
           <p:nvPr/>
-        </p:nvPicPr>
-        <p:blipFill>
-          <a:blip>
-            <a:extLst>
-              <a:ext uri="{96DAC541-7B7A-43D3-8B79-37D633B846F1}">
-                <asvg:svgBlip xmlns:asvg="http://schemas.microsoft.com/office/drawing/2016/SVG/main" r:embed="rId2"/>
-              </a:ext>
-            </a:extLst>
-          </a:blip>
-          <a:stretch>
-            <a:fillRect/>
-          </a:stretch>
-        </p:blipFill>
+        </p:nvSpPr>
         <p:spPr>
           <a:xfrm>
-            <a:off x="1339756" y="2729677"/>
-            <a:ext cx="2801078" cy="2801078"/>
-          </a:xfrm>
-          <a:prstGeom prst="rect">
-            <a:avLst/>
-          </a:prstGeom>
-        </p:spPr>
-      </p:pic>
-      <p:pic>
-        <p:nvPicPr>
-          <p:cNvPr id="7" name="Grafik 6" descr="Kinder mit einfarbiger Füllung">
-            <a:extLst>
-              <a:ext uri="{FF2B5EF4-FFF2-40B4-BE49-F238E27FC236}">
-                <a16:creationId xmlns:a16="http://schemas.microsoft.com/office/drawing/2014/main" id="{EE3436D3-C44E-20DC-12F9-C99DE011F75E}"/>
-              </a:ext>
-            </a:extLst>
-          </p:cNvPr>
-          <p:cNvPicPr>
-            <a:picLocks noChangeAspect="1"/>
-          </p:cNvPicPr>
-          <p:nvPr/>
-        </p:nvPicPr>
-        <p:blipFill>
-          <a:blip>
-            <a:extLst>
-              <a:ext uri="{96DAC541-7B7A-43D3-8B79-37D633B846F1}">
-                <asvg:svgBlip xmlns:asvg="http://schemas.microsoft.com/office/drawing/2016/SVG/main" r:embed="rId3"/>
-              </a:ext>
-            </a:extLst>
-          </a:blip>
-          <a:stretch>
-            <a:fillRect/>
-          </a:stretch>
-        </p:blipFill>
-        <p:spPr>
-          <a:xfrm>
-            <a:off x="7563009" y="3311470"/>
-            <a:ext cx="2801078" cy="2801078"/>
-          </a:xfrm>
-          <a:prstGeom prst="rect">
-            <a:avLst/>
-          </a:prstGeom>
-        </p:spPr>
-      </p:pic>
-      <p:sp>
-        <p:nvSpPr>
-          <p:cNvPr id="8" name="Textfeld 7">
-            <a:extLst>
-              <a:ext uri="{FF2B5EF4-FFF2-40B4-BE49-F238E27FC236}">
-                <a16:creationId xmlns:a16="http://schemas.microsoft.com/office/drawing/2014/main" id="{125B85F7-0DF9-B6BB-958E-E72EED1FD442}"/>
-              </a:ext>
-            </a:extLst>
-          </p:cNvPr>
-          <p:cNvSpPr txBox="1"/>
-          <p:nvPr/>
-        </p:nvSpPr>
-        <p:spPr>
-          <a:xfrm>
-            <a:off x="2170119" y="5530755"/>
-            <a:ext cx="2694171" cy="369332"/>
+            <a:off x="931024" y="2050473"/>
+            <a:ext cx="8102139" cy="3416320"/>
           </a:xfrm>
           <a:prstGeom prst="rect">
             <a:avLst/>
@@ -5822,43 +5885,287 @@
           <a:lstStyle/>
           <a:p>
             <a:r>
-              <a:rPr lang="de-DE" dirty="0"/>
-              <a:t>Mitglieder</a:t>
-            </a:r>
-          </a:p>
-        </p:txBody>
-      </p:sp>
-      <p:sp>
-        <p:nvSpPr>
-          <p:cNvPr id="9" name="Textfeld 8">
-            <a:extLst>
-              <a:ext uri="{FF2B5EF4-FFF2-40B4-BE49-F238E27FC236}">
-                <a16:creationId xmlns:a16="http://schemas.microsoft.com/office/drawing/2014/main" id="{24BE59AB-3855-91B1-6726-7C65C80EEC86}"/>
-              </a:ext>
-            </a:extLst>
-          </p:cNvPr>
-          <p:cNvSpPr txBox="1"/>
-          <p:nvPr/>
-        </p:nvSpPr>
-        <p:spPr>
-          <a:xfrm>
-            <a:off x="8286465" y="5441751"/>
-            <a:ext cx="2694171" cy="369332"/>
-          </a:xfrm>
-          <a:prstGeom prst="rect">
-            <a:avLst/>
-          </a:prstGeom>
-          <a:noFill/>
-        </p:spPr>
-        <p:txBody>
-          <a:bodyPr wrap="square" rtlCol="0">
-            <a:spAutoFit/>
-          </a:bodyPr>
-          <a:lstStyle/>
-          <a:p>
-            <a:r>
-              <a:rPr lang="de-DE" dirty="0"/>
-              <a:t>Mitarbeiter</a:t>
+              <a:rPr lang="de-DE" b="1" dirty="0"/>
+              <a:t>Beispiel:</a:t>
+            </a:r>
+          </a:p>
+          <a:p>
+            <a:r>
+              <a:rPr lang="de-DE" dirty="0">
+                <a:solidFill>
+                  <a:srgbClr val="0070C0"/>
+                </a:solidFill>
+              </a:rPr>
+              <a:t>CREATE TRIGGER </a:t>
+            </a:r>
+            <a:r>
+              <a:rPr lang="de-DE" dirty="0" err="1"/>
+              <a:t>trg_ausleihe_insert</a:t>
+            </a:r>
+            <a:r>
+              <a:rPr lang="de-DE" dirty="0"/>
+              <a:t> </a:t>
+            </a:r>
+          </a:p>
+          <a:p>
+            <a:r>
+              <a:rPr lang="de-DE" dirty="0">
+                <a:solidFill>
+                  <a:srgbClr val="0070C0"/>
+                </a:solidFill>
+              </a:rPr>
+              <a:t>AFTER INSERT ON </a:t>
+            </a:r>
+            <a:r>
+              <a:rPr lang="de-DE" dirty="0"/>
+              <a:t>ausleihe </a:t>
+            </a:r>
+            <a:r>
+              <a:rPr lang="de-DE" dirty="0">
+                <a:solidFill>
+                  <a:srgbClr val="0070C0"/>
+                </a:solidFill>
+              </a:rPr>
+              <a:t>FOR EACH ROW </a:t>
+            </a:r>
+          </a:p>
+          <a:p>
+            <a:r>
+              <a:rPr lang="de-DE" dirty="0">
+                <a:solidFill>
+                  <a:srgbClr val="0070C0"/>
+                </a:solidFill>
+              </a:rPr>
+              <a:t>IF</a:t>
+            </a:r>
+            <a:r>
+              <a:rPr lang="de-DE" dirty="0"/>
+              <a:t> </a:t>
+            </a:r>
+            <a:r>
+              <a:rPr lang="de-DE" dirty="0" err="1"/>
+              <a:t>NEW.Status</a:t>
+            </a:r>
+            <a:r>
+              <a:rPr lang="de-DE" dirty="0"/>
+              <a:t> = 0 </a:t>
+            </a:r>
+            <a:r>
+              <a:rPr lang="de-DE" dirty="0">
+                <a:solidFill>
+                  <a:srgbClr val="0070C0"/>
+                </a:solidFill>
+              </a:rPr>
+              <a:t>THEN UPDATE </a:t>
+            </a:r>
+            <a:r>
+              <a:rPr lang="de-DE" dirty="0"/>
+              <a:t>medium </a:t>
+            </a:r>
+          </a:p>
+          <a:p>
+            <a:r>
+              <a:rPr lang="de-DE" dirty="0">
+                <a:solidFill>
+                  <a:srgbClr val="0070C0"/>
+                </a:solidFill>
+              </a:rPr>
+              <a:t>SET</a:t>
+            </a:r>
+            <a:r>
+              <a:rPr lang="de-DE" dirty="0"/>
+              <a:t> </a:t>
+            </a:r>
+            <a:r>
+              <a:rPr lang="de-DE" dirty="0" err="1"/>
+              <a:t>Verfuegbarkeit</a:t>
+            </a:r>
+            <a:r>
+              <a:rPr lang="de-DE" dirty="0"/>
+              <a:t> = 0 </a:t>
+            </a:r>
+            <a:r>
+              <a:rPr lang="de-DE" dirty="0">
+                <a:solidFill>
+                  <a:srgbClr val="0070C0"/>
+                </a:solidFill>
+              </a:rPr>
+              <a:t>WHERE</a:t>
+            </a:r>
+            <a:r>
+              <a:rPr lang="de-DE" dirty="0"/>
+              <a:t> </a:t>
+            </a:r>
+            <a:r>
+              <a:rPr lang="de-DE" dirty="0" err="1"/>
+              <a:t>MediumID</a:t>
+            </a:r>
+            <a:r>
+              <a:rPr lang="de-DE" dirty="0"/>
+              <a:t> = </a:t>
+            </a:r>
+            <a:r>
+              <a:rPr lang="de-DE" dirty="0" err="1"/>
+              <a:t>NEW.MediumID</a:t>
+            </a:r>
+            <a:r>
+              <a:rPr lang="de-DE" dirty="0"/>
+              <a:t>; </a:t>
+            </a:r>
+          </a:p>
+          <a:p>
+            <a:r>
+              <a:rPr lang="de-DE" dirty="0">
+                <a:solidFill>
+                  <a:srgbClr val="0070C0"/>
+                </a:solidFill>
+              </a:rPr>
+              <a:t>END IF$$</a:t>
+            </a:r>
+          </a:p>
+          <a:p>
+            <a:endParaRPr lang="de-DE" dirty="0"/>
+          </a:p>
+          <a:p>
+            <a:r>
+              <a:rPr lang="de-DE" dirty="0">
+                <a:solidFill>
+                  <a:srgbClr val="0070C0"/>
+                </a:solidFill>
+              </a:rPr>
+              <a:t>CREATE TRIGGER </a:t>
+            </a:r>
+            <a:r>
+              <a:rPr lang="de-DE" dirty="0" err="1"/>
+              <a:t>trg_ausleihe_update</a:t>
+            </a:r>
+            <a:r>
+              <a:rPr lang="de-DE" dirty="0"/>
+              <a:t> </a:t>
+            </a:r>
+          </a:p>
+          <a:p>
+            <a:r>
+              <a:rPr lang="de-DE" dirty="0">
+                <a:solidFill>
+                  <a:srgbClr val="0070C0"/>
+                </a:solidFill>
+              </a:rPr>
+              <a:t>AFTER UPDATE ON </a:t>
+            </a:r>
+            <a:r>
+              <a:rPr lang="de-DE" dirty="0"/>
+              <a:t>ausleihe </a:t>
+            </a:r>
+            <a:r>
+              <a:rPr lang="de-DE" dirty="0">
+                <a:solidFill>
+                  <a:srgbClr val="0070C0"/>
+                </a:solidFill>
+              </a:rPr>
+              <a:t>FOR EACH ROW </a:t>
+            </a:r>
+          </a:p>
+          <a:p>
+            <a:r>
+              <a:rPr lang="de-DE" dirty="0">
+                <a:solidFill>
+                  <a:srgbClr val="0070C0"/>
+                </a:solidFill>
+              </a:rPr>
+              <a:t>IF</a:t>
+            </a:r>
+            <a:r>
+              <a:rPr lang="de-DE" dirty="0"/>
+              <a:t> </a:t>
+            </a:r>
+            <a:r>
+              <a:rPr lang="de-DE" dirty="0" err="1"/>
+              <a:t>NEW.Status</a:t>
+            </a:r>
+            <a:r>
+              <a:rPr lang="de-DE" dirty="0"/>
+              <a:t> = 1 AND </a:t>
+            </a:r>
+            <a:r>
+              <a:rPr lang="de-DE" dirty="0" err="1"/>
+              <a:t>OLD.Status</a:t>
+            </a:r>
+            <a:r>
+              <a:rPr lang="de-DE" dirty="0"/>
+              <a:t> = 0 THEN </a:t>
+            </a:r>
+            <a:r>
+              <a:rPr lang="de-DE" dirty="0">
+                <a:solidFill>
+                  <a:srgbClr val="0070C0"/>
+                </a:solidFill>
+              </a:rPr>
+              <a:t>UPDATE</a:t>
+            </a:r>
+            <a:r>
+              <a:rPr lang="de-DE" dirty="0"/>
+              <a:t> medium </a:t>
+            </a:r>
+          </a:p>
+          <a:p>
+            <a:r>
+              <a:rPr lang="de-DE" dirty="0">
+                <a:solidFill>
+                  <a:srgbClr val="0070C0"/>
+                </a:solidFill>
+              </a:rPr>
+              <a:t>SET</a:t>
+            </a:r>
+            <a:r>
+              <a:rPr lang="de-DE" dirty="0"/>
+              <a:t> </a:t>
+            </a:r>
+            <a:r>
+              <a:rPr lang="de-DE" dirty="0" err="1"/>
+              <a:t>Verfuegbarkeit</a:t>
+            </a:r>
+            <a:r>
+              <a:rPr lang="de-DE" dirty="0"/>
+              <a:t> = 1 </a:t>
+            </a:r>
+            <a:r>
+              <a:rPr lang="de-DE" dirty="0">
+                <a:solidFill>
+                  <a:srgbClr val="0070C0"/>
+                </a:solidFill>
+              </a:rPr>
+              <a:t>WHERE</a:t>
+            </a:r>
+            <a:r>
+              <a:rPr lang="de-DE" dirty="0"/>
+              <a:t> </a:t>
+            </a:r>
+            <a:r>
+              <a:rPr lang="de-DE" dirty="0" err="1"/>
+              <a:t>MediumID</a:t>
+            </a:r>
+            <a:r>
+              <a:rPr lang="de-DE" dirty="0"/>
+              <a:t> = </a:t>
+            </a:r>
+            <a:r>
+              <a:rPr lang="de-DE" dirty="0" err="1"/>
+              <a:t>NEW.MediumID</a:t>
+            </a:r>
+            <a:r>
+              <a:rPr lang="de-DE" dirty="0"/>
+              <a:t>; </a:t>
+            </a:r>
+          </a:p>
+          <a:p>
+            <a:r>
+              <a:rPr lang="de-DE" dirty="0">
+                <a:solidFill>
+                  <a:srgbClr val="0070C0"/>
+                </a:solidFill>
+              </a:rPr>
+              <a:t>END IF$$</a:t>
             </a:r>
           </a:p>
         </p:txBody>
@@ -5866,7 +6173,7 @@
     </p:spTree>
     <p:extLst>
       <p:ext uri="{BB962C8B-B14F-4D97-AF65-F5344CB8AC3E}">
-        <p14:creationId xmlns:p14="http://schemas.microsoft.com/office/powerpoint/2010/main" val="3209845253"/>
+        <p14:creationId xmlns:p14="http://schemas.microsoft.com/office/powerpoint/2010/main" val="602306147"/>
       </p:ext>
     </p:extLst>
   </p:cSld>
@@ -5877,6 +6184,232 @@
 </file>
 
 <file path=ppt/slides/slide17.xml><?xml version="1.0" encoding="utf-8"?>
+<p:sld xmlns:a="http://schemas.openxmlformats.org/drawingml/2006/main" xmlns:r="http://schemas.openxmlformats.org/officeDocument/2006/relationships" xmlns:p="http://schemas.openxmlformats.org/presentationml/2006/main">
+  <p:cSld>
+    <p:spTree>
+      <p:nvGrpSpPr>
+        <p:cNvPr id="1" name="">
+          <a:extLst>
+            <a:ext uri="{FF2B5EF4-FFF2-40B4-BE49-F238E27FC236}">
+              <a16:creationId xmlns:a16="http://schemas.microsoft.com/office/drawing/2014/main" id="{0FC8D529-29E5-862C-7627-9E44544FA11A}"/>
+            </a:ext>
+          </a:extLst>
+        </p:cNvPr>
+        <p:cNvGrpSpPr/>
+        <p:nvPr/>
+      </p:nvGrpSpPr>
+      <p:grpSpPr>
+        <a:xfrm>
+          <a:off x="0" y="0"/>
+          <a:ext cx="0" cy="0"/>
+          <a:chOff x="0" y="0"/>
+          <a:chExt cx="0" cy="0"/>
+        </a:xfrm>
+      </p:grpSpPr>
+      <p:sp>
+        <p:nvSpPr>
+          <p:cNvPr id="2" name="Titel 1">
+            <a:extLst>
+              <a:ext uri="{FF2B5EF4-FFF2-40B4-BE49-F238E27FC236}">
+                <a16:creationId xmlns:a16="http://schemas.microsoft.com/office/drawing/2014/main" id="{323092EF-C915-4F77-85A0-B870ADCBD77B}"/>
+              </a:ext>
+            </a:extLst>
+          </p:cNvPr>
+          <p:cNvSpPr>
+            <a:spLocks noGrp="1"/>
+          </p:cNvSpPr>
+          <p:nvPr>
+            <p:ph type="title"/>
+          </p:nvPr>
+        </p:nvSpPr>
+        <p:spPr/>
+        <p:txBody>
+          <a:bodyPr/>
+          <a:lstStyle/>
+          <a:p>
+            <a:r>
+              <a:rPr lang="de-DE" dirty="0"/>
+              <a:t>Trigger</a:t>
+            </a:r>
+          </a:p>
+        </p:txBody>
+      </p:sp>
+      <p:sp>
+        <p:nvSpPr>
+          <p:cNvPr id="3" name="Textfeld 2">
+            <a:extLst>
+              <a:ext uri="{FF2B5EF4-FFF2-40B4-BE49-F238E27FC236}">
+                <a16:creationId xmlns:a16="http://schemas.microsoft.com/office/drawing/2014/main" id="{1FB5353B-5FDA-B518-907E-15E707ED0860}"/>
+              </a:ext>
+            </a:extLst>
+          </p:cNvPr>
+          <p:cNvSpPr txBox="1"/>
+          <p:nvPr/>
+        </p:nvSpPr>
+        <p:spPr>
+          <a:xfrm>
+            <a:off x="931024" y="2050473"/>
+            <a:ext cx="8102139" cy="1754326"/>
+          </a:xfrm>
+          <a:prstGeom prst="rect">
+            <a:avLst/>
+          </a:prstGeom>
+          <a:noFill/>
+        </p:spPr>
+        <p:txBody>
+          <a:bodyPr wrap="square" rtlCol="0">
+            <a:spAutoFit/>
+          </a:bodyPr>
+          <a:lstStyle/>
+          <a:p>
+            <a:r>
+              <a:rPr lang="de-DE" dirty="0">
+                <a:solidFill>
+                  <a:srgbClr val="0070C0"/>
+                </a:solidFill>
+              </a:rPr>
+              <a:t>CREATE TRIGGER </a:t>
+            </a:r>
+            <a:r>
+              <a:rPr lang="de-DE" dirty="0" err="1"/>
+              <a:t>trg_mahnung_sperre</a:t>
+            </a:r>
+            <a:endParaRPr lang="de-DE" dirty="0"/>
+          </a:p>
+          <a:p>
+            <a:r>
+              <a:rPr lang="de-DE" dirty="0">
+                <a:solidFill>
+                  <a:srgbClr val="0070C0"/>
+                </a:solidFill>
+              </a:rPr>
+              <a:t>AFTER INSERT ON </a:t>
+            </a:r>
+            <a:r>
+              <a:rPr lang="de-DE" dirty="0" err="1"/>
+              <a:t>mahnung</a:t>
+            </a:r>
+            <a:r>
+              <a:rPr lang="de-DE" dirty="0"/>
+              <a:t> </a:t>
+            </a:r>
+            <a:r>
+              <a:rPr lang="de-DE" dirty="0">
+                <a:solidFill>
+                  <a:srgbClr val="0070C0"/>
+                </a:solidFill>
+              </a:rPr>
+              <a:t>FOR EACH ROW    </a:t>
+            </a:r>
+          </a:p>
+          <a:p>
+            <a:r>
+              <a:rPr lang="de-DE" dirty="0">
+                <a:solidFill>
+                  <a:srgbClr val="0070C0"/>
+                </a:solidFill>
+              </a:rPr>
+              <a:t>IF</a:t>
+            </a:r>
+            <a:r>
+              <a:rPr lang="de-DE" dirty="0"/>
+              <a:t> </a:t>
+            </a:r>
+            <a:r>
+              <a:rPr lang="de-DE" dirty="0" err="1"/>
+              <a:t>NEW.Mahnstufe</a:t>
+            </a:r>
+            <a:r>
+              <a:rPr lang="de-DE" dirty="0"/>
+              <a:t> = 3 </a:t>
+            </a:r>
+            <a:r>
+              <a:rPr lang="de-DE" dirty="0">
+                <a:solidFill>
+                  <a:srgbClr val="0070C0"/>
+                </a:solidFill>
+              </a:rPr>
+              <a:t>THEN</a:t>
+            </a:r>
+            <a:r>
+              <a:rPr lang="de-DE" dirty="0"/>
+              <a:t>        </a:t>
+            </a:r>
+          </a:p>
+          <a:p>
+            <a:r>
+              <a:rPr lang="de-DE" dirty="0">
+                <a:solidFill>
+                  <a:srgbClr val="0070C0"/>
+                </a:solidFill>
+              </a:rPr>
+              <a:t>UPDATE</a:t>
+            </a:r>
+            <a:r>
+              <a:rPr lang="de-DE" dirty="0"/>
+              <a:t> </a:t>
+            </a:r>
+            <a:r>
+              <a:rPr lang="de-DE" dirty="0" err="1"/>
+              <a:t>mitglied</a:t>
+            </a:r>
+            <a:r>
+              <a:rPr lang="de-DE" dirty="0"/>
+              <a:t> SET Ausleiherlaubnis = 1        </a:t>
+            </a:r>
+          </a:p>
+          <a:p>
+            <a:r>
+              <a:rPr lang="de-DE" dirty="0">
+                <a:solidFill>
+                  <a:srgbClr val="0070C0"/>
+                </a:solidFill>
+              </a:rPr>
+              <a:t>WHERE </a:t>
+            </a:r>
+            <a:r>
+              <a:rPr lang="de-DE" dirty="0" err="1"/>
+              <a:t>PersonenID</a:t>
+            </a:r>
+            <a:r>
+              <a:rPr lang="de-DE" dirty="0"/>
+              <a:t> = </a:t>
+            </a:r>
+            <a:r>
+              <a:rPr lang="de-DE" dirty="0" err="1"/>
+              <a:t>NEW.MitgliedID</a:t>
+            </a:r>
+            <a:r>
+              <a:rPr lang="de-DE" dirty="0"/>
+              <a:t>;    </a:t>
+            </a:r>
+          </a:p>
+          <a:p>
+            <a:r>
+              <a:rPr lang="de-DE" dirty="0">
+                <a:solidFill>
+                  <a:srgbClr val="0070C0"/>
+                </a:solidFill>
+              </a:rPr>
+              <a:t>END IF$$</a:t>
+            </a:r>
+          </a:p>
+        </p:txBody>
+      </p:sp>
+    </p:spTree>
+    <p:extLst>
+      <p:ext uri="{BB962C8B-B14F-4D97-AF65-F5344CB8AC3E}">
+        <p14:creationId xmlns:p14="http://schemas.microsoft.com/office/powerpoint/2010/main" val="977944600"/>
+      </p:ext>
+    </p:extLst>
+  </p:cSld>
+  <p:clrMapOvr>
+    <a:masterClrMapping/>
+  </p:clrMapOvr>
+</p:sld>
+</file>
+
+<file path=ppt/slides/slide18.xml><?xml version="1.0" encoding="utf-8"?>
 <p:sld xmlns:a="http://schemas.openxmlformats.org/drawingml/2006/main" xmlns:r="http://schemas.openxmlformats.org/officeDocument/2006/relationships" xmlns:p="http://schemas.openxmlformats.org/presentationml/2006/main">
   <p:cSld>
     <p:spTree>
@@ -6756,6 +7289,212 @@
 </p:sld>
 </file>
 
+<file path=ppt/slides/slide19.xml><?xml version="1.0" encoding="utf-8"?>
+<p:sld xmlns:a="http://schemas.openxmlformats.org/drawingml/2006/main" xmlns:r="http://schemas.openxmlformats.org/officeDocument/2006/relationships" xmlns:p="http://schemas.openxmlformats.org/presentationml/2006/main">
+  <p:cSld>
+    <p:spTree>
+      <p:nvGrpSpPr>
+        <p:cNvPr id="1" name="">
+          <a:extLst>
+            <a:ext uri="{FF2B5EF4-FFF2-40B4-BE49-F238E27FC236}">
+              <a16:creationId xmlns:a16="http://schemas.microsoft.com/office/drawing/2014/main" id="{3BAB9CA6-964C-0A1D-85C9-E295C4DB862E}"/>
+            </a:ext>
+          </a:extLst>
+        </p:cNvPr>
+        <p:cNvGrpSpPr/>
+        <p:nvPr/>
+      </p:nvGrpSpPr>
+      <p:grpSpPr>
+        <a:xfrm>
+          <a:off x="0" y="0"/>
+          <a:ext cx="0" cy="0"/>
+          <a:chOff x="0" y="0"/>
+          <a:chExt cx="0" cy="0"/>
+        </a:xfrm>
+      </p:grpSpPr>
+      <p:sp>
+        <p:nvSpPr>
+          <p:cNvPr id="2" name="Titel 1">
+            <a:extLst>
+              <a:ext uri="{FF2B5EF4-FFF2-40B4-BE49-F238E27FC236}">
+                <a16:creationId xmlns:a16="http://schemas.microsoft.com/office/drawing/2014/main" id="{2CB994A6-A646-821B-C28C-9C9385BE011D}"/>
+              </a:ext>
+            </a:extLst>
+          </p:cNvPr>
+          <p:cNvSpPr>
+            <a:spLocks noGrp="1"/>
+          </p:cNvSpPr>
+          <p:nvPr>
+            <p:ph type="title"/>
+          </p:nvPr>
+        </p:nvSpPr>
+        <p:spPr/>
+        <p:txBody>
+          <a:bodyPr/>
+          <a:lstStyle/>
+          <a:p>
+            <a:r>
+              <a:rPr lang="de-DE" dirty="0"/>
+              <a:t>Views</a:t>
+            </a:r>
+          </a:p>
+        </p:txBody>
+      </p:sp>
+      <p:pic>
+        <p:nvPicPr>
+          <p:cNvPr id="5" name="Grafik 4" descr="Gruppe von Personen mit einfarbiger Füllung">
+            <a:extLst>
+              <a:ext uri="{FF2B5EF4-FFF2-40B4-BE49-F238E27FC236}">
+                <a16:creationId xmlns:a16="http://schemas.microsoft.com/office/drawing/2014/main" id="{FF072489-227C-2F79-80E9-64AF30AE0496}"/>
+              </a:ext>
+            </a:extLst>
+          </p:cNvPr>
+          <p:cNvPicPr>
+            <a:picLocks noChangeAspect="1"/>
+          </p:cNvPicPr>
+          <p:nvPr/>
+        </p:nvPicPr>
+        <p:blipFill>
+          <a:blip>
+            <a:extLst>
+              <a:ext uri="{96DAC541-7B7A-43D3-8B79-37D633B846F1}">
+                <asvg:svgBlip xmlns:asvg="http://schemas.microsoft.com/office/drawing/2016/SVG/main" r:embed="rId2"/>
+              </a:ext>
+            </a:extLst>
+          </a:blip>
+          <a:stretch>
+            <a:fillRect/>
+          </a:stretch>
+        </p:blipFill>
+        <p:spPr>
+          <a:xfrm>
+            <a:off x="1339756" y="2729677"/>
+            <a:ext cx="2801078" cy="2801078"/>
+          </a:xfrm>
+          <a:prstGeom prst="rect">
+            <a:avLst/>
+          </a:prstGeom>
+        </p:spPr>
+      </p:pic>
+      <p:pic>
+        <p:nvPicPr>
+          <p:cNvPr id="7" name="Grafik 6" descr="Kinder mit einfarbiger Füllung">
+            <a:extLst>
+              <a:ext uri="{FF2B5EF4-FFF2-40B4-BE49-F238E27FC236}">
+                <a16:creationId xmlns:a16="http://schemas.microsoft.com/office/drawing/2014/main" id="{EE3436D3-C44E-20DC-12F9-C99DE011F75E}"/>
+              </a:ext>
+            </a:extLst>
+          </p:cNvPr>
+          <p:cNvPicPr>
+            <a:picLocks noChangeAspect="1"/>
+          </p:cNvPicPr>
+          <p:nvPr/>
+        </p:nvPicPr>
+        <p:blipFill>
+          <a:blip>
+            <a:extLst>
+              <a:ext uri="{96DAC541-7B7A-43D3-8B79-37D633B846F1}">
+                <asvg:svgBlip xmlns:asvg="http://schemas.microsoft.com/office/drawing/2016/SVG/main" r:embed="rId3"/>
+              </a:ext>
+            </a:extLst>
+          </a:blip>
+          <a:stretch>
+            <a:fillRect/>
+          </a:stretch>
+        </p:blipFill>
+        <p:spPr>
+          <a:xfrm>
+            <a:off x="7563009" y="3311470"/>
+            <a:ext cx="2801078" cy="2801078"/>
+          </a:xfrm>
+          <a:prstGeom prst="rect">
+            <a:avLst/>
+          </a:prstGeom>
+        </p:spPr>
+      </p:pic>
+      <p:sp>
+        <p:nvSpPr>
+          <p:cNvPr id="8" name="Textfeld 7">
+            <a:extLst>
+              <a:ext uri="{FF2B5EF4-FFF2-40B4-BE49-F238E27FC236}">
+                <a16:creationId xmlns:a16="http://schemas.microsoft.com/office/drawing/2014/main" id="{125B85F7-0DF9-B6BB-958E-E72EED1FD442}"/>
+              </a:ext>
+            </a:extLst>
+          </p:cNvPr>
+          <p:cNvSpPr txBox="1"/>
+          <p:nvPr/>
+        </p:nvSpPr>
+        <p:spPr>
+          <a:xfrm>
+            <a:off x="2170119" y="5530755"/>
+            <a:ext cx="2694171" cy="369332"/>
+          </a:xfrm>
+          <a:prstGeom prst="rect">
+            <a:avLst/>
+          </a:prstGeom>
+          <a:noFill/>
+        </p:spPr>
+        <p:txBody>
+          <a:bodyPr wrap="square" rtlCol="0">
+            <a:spAutoFit/>
+          </a:bodyPr>
+          <a:lstStyle/>
+          <a:p>
+            <a:r>
+              <a:rPr lang="de-DE" dirty="0"/>
+              <a:t>Mitglieder</a:t>
+            </a:r>
+          </a:p>
+        </p:txBody>
+      </p:sp>
+      <p:sp>
+        <p:nvSpPr>
+          <p:cNvPr id="9" name="Textfeld 8">
+            <a:extLst>
+              <a:ext uri="{FF2B5EF4-FFF2-40B4-BE49-F238E27FC236}">
+                <a16:creationId xmlns:a16="http://schemas.microsoft.com/office/drawing/2014/main" id="{24BE59AB-3855-91B1-6726-7C65C80EEC86}"/>
+              </a:ext>
+            </a:extLst>
+          </p:cNvPr>
+          <p:cNvSpPr txBox="1"/>
+          <p:nvPr/>
+        </p:nvSpPr>
+        <p:spPr>
+          <a:xfrm>
+            <a:off x="8286465" y="5441751"/>
+            <a:ext cx="2694171" cy="369332"/>
+          </a:xfrm>
+          <a:prstGeom prst="rect">
+            <a:avLst/>
+          </a:prstGeom>
+          <a:noFill/>
+        </p:spPr>
+        <p:txBody>
+          <a:bodyPr wrap="square" rtlCol="0">
+            <a:spAutoFit/>
+          </a:bodyPr>
+          <a:lstStyle/>
+          <a:p>
+            <a:r>
+              <a:rPr lang="de-DE" dirty="0"/>
+              <a:t>Mitarbeiter</a:t>
+            </a:r>
+          </a:p>
+        </p:txBody>
+      </p:sp>
+    </p:spTree>
+    <p:extLst>
+      <p:ext uri="{BB962C8B-B14F-4D97-AF65-F5344CB8AC3E}">
+        <p14:creationId xmlns:p14="http://schemas.microsoft.com/office/powerpoint/2010/main" val="3209845253"/>
+      </p:ext>
+    </p:extLst>
+  </p:cSld>
+  <p:clrMapOvr>
+    <a:masterClrMapping/>
+  </p:clrMapOvr>
+</p:sld>
+</file>
+
 <file path=ppt/slides/slide2.xml><?xml version="1.0" encoding="utf-8"?>
 <p:sld xmlns:a="http://schemas.openxmlformats.org/drawingml/2006/main" xmlns:r="http://schemas.openxmlformats.org/officeDocument/2006/relationships" xmlns:p="http://schemas.openxmlformats.org/presentationml/2006/main">
   <p:cSld>
@@ -6860,6 +7599,448 @@
     <p:extLst>
       <p:ext uri="{BB962C8B-B14F-4D97-AF65-F5344CB8AC3E}">
         <p14:creationId xmlns:p14="http://schemas.microsoft.com/office/powerpoint/2010/main" val="120302969"/>
+      </p:ext>
+    </p:extLst>
+  </p:cSld>
+  <p:clrMapOvr>
+    <a:masterClrMapping/>
+  </p:clrMapOvr>
+</p:sld>
+</file>
+
+<file path=ppt/slides/slide20.xml><?xml version="1.0" encoding="utf-8"?>
+<p:sld xmlns:a="http://schemas.openxmlformats.org/drawingml/2006/main" xmlns:r="http://schemas.openxmlformats.org/officeDocument/2006/relationships" xmlns:p="http://schemas.openxmlformats.org/presentationml/2006/main">
+  <p:cSld>
+    <p:spTree>
+      <p:nvGrpSpPr>
+        <p:cNvPr id="1" name="">
+          <a:extLst>
+            <a:ext uri="{FF2B5EF4-FFF2-40B4-BE49-F238E27FC236}">
+              <a16:creationId xmlns:a16="http://schemas.microsoft.com/office/drawing/2014/main" id="{DDBCF056-7E44-A81B-DB8D-38E473FE3B62}"/>
+            </a:ext>
+          </a:extLst>
+        </p:cNvPr>
+        <p:cNvGrpSpPr/>
+        <p:nvPr/>
+      </p:nvGrpSpPr>
+      <p:grpSpPr>
+        <a:xfrm>
+          <a:off x="0" y="0"/>
+          <a:ext cx="0" cy="0"/>
+          <a:chOff x="0" y="0"/>
+          <a:chExt cx="0" cy="0"/>
+        </a:xfrm>
+      </p:grpSpPr>
+      <p:sp>
+        <p:nvSpPr>
+          <p:cNvPr id="2" name="Titel 1">
+            <a:extLst>
+              <a:ext uri="{FF2B5EF4-FFF2-40B4-BE49-F238E27FC236}">
+                <a16:creationId xmlns:a16="http://schemas.microsoft.com/office/drawing/2014/main" id="{A5DE0881-0D33-C204-06BA-28E24AB92AF4}"/>
+              </a:ext>
+            </a:extLst>
+          </p:cNvPr>
+          <p:cNvSpPr>
+            <a:spLocks noGrp="1"/>
+          </p:cNvSpPr>
+          <p:nvPr>
+            <p:ph type="title"/>
+          </p:nvPr>
+        </p:nvSpPr>
+        <p:spPr/>
+        <p:txBody>
+          <a:bodyPr/>
+          <a:lstStyle/>
+          <a:p>
+            <a:r>
+              <a:rPr lang="de-DE" dirty="0"/>
+              <a:t>Views</a:t>
+            </a:r>
+          </a:p>
+        </p:txBody>
+      </p:sp>
+      <p:pic>
+        <p:nvPicPr>
+          <p:cNvPr id="5" name="Grafik 4" descr="Gruppe von Personen mit einfarbiger Füllung">
+            <a:extLst>
+              <a:ext uri="{FF2B5EF4-FFF2-40B4-BE49-F238E27FC236}">
+                <a16:creationId xmlns:a16="http://schemas.microsoft.com/office/drawing/2014/main" id="{76BAD4D3-A9A2-9EA4-F5AA-2DE623C503C3}"/>
+              </a:ext>
+            </a:extLst>
+          </p:cNvPr>
+          <p:cNvPicPr>
+            <a:picLocks noChangeAspect="1"/>
+          </p:cNvPicPr>
+          <p:nvPr/>
+        </p:nvPicPr>
+        <p:blipFill>
+          <a:blip>
+            <a:extLst>
+              <a:ext uri="{96DAC541-7B7A-43D3-8B79-37D633B846F1}">
+                <asvg:svgBlip xmlns:asvg="http://schemas.microsoft.com/office/drawing/2016/SVG/main" r:embed="rId2"/>
+              </a:ext>
+            </a:extLst>
+          </a:blip>
+          <a:stretch>
+            <a:fillRect/>
+          </a:stretch>
+        </p:blipFill>
+        <p:spPr>
+          <a:xfrm>
+            <a:off x="1339756" y="2729677"/>
+            <a:ext cx="2801078" cy="2801078"/>
+          </a:xfrm>
+          <a:prstGeom prst="rect">
+            <a:avLst/>
+          </a:prstGeom>
+        </p:spPr>
+      </p:pic>
+      <p:sp>
+        <p:nvSpPr>
+          <p:cNvPr id="8" name="Textfeld 7">
+            <a:extLst>
+              <a:ext uri="{FF2B5EF4-FFF2-40B4-BE49-F238E27FC236}">
+                <a16:creationId xmlns:a16="http://schemas.microsoft.com/office/drawing/2014/main" id="{0FED49D0-36B0-B634-4364-03FEF6783150}"/>
+              </a:ext>
+            </a:extLst>
+          </p:cNvPr>
+          <p:cNvSpPr txBox="1"/>
+          <p:nvPr/>
+        </p:nvSpPr>
+        <p:spPr>
+          <a:xfrm>
+            <a:off x="2170119" y="5530755"/>
+            <a:ext cx="2694171" cy="369332"/>
+          </a:xfrm>
+          <a:prstGeom prst="rect">
+            <a:avLst/>
+          </a:prstGeom>
+          <a:noFill/>
+        </p:spPr>
+        <p:txBody>
+          <a:bodyPr wrap="square" rtlCol="0">
+            <a:spAutoFit/>
+          </a:bodyPr>
+          <a:lstStyle/>
+          <a:p>
+            <a:r>
+              <a:rPr lang="de-DE" dirty="0"/>
+              <a:t>Mitglieder</a:t>
+            </a:r>
+          </a:p>
+        </p:txBody>
+      </p:sp>
+      <p:sp>
+        <p:nvSpPr>
+          <p:cNvPr id="3" name="Textfeld 2">
+            <a:extLst>
+              <a:ext uri="{FF2B5EF4-FFF2-40B4-BE49-F238E27FC236}">
+                <a16:creationId xmlns:a16="http://schemas.microsoft.com/office/drawing/2014/main" id="{4418BE1D-D6E9-F9D8-8E9C-1256E52E1B81}"/>
+              </a:ext>
+            </a:extLst>
+          </p:cNvPr>
+          <p:cNvSpPr txBox="1"/>
+          <p:nvPr/>
+        </p:nvSpPr>
+        <p:spPr>
+          <a:xfrm>
+            <a:off x="4864290" y="2114435"/>
+            <a:ext cx="7078327" cy="3416320"/>
+          </a:xfrm>
+          <a:prstGeom prst="rect">
+            <a:avLst/>
+          </a:prstGeom>
+          <a:noFill/>
+        </p:spPr>
+        <p:txBody>
+          <a:bodyPr wrap="square" rtlCol="0">
+            <a:spAutoFit/>
+          </a:bodyPr>
+          <a:lstStyle/>
+          <a:p>
+            <a:r>
+              <a:rPr lang="de-DE" dirty="0">
+                <a:solidFill>
+                  <a:srgbClr val="0070C0"/>
+                </a:solidFill>
+              </a:rPr>
+              <a:t>CREATE VIEW</a:t>
+            </a:r>
+            <a:r>
+              <a:rPr lang="de-DE" dirty="0"/>
+              <a:t> </a:t>
+            </a:r>
+            <a:r>
+              <a:rPr lang="de-DE" dirty="0" err="1"/>
+              <a:t>v_regalfaecher</a:t>
+            </a:r>
+            <a:r>
+              <a:rPr lang="de-DE" dirty="0"/>
+              <a:t> </a:t>
+            </a:r>
+            <a:r>
+              <a:rPr lang="de-DE" dirty="0">
+                <a:solidFill>
+                  <a:srgbClr val="0070C0"/>
+                </a:solidFill>
+              </a:rPr>
+              <a:t>AS</a:t>
+            </a:r>
+          </a:p>
+          <a:p>
+            <a:r>
+              <a:rPr lang="de-DE" dirty="0">
+                <a:solidFill>
+                  <a:srgbClr val="0070C0"/>
+                </a:solidFill>
+              </a:rPr>
+              <a:t>SELECT</a:t>
+            </a:r>
+          </a:p>
+          <a:p>
+            <a:r>
+              <a:rPr lang="de-DE" dirty="0"/>
+              <a:t>    </a:t>
+            </a:r>
+            <a:r>
+              <a:rPr lang="de-DE" dirty="0" err="1"/>
+              <a:t>r.Regalnummer</a:t>
+            </a:r>
+            <a:r>
+              <a:rPr lang="de-DE" dirty="0"/>
+              <a:t>,</a:t>
+            </a:r>
+          </a:p>
+          <a:p>
+            <a:r>
+              <a:rPr lang="de-DE" dirty="0"/>
+              <a:t>    </a:t>
+            </a:r>
+            <a:r>
+              <a:rPr lang="de-DE" dirty="0" err="1"/>
+              <a:t>r.Fachnummer</a:t>
+            </a:r>
+            <a:r>
+              <a:rPr lang="de-DE" dirty="0"/>
+              <a:t>,</a:t>
+            </a:r>
+          </a:p>
+          <a:p>
+            <a:r>
+              <a:rPr lang="de-DE" dirty="0"/>
+              <a:t>    </a:t>
+            </a:r>
+            <a:r>
+              <a:rPr lang="de-DE" dirty="0" err="1"/>
+              <a:t>m.Titel</a:t>
+            </a:r>
+            <a:r>
+              <a:rPr lang="de-DE" dirty="0"/>
+              <a:t>,</a:t>
+            </a:r>
+          </a:p>
+          <a:p>
+            <a:r>
+              <a:rPr lang="de-DE" dirty="0"/>
+              <a:t>    </a:t>
+            </a:r>
+            <a:r>
+              <a:rPr lang="de-DE" dirty="0">
+                <a:solidFill>
+                  <a:srgbClr val="0070C0"/>
+                </a:solidFill>
+              </a:rPr>
+              <a:t>CASE</a:t>
+            </a:r>
+          </a:p>
+          <a:p>
+            <a:r>
+              <a:rPr lang="de-DE" dirty="0"/>
+              <a:t>        </a:t>
+            </a:r>
+            <a:r>
+              <a:rPr lang="de-DE" dirty="0">
+                <a:solidFill>
+                  <a:srgbClr val="0070C0"/>
+                </a:solidFill>
+              </a:rPr>
+              <a:t>WHEN</a:t>
+            </a:r>
+            <a:r>
+              <a:rPr lang="de-DE" dirty="0"/>
+              <a:t> </a:t>
+            </a:r>
+            <a:r>
+              <a:rPr lang="de-DE" dirty="0" err="1"/>
+              <a:t>m.Verfuegbarkeit</a:t>
+            </a:r>
+            <a:r>
+              <a:rPr lang="de-DE" dirty="0"/>
+              <a:t> = 1 </a:t>
+            </a:r>
+            <a:r>
+              <a:rPr lang="de-DE" dirty="0">
+                <a:solidFill>
+                  <a:srgbClr val="0070C0"/>
+                </a:solidFill>
+              </a:rPr>
+              <a:t>THEN</a:t>
+            </a:r>
+            <a:r>
+              <a:rPr lang="de-DE" dirty="0"/>
+              <a:t> 'Verfügbar'</a:t>
+            </a:r>
+          </a:p>
+          <a:p>
+            <a:r>
+              <a:rPr lang="de-DE" dirty="0"/>
+              <a:t>        </a:t>
+            </a:r>
+            <a:r>
+              <a:rPr lang="de-DE" dirty="0">
+                <a:solidFill>
+                  <a:srgbClr val="0070C0"/>
+                </a:solidFill>
+              </a:rPr>
+              <a:t>ELSE</a:t>
+            </a:r>
+            <a:r>
+              <a:rPr lang="de-DE" dirty="0"/>
+              <a:t> 'Nicht verfügbar'</a:t>
+            </a:r>
+          </a:p>
+          <a:p>
+            <a:r>
+              <a:rPr lang="de-DE" dirty="0"/>
+              <a:t>    </a:t>
+            </a:r>
+            <a:r>
+              <a:rPr lang="de-DE" dirty="0">
+                <a:solidFill>
+                  <a:srgbClr val="0070C0"/>
+                </a:solidFill>
+              </a:rPr>
+              <a:t>END AS</a:t>
+            </a:r>
+            <a:r>
+              <a:rPr lang="de-DE" dirty="0"/>
+              <a:t> </a:t>
+            </a:r>
+            <a:r>
+              <a:rPr lang="de-DE" dirty="0" err="1"/>
+              <a:t>Verfuegbarkeit</a:t>
+            </a:r>
+            <a:endParaRPr lang="de-DE" dirty="0"/>
+          </a:p>
+          <a:p>
+            <a:r>
+              <a:rPr lang="de-DE" dirty="0">
+                <a:solidFill>
+                  <a:srgbClr val="0070C0"/>
+                </a:solidFill>
+              </a:rPr>
+              <a:t>FROM</a:t>
+            </a:r>
+            <a:r>
+              <a:rPr lang="de-DE" dirty="0"/>
+              <a:t> regalfach r</a:t>
+            </a:r>
+          </a:p>
+          <a:p>
+            <a:r>
+              <a:rPr lang="de-DE" dirty="0">
+                <a:solidFill>
+                  <a:srgbClr val="0070C0"/>
+                </a:solidFill>
+              </a:rPr>
+              <a:t>LEFT JOIN</a:t>
+            </a:r>
+            <a:r>
+              <a:rPr lang="de-DE" dirty="0"/>
+              <a:t> </a:t>
+            </a:r>
+            <a:r>
+              <a:rPr lang="de-DE" dirty="0" err="1"/>
+              <a:t>analogesmedium</a:t>
+            </a:r>
+            <a:r>
+              <a:rPr lang="de-DE" dirty="0"/>
+              <a:t> am </a:t>
+            </a:r>
+            <a:r>
+              <a:rPr lang="de-DE" dirty="0">
+                <a:solidFill>
+                  <a:srgbClr val="0070C0"/>
+                </a:solidFill>
+              </a:rPr>
+              <a:t>ON</a:t>
+            </a:r>
+            <a:r>
+              <a:rPr lang="de-DE" dirty="0"/>
+              <a:t> </a:t>
+            </a:r>
+            <a:r>
+              <a:rPr lang="de-DE" dirty="0" err="1"/>
+              <a:t>am.RegalfachID</a:t>
+            </a:r>
+            <a:r>
+              <a:rPr lang="de-DE" dirty="0"/>
+              <a:t> = </a:t>
+            </a:r>
+            <a:r>
+              <a:rPr lang="de-DE" dirty="0" err="1"/>
+              <a:t>r.RegalfachID</a:t>
+            </a:r>
+            <a:endParaRPr lang="de-DE" dirty="0"/>
+          </a:p>
+          <a:p>
+            <a:r>
+              <a:rPr lang="de-DE" dirty="0">
+                <a:solidFill>
+                  <a:srgbClr val="0070C0"/>
+                </a:solidFill>
+              </a:rPr>
+              <a:t>LEFT JOIN</a:t>
+            </a:r>
+            <a:r>
+              <a:rPr lang="de-DE" dirty="0"/>
+              <a:t> medium         m  </a:t>
+            </a:r>
+            <a:r>
+              <a:rPr lang="de-DE" dirty="0">
+                <a:solidFill>
+                  <a:srgbClr val="0070C0"/>
+                </a:solidFill>
+              </a:rPr>
+              <a:t>ON</a:t>
+            </a:r>
+            <a:r>
+              <a:rPr lang="de-DE" dirty="0"/>
+              <a:t> </a:t>
+            </a:r>
+            <a:r>
+              <a:rPr lang="de-DE" dirty="0" err="1"/>
+              <a:t>m.MediumID</a:t>
+            </a:r>
+            <a:r>
+              <a:rPr lang="de-DE" dirty="0"/>
+              <a:t>     = </a:t>
+            </a:r>
+            <a:r>
+              <a:rPr lang="de-DE" dirty="0" err="1"/>
+              <a:t>am.MediumID</a:t>
+            </a:r>
+            <a:r>
+              <a:rPr lang="de-DE" dirty="0"/>
+              <a:t>;</a:t>
+            </a:r>
+          </a:p>
+        </p:txBody>
+      </p:sp>
+    </p:spTree>
+    <p:extLst>
+      <p:ext uri="{BB962C8B-B14F-4D97-AF65-F5344CB8AC3E}">
+        <p14:creationId xmlns:p14="http://schemas.microsoft.com/office/powerpoint/2010/main" val="697747675"/>
       </p:ext>
     </p:extLst>
   </p:cSld>
